--- a/RUL_censored_conformal_handover/01_slides/第二次课_从想法到能跑的东西.pptx
+++ b/RUL_censored_conformal_handover/01_slides/第二次课_从想法到能跑的东西.pptx
@@ -21,9 +21,15 @@
     <p:sldId id="269" r:id="rId15"/>
     <p:sldId id="270" r:id="rId16"/>
     <p:sldId id="271" r:id="rId17"/>
+    <p:sldId id="272" r:id="rId18"/>
+    <p:sldId id="273" r:id="rId19"/>
+    <p:sldId id="274" r:id="rId20"/>
+    <p:sldId id="275" r:id="rId21"/>
+    <p:sldId id="276" r:id="rId22"/>
+    <p:sldId id="277" r:id="rId23"/>
   </p:sldIdLst>
   <p:notesMasterIdLst>
-    <p:notesMasterId r:id="rId18"/>
+    <p:notesMasterId r:id="rId24"/>
   </p:notesMasterIdLst>
   <p:sldSz cx="12192000" cy="6858000"/>
   <p:notesSz cx="6858000" cy="12192000"/>
@@ -1140,8 +1146,8 @@
           <a:p>
             <a:r>
               <a:rPr lang="en-US" dirty="0"/>
-              <a:t>作业二和作业三都有标准答案，下次课开头先对答案。
-下次课的第一项 Mondrian 校准是移交文档里下一步的第一优先级，提前让学生读论文一第 6.2 节。</a:t>
+              <a:t>这一页对着移交文档第 5 节念，一条一行。全部通过。
+传感器 6 的 std 是 0.0014，所以判据必须是 0.01 而不是 0.001，这是代码里改过的一处。</a:t>
             </a:r>
             <a:endParaRPr lang="en-US" dirty="0"/>
           </a:p>
@@ -1165,6 +1171,273 @@
             <a:fld id="{F7021451-1387-4CA6-816F-3879F97B5CBC}" type="slidenum">
               <a:rPr lang="en-US"/>
               <a:t>16</a:t>
+            </a:fld>
+            <a:endParaRPr lang="en-US"/>
+          </a:p>
+        </p:txBody>
+      </p:sp>
+    </p:spTree>
+    <p:extLst>
+      <p:ext uri="{BB962C8B-B14F-4D97-AF65-F5344CB8AC3E}">
+        <p14:creationId xmlns:p14="http://schemas.microsoft.com/office/powerpoint/2010/main" val="1024086991"/>
+      </p:ext>
+    </p:extLst>
+  </p:cSld>
+  <p:clrMapOvr>
+    <a:masterClrMapping/>
+  </p:clrMapOvr>
+</p:notes>
+</file>
+
+<file path=ppt/notesSlides/notesSlide17.xml><?xml version="1.0" encoding="utf-8"?>
+<p:notes xmlns:a="http://schemas.openxmlformats.org/drawingml/2006/main" xmlns:r="http://schemas.openxmlformats.org/officeDocument/2006/relationships" xmlns:p="http://schemas.openxmlformats.org/presentationml/2006/main">
+  <p:cSld>
+    <p:spTree>
+      <p:nvGrpSpPr>
+        <p:cNvPr id="1" name=""/>
+        <p:cNvGrpSpPr/>
+        <p:nvPr/>
+      </p:nvGrpSpPr>
+      <p:grpSpPr>
+        <a:xfrm>
+          <a:off x="0" y="0"/>
+          <a:ext cx="0" cy="0"/>
+          <a:chOff x="0" y="0"/>
+          <a:chExt cx="0" cy="0"/>
+        </a:xfrm>
+      </p:grpSpPr>
+      <p:sp>
+        <p:nvSpPr>
+          <p:cNvPr id="2" name="Slide Image Placeholder 1"/>
+          <p:cNvSpPr>
+            <a:spLocks noGrp="1" noRot="1" noChangeAspect="1"/>
+          </p:cNvSpPr>
+          <p:nvPr>
+            <p:ph type="sldImg"/>
+          </p:nvPr>
+        </p:nvSpPr>
+        <p:spPr/>
+      </p:sp>
+      <p:sp>
+        <p:nvSpPr>
+          <p:cNvPr id="3" name="Notes Placeholder 2"/>
+          <p:cNvSpPr>
+            <a:spLocks noGrp="1"/>
+          </p:cNvSpPr>
+          <p:nvPr>
+            <p:ph type="body" idx="1"/>
+          </p:nvPr>
+        </p:nvSpPr>
+        <p:spPr/>
+        <p:txBody>
+          <a:bodyPr/>
+          <a:lstStyle/>
+          <a:p>
+            <a:r>
+              <a:rPr lang="en-US" dirty="0"/>
+              <a:t>F04 右图是一条水平线，40 台。让学生说出为什么：C_MIN = 60 &gt; c0。如果把 C_MIN 调到 20，这条线就会掉下来。
+F05 权重在 t 大于 250 处顶到 60，是下限截断在起作用，不是真实似然比。</a:t>
+            </a:r>
+            <a:endParaRPr lang="en-US" dirty="0"/>
+          </a:p>
+        </p:txBody>
+      </p:sp>
+      <p:sp>
+        <p:nvSpPr>
+          <p:cNvPr id="4" name="Slide Number Placeholder 3"/>
+          <p:cNvSpPr>
+            <a:spLocks noGrp="1"/>
+          </p:cNvSpPr>
+          <p:nvPr>
+            <p:ph type="sldNum" sz="quarter" idx="10"/>
+          </p:nvPr>
+        </p:nvSpPr>
+        <p:spPr/>
+        <p:txBody>
+          <a:bodyPr/>
+          <a:lstStyle/>
+          <a:p>
+            <a:fld id="{F7021451-1387-4CA6-816F-3879F97B5CBC}" type="slidenum">
+              <a:rPr lang="en-US"/>
+              <a:t>17</a:t>
+            </a:fld>
+            <a:endParaRPr lang="en-US"/>
+          </a:p>
+        </p:txBody>
+      </p:sp>
+    </p:spTree>
+    <p:extLst>
+      <p:ext uri="{BB962C8B-B14F-4D97-AF65-F5344CB8AC3E}">
+        <p14:creationId xmlns:p14="http://schemas.microsoft.com/office/powerpoint/2010/main" val="1024086991"/>
+      </p:ext>
+    </p:extLst>
+  </p:cSld>
+  <p:clrMapOvr>
+    <a:masterClrMapping/>
+  </p:clrMapOvr>
+</p:notes>
+</file>
+
+<file path=ppt/notesSlides/notesSlide18.xml><?xml version="1.0" encoding="utf-8"?>
+<p:notes xmlns:a="http://schemas.openxmlformats.org/drawingml/2006/main" xmlns:r="http://schemas.openxmlformats.org/officeDocument/2006/relationships" xmlns:p="http://schemas.openxmlformats.org/presentationml/2006/main">
+  <p:cSld>
+    <p:spTree>
+      <p:nvGrpSpPr>
+        <p:cNvPr id="1" name=""/>
+        <p:cNvGrpSpPr/>
+        <p:nvPr/>
+      </p:nvGrpSpPr>
+      <p:grpSpPr>
+        <a:xfrm>
+          <a:off x="0" y="0"/>
+          <a:ext cx="0" cy="0"/>
+          <a:chOff x="0" y="0"/>
+          <a:chExt cx="0" cy="0"/>
+        </a:xfrm>
+      </p:grpSpPr>
+      <p:sp>
+        <p:nvSpPr>
+          <p:cNvPr id="2" name="Slide Image Placeholder 1"/>
+          <p:cNvSpPr>
+            <a:spLocks noGrp="1" noRot="1" noChangeAspect="1"/>
+          </p:cNvSpPr>
+          <p:nvPr>
+            <p:ph type="sldImg"/>
+          </p:nvPr>
+        </p:nvSpPr>
+        <p:spPr/>
+      </p:sp>
+      <p:sp>
+        <p:nvSpPr>
+          <p:cNvPr id="3" name="Notes Placeholder 2"/>
+          <p:cNvSpPr>
+            <a:spLocks noGrp="1"/>
+          </p:cNvSpPr>
+          <p:nvPr>
+            <p:ph type="body" idx="1"/>
+          </p:nvPr>
+        </p:nvSpPr>
+        <p:spPr/>
+        <p:txBody>
+          <a:bodyPr/>
+          <a:lstStyle/>
+          <a:p>
+            <a:r>
+              <a:rPr lang="en-US" dirty="0"/>
+              <a:t>先让学生看左图，再看右图，问：哪个数该报进论文？答：右图。
+不要替结果辩护。E 都只有 0.45，说明这是方法框架的问题，不是删失处理的问题。这是本次实验最重要的发现，也是下次课的起点。</a:t>
+            </a:r>
+            <a:endParaRPr lang="en-US" dirty="0"/>
+          </a:p>
+        </p:txBody>
+      </p:sp>
+      <p:sp>
+        <p:nvSpPr>
+          <p:cNvPr id="4" name="Slide Number Placeholder 3"/>
+          <p:cNvSpPr>
+            <a:spLocks noGrp="1"/>
+          </p:cNvSpPr>
+          <p:nvPr>
+            <p:ph type="sldNum" sz="quarter" idx="10"/>
+          </p:nvPr>
+        </p:nvSpPr>
+        <p:spPr/>
+        <p:txBody>
+          <a:bodyPr/>
+          <a:lstStyle/>
+          <a:p>
+            <a:fld id="{F7021451-1387-4CA6-816F-3879F97B5CBC}" type="slidenum">
+              <a:rPr lang="en-US"/>
+              <a:t>18</a:t>
+            </a:fld>
+            <a:endParaRPr lang="en-US"/>
+          </a:p>
+        </p:txBody>
+      </p:sp>
+    </p:spTree>
+    <p:extLst>
+      <p:ext uri="{BB962C8B-B14F-4D97-AF65-F5344CB8AC3E}">
+        <p14:creationId xmlns:p14="http://schemas.microsoft.com/office/powerpoint/2010/main" val="1024086991"/>
+      </p:ext>
+    </p:extLst>
+  </p:cSld>
+  <p:clrMapOvr>
+    <a:masterClrMapping/>
+  </p:clrMapOvr>
+</p:notes>
+</file>
+
+<file path=ppt/notesSlides/notesSlide19.xml><?xml version="1.0" encoding="utf-8"?>
+<p:notes xmlns:a="http://schemas.openxmlformats.org/drawingml/2006/main" xmlns:r="http://schemas.openxmlformats.org/officeDocument/2006/relationships" xmlns:p="http://schemas.openxmlformats.org/presentationml/2006/main">
+  <p:cSld>
+    <p:spTree>
+      <p:nvGrpSpPr>
+        <p:cNvPr id="1" name=""/>
+        <p:cNvGrpSpPr/>
+        <p:nvPr/>
+      </p:nvGrpSpPr>
+      <p:grpSpPr>
+        <a:xfrm>
+          <a:off x="0" y="0"/>
+          <a:ext cx="0" cy="0"/>
+          <a:chOff x="0" y="0"/>
+          <a:chExt cx="0" cy="0"/>
+        </a:xfrm>
+      </p:grpSpPr>
+      <p:sp>
+        <p:nvSpPr>
+          <p:cNvPr id="2" name="Slide Image Placeholder 1"/>
+          <p:cNvSpPr>
+            <a:spLocks noGrp="1" noRot="1" noChangeAspect="1"/>
+          </p:cNvSpPr>
+          <p:nvPr>
+            <p:ph type="sldImg"/>
+          </p:nvPr>
+        </p:nvSpPr>
+        <p:spPr/>
+      </p:sp>
+      <p:sp>
+        <p:nvSpPr>
+          <p:cNvPr id="3" name="Notes Placeholder 2"/>
+          <p:cNvSpPr>
+            <a:spLocks noGrp="1"/>
+          </p:cNvSpPr>
+          <p:nvPr>
+            <p:ph type="body" idx="1"/>
+          </p:nvPr>
+        </p:nvSpPr>
+        <p:spPr/>
+        <p:txBody>
+          <a:bodyPr/>
+          <a:lstStyle/>
+          <a:p>
+            <a:r>
+              <a:rPr lang="en-US" dirty="0"/>
+              <a:t>F08 里 [30,60) 和 [60,125] 两段全部是 1.0，这是封顶的必然结果，不是成绩。
+F09 右上为好。Cw1 比 Cw 覆盖高、下界低，是一机一点的代价；trivial 在 60% 时最多 0.9%。</a:t>
+            </a:r>
+            <a:endParaRPr lang="en-US" dirty="0"/>
+          </a:p>
+        </p:txBody>
+      </p:sp>
+      <p:sp>
+        <p:nvSpPr>
+          <p:cNvPr id="4" name="Slide Number Placeholder 3"/>
+          <p:cNvSpPr>
+            <a:spLocks noGrp="1"/>
+          </p:cNvSpPr>
+          <p:nvPr>
+            <p:ph type="sldNum" sz="quarter" idx="10"/>
+          </p:nvPr>
+        </p:nvSpPr>
+        <p:spPr/>
+        <p:txBody>
+          <a:bodyPr/>
+          <a:lstStyle/>
+          <a:p>
+            <a:fld id="{F7021451-1387-4CA6-816F-3879F97B5CBC}" type="slidenum">
+              <a:rPr lang="en-US"/>
+              <a:t>19</a:t>
             </a:fld>
             <a:endParaRPr lang="en-US"/>
           </a:p>
@@ -1253,6 +1526,274 @@
             <a:fld id="{F7021451-1387-4CA6-816F-3879F97B5CBC}" type="slidenum">
               <a:rPr lang="en-US"/>
               <a:t>2</a:t>
+            </a:fld>
+            <a:endParaRPr lang="en-US"/>
+          </a:p>
+        </p:txBody>
+      </p:sp>
+    </p:spTree>
+    <p:extLst>
+      <p:ext uri="{BB962C8B-B14F-4D97-AF65-F5344CB8AC3E}">
+        <p14:creationId xmlns:p14="http://schemas.microsoft.com/office/powerpoint/2010/main" val="1024086991"/>
+      </p:ext>
+    </p:extLst>
+  </p:cSld>
+  <p:clrMapOvr>
+    <a:masterClrMapping/>
+  </p:clrMapOvr>
+</p:notes>
+</file>
+
+<file path=ppt/notesSlides/notesSlide20.xml><?xml version="1.0" encoding="utf-8"?>
+<p:notes xmlns:a="http://schemas.openxmlformats.org/drawingml/2006/main" xmlns:r="http://schemas.openxmlformats.org/officeDocument/2006/relationships" xmlns:p="http://schemas.openxmlformats.org/presentationml/2006/main">
+  <p:cSld>
+    <p:spTree>
+      <p:nvGrpSpPr>
+        <p:cNvPr id="1" name=""/>
+        <p:cNvGrpSpPr/>
+        <p:nvPr/>
+      </p:nvGrpSpPr>
+      <p:grpSpPr>
+        <a:xfrm>
+          <a:off x="0" y="0"/>
+          <a:ext cx="0" cy="0"/>
+          <a:chOff x="0" y="0"/>
+          <a:chExt cx="0" cy="0"/>
+        </a:xfrm>
+      </p:grpSpPr>
+      <p:sp>
+        <p:nvSpPr>
+          <p:cNvPr id="2" name="Slide Image Placeholder 1"/>
+          <p:cNvSpPr>
+            <a:spLocks noGrp="1" noRot="1" noChangeAspect="1"/>
+          </p:cNvSpPr>
+          <p:nvPr>
+            <p:ph type="sldImg"/>
+          </p:nvPr>
+        </p:nvSpPr>
+        <p:spPr/>
+      </p:sp>
+      <p:sp>
+        <p:nvSpPr>
+          <p:cNvPr id="3" name="Notes Placeholder 2"/>
+          <p:cNvSpPr>
+            <a:spLocks noGrp="1"/>
+          </p:cNvSpPr>
+          <p:nvPr>
+            <p:ph type="body" idx="1"/>
+          </p:nvPr>
+        </p:nvSpPr>
+        <p:spPr/>
+        <p:txBody>
+          <a:bodyPr/>
+          <a:lstStyle/>
+          <a:p>
+            <a:r>
+              <a:rPr lang="en-US" dirty="0"/>
+              <a:t>F10 给学生看最直观。让他们指出哪一段是决策区。
+F03 里空心点后面的橙色段就是修正一丢掉的样本，让学生数一下删失机和失效机各丢了多少。</a:t>
+            </a:r>
+            <a:endParaRPr lang="en-US" dirty="0"/>
+          </a:p>
+        </p:txBody>
+      </p:sp>
+      <p:sp>
+        <p:nvSpPr>
+          <p:cNvPr id="4" name="Slide Number Placeholder 3"/>
+          <p:cNvSpPr>
+            <a:spLocks noGrp="1"/>
+          </p:cNvSpPr>
+          <p:nvPr>
+            <p:ph type="sldNum" sz="quarter" idx="10"/>
+          </p:nvPr>
+        </p:nvSpPr>
+        <p:spPr/>
+        <p:txBody>
+          <a:bodyPr/>
+          <a:lstStyle/>
+          <a:p>
+            <a:fld id="{F7021451-1387-4CA6-816F-3879F97B5CBC}" type="slidenum">
+              <a:rPr lang="en-US"/>
+              <a:t>20</a:t>
+            </a:fld>
+            <a:endParaRPr lang="en-US"/>
+          </a:p>
+        </p:txBody>
+      </p:sp>
+    </p:spTree>
+    <p:extLst>
+      <p:ext uri="{BB962C8B-B14F-4D97-AF65-F5344CB8AC3E}">
+        <p14:creationId xmlns:p14="http://schemas.microsoft.com/office/powerpoint/2010/main" val="1024086991"/>
+      </p:ext>
+    </p:extLst>
+  </p:cSld>
+  <p:clrMapOvr>
+    <a:masterClrMapping/>
+  </p:clrMapOvr>
+</p:notes>
+</file>
+
+<file path=ppt/notesSlides/notesSlide21.xml><?xml version="1.0" encoding="utf-8"?>
+<p:notes xmlns:a="http://schemas.openxmlformats.org/drawingml/2006/main" xmlns:r="http://schemas.openxmlformats.org/officeDocument/2006/relationships" xmlns:p="http://schemas.openxmlformats.org/presentationml/2006/main">
+  <p:cSld>
+    <p:spTree>
+      <p:nvGrpSpPr>
+        <p:cNvPr id="1" name=""/>
+        <p:cNvGrpSpPr/>
+        <p:nvPr/>
+      </p:nvGrpSpPr>
+      <p:grpSpPr>
+        <a:xfrm>
+          <a:off x="0" y="0"/>
+          <a:ext cx="0" cy="0"/>
+          <a:chOff x="0" y="0"/>
+          <a:chExt cx="0" cy="0"/>
+        </a:xfrm>
+      </p:grpSpPr>
+      <p:sp>
+        <p:nvSpPr>
+          <p:cNvPr id="2" name="Slide Image Placeholder 1"/>
+          <p:cNvSpPr>
+            <a:spLocks noGrp="1" noRot="1" noChangeAspect="1"/>
+          </p:cNvSpPr>
+          <p:nvPr>
+            <p:ph type="sldImg"/>
+          </p:nvPr>
+        </p:nvSpPr>
+        <p:spPr/>
+      </p:sp>
+      <p:sp>
+        <p:nvSpPr>
+          <p:cNvPr id="3" name="Notes Placeholder 2"/>
+          <p:cNvSpPr>
+            <a:spLocks noGrp="1"/>
+          </p:cNvSpPr>
+          <p:nvPr>
+            <p:ph type="body" idx="1"/>
+          </p:nvPr>
+        </p:nvSpPr>
+        <p:spPr/>
+        <p:txBody>
+          <a:bodyPr/>
+          <a:lstStyle/>
+          <a:p>
+            <a:r>
+              <a:rPr lang="en-US" dirty="0"/>
+              <a:t>第一句最重要，其余四句是它之下的细节。学生若问“那这篇论文还能写吗”，答：能，因为现在知道了要解决什么。E 都不达标，说明决策区需要自己的校准，这正是 Mondrian 那一步存在的理由。</a:t>
+            </a:r>
+            <a:endParaRPr lang="en-US" dirty="0"/>
+          </a:p>
+        </p:txBody>
+      </p:sp>
+      <p:sp>
+        <p:nvSpPr>
+          <p:cNvPr id="4" name="Slide Number Placeholder 3"/>
+          <p:cNvSpPr>
+            <a:spLocks noGrp="1"/>
+          </p:cNvSpPr>
+          <p:nvPr>
+            <p:ph type="sldNum" sz="quarter" idx="10"/>
+          </p:nvPr>
+        </p:nvSpPr>
+        <p:spPr/>
+        <p:txBody>
+          <a:bodyPr/>
+          <a:lstStyle/>
+          <a:p>
+            <a:fld id="{F7021451-1387-4CA6-816F-3879F97B5CBC}" type="slidenum">
+              <a:rPr lang="en-US"/>
+              <a:t>21</a:t>
+            </a:fld>
+            <a:endParaRPr lang="en-US"/>
+          </a:p>
+        </p:txBody>
+      </p:sp>
+    </p:spTree>
+    <p:extLst>
+      <p:ext uri="{BB962C8B-B14F-4D97-AF65-F5344CB8AC3E}">
+        <p14:creationId xmlns:p14="http://schemas.microsoft.com/office/powerpoint/2010/main" val="1024086991"/>
+      </p:ext>
+    </p:extLst>
+  </p:cSld>
+  <p:clrMapOvr>
+    <a:masterClrMapping/>
+  </p:clrMapOvr>
+</p:notes>
+</file>
+
+<file path=ppt/notesSlides/notesSlide22.xml><?xml version="1.0" encoding="utf-8"?>
+<p:notes xmlns:a="http://schemas.openxmlformats.org/drawingml/2006/main" xmlns:r="http://schemas.openxmlformats.org/officeDocument/2006/relationships" xmlns:p="http://schemas.openxmlformats.org/presentationml/2006/main">
+  <p:cSld>
+    <p:spTree>
+      <p:nvGrpSpPr>
+        <p:cNvPr id="1" name=""/>
+        <p:cNvGrpSpPr/>
+        <p:nvPr/>
+      </p:nvGrpSpPr>
+      <p:grpSpPr>
+        <a:xfrm>
+          <a:off x="0" y="0"/>
+          <a:ext cx="0" cy="0"/>
+          <a:chOff x="0" y="0"/>
+          <a:chExt cx="0" cy="0"/>
+        </a:xfrm>
+      </p:grpSpPr>
+      <p:sp>
+        <p:nvSpPr>
+          <p:cNvPr id="2" name="Slide Image Placeholder 1"/>
+          <p:cNvSpPr>
+            <a:spLocks noGrp="1" noRot="1" noChangeAspect="1"/>
+          </p:cNvSpPr>
+          <p:nvPr>
+            <p:ph type="sldImg"/>
+          </p:nvPr>
+        </p:nvSpPr>
+        <p:spPr/>
+      </p:sp>
+      <p:sp>
+        <p:nvSpPr>
+          <p:cNvPr id="3" name="Notes Placeholder 2"/>
+          <p:cNvSpPr>
+            <a:spLocks noGrp="1"/>
+          </p:cNvSpPr>
+          <p:nvPr>
+            <p:ph type="body" idx="1"/>
+          </p:nvPr>
+        </p:nvSpPr>
+        <p:spPr/>
+        <p:txBody>
+          <a:bodyPr/>
+          <a:lstStyle/>
+          <a:p>
+            <a:r>
+              <a:rPr lang="en-US" dirty="0"/>
+              <a:t>作业二和作业三都有标准答案，下次课开头先对答案。
+作业二答案：校准折保留发动机在全部组合里都是 40 台，按这一列 60% 不放弃；但 A 在 60% 时只有 16 台失效机，A 那一行不可信。
+作业三答案：40% 删失、c0 = 30，Cu 0.287 对 Cw 0.388，差来自权重 1/S_C(t+c0)；Cw1 的 mean_L 更低是一机一点校准点少的代价。
+下次课的第一项 Mondrian 校准是移交文档里下一步的第一优先级，提前让学生读论文一第 6.2 节。</a:t>
+            </a:r>
+            <a:endParaRPr lang="en-US" dirty="0"/>
+          </a:p>
+        </p:txBody>
+      </p:sp>
+      <p:sp>
+        <p:nvSpPr>
+          <p:cNvPr id="4" name="Slide Number Placeholder 3"/>
+          <p:cNvSpPr>
+            <a:spLocks noGrp="1"/>
+          </p:cNvSpPr>
+          <p:nvPr>
+            <p:ph type="sldNum" sz="quarter" idx="10"/>
+          </p:nvPr>
+        </p:nvSpPr>
+        <p:spPr/>
+        <p:txBody>
+          <a:bodyPr/>
+          <a:lstStyle/>
+          <a:p>
+            <a:fld id="{F7021451-1387-4CA6-816F-3879F97B5CBC}" type="slidenum">
+              <a:rPr lang="en-US"/>
+              <a:t>22</a:t>
             </a:fld>
             <a:endParaRPr lang="en-US"/>
           </a:p>
@@ -12222,13 +12763,6 @@
 <file path=ppt/slides/slide16.xml><?xml version="1.0" encoding="utf-8"?>
 <p:sld xmlns:a="http://schemas.openxmlformats.org/drawingml/2006/main" xmlns:r="http://schemas.openxmlformats.org/officeDocument/2006/relationships" xmlns:p="http://schemas.openxmlformats.org/presentationml/2006/main">
   <p:cSld name="Slide 16">
-    <p:bg>
-      <p:bgPr>
-        <a:solidFill>
-          <a:srgbClr val="152238"/>
-        </a:solidFill>
-      </p:bgPr>
-    </p:bg>
     <p:spTree>
       <p:nvGrpSpPr>
         <p:cNvPr id="1" name=""/>
@@ -12251,8 +12785,8 @@
         </p:nvSpPr>
         <p:spPr>
           <a:xfrm>
-            <a:off x="548640" y="411480"/>
-            <a:ext cx="9144000" cy="640080"/>
+            <a:off x="548640" y="347472"/>
+            <a:ext cx="11091672" cy="548640"/>
           </a:xfrm>
           <a:prstGeom prst="rect">
             <a:avLst/>
@@ -12270,13 +12804,13 @@
             <a:r>
               <a:rPr lang="en-US" sz="2600" b="1" dirty="0">
                 <a:solidFill>
-                  <a:srgbClr val="FFFFFF"/>
+                  <a:srgbClr val="152238"/>
                 </a:solidFill>
                 <a:latin typeface="Microsoft YaHei" pitchFamily="34" charset="0"/>
                 <a:ea typeface="Microsoft YaHei" pitchFamily="34" charset="-122"/>
                 <a:cs typeface="Microsoft YaHei" pitchFamily="34" charset="-120"/>
               </a:rPr>
-              <a:t>作业与下次课</a:t>
+              <a:t>真实数据跑出来了：验收对照</a:t>
             </a:r>
             <a:endParaRPr lang="en-US" sz="2600" dirty="0"/>
           </a:p>
@@ -12284,24 +12818,2561 @@
       </p:sp>
       <p:sp>
         <p:nvSpPr>
-          <p:cNvPr id="3" name="Shape 1"/>
+          <p:cNvPr id="3" name="Text 1"/>
+          <p:cNvSpPr txBox="1"/>
+          <p:nvPr/>
+        </p:nvSpPr>
+        <p:spPr>
+          <a:xfrm>
+            <a:off x="548640" y="896112"/>
+            <a:ext cx="11091672" cy="292608"/>
+          </a:xfrm>
+          <a:prstGeom prst="rect">
+            <a:avLst/>
+          </a:prstGeom>
+          <a:noFill/>
+          <a:ln/>
+        </p:spPr>
+        <p:txBody>
+          <a:bodyPr wrap="square" lIns="0" tIns="0" rIns="0" bIns="0" rtlCol="0" anchor="ctr"/>
+          <a:lstStyle/>
+          <a:p>
+            <a:pPr indent="0" marL="0">
+              <a:buNone/>
+            </a:pPr>
+            <a:r>
+              <a:rPr lang="en-US" sz="1200" dirty="0">
+                <a:solidFill>
+                  <a:srgbClr val="6E7A8A"/>
+                </a:solidFill>
+                <a:latin typeface="Microsoft YaHei" pitchFamily="34" charset="0"/>
+                <a:ea typeface="Microsoft YaHei" pitchFamily="34" charset="-122"/>
+                <a:cs typeface="Microsoft YaHei" pitchFamily="34" charset="-120"/>
+              </a:rPr>
+              <a:t>FD001，Python 3.11，numpy 2.4，pandas 3.0，scikit-learn 1.9；五个脚本全部退出码 0</a:t>
+            </a:r>
+            <a:endParaRPr lang="en-US" sz="1200" dirty="0"/>
+          </a:p>
+        </p:txBody>
+      </p:sp>
+      <p:graphicFrame>
+        <p:nvGraphicFramePr>
+          <p:cNvPr id="17" name="Table 0"/>
+          <p:cNvGraphicFramePr>
+            <a:graphicFrameLocks noGrp="1"/>
+          </p:cNvGraphicFramePr>
+          <p:nvPr>
+            <p:extLst>
+              <p:ext uri="{D42A27DB-BD31-4B8C-83A1-F6EECF244321}">
+                <p14:modId xmlns:p14="http://schemas.microsoft.com/office/powerpoint/2010/main" val="1579011935"/>
+              </p:ext>
+            </p:extLst>
+          </p:nvPr>
+        </p:nvGraphicFramePr>
+        <p:xfrm>
+          <a:off x="548640" y="1417320"/>
+          <a:ext cx="11091672" cy="914400"/>
+        </p:xfrm>
+        <a:graphic>
+          <a:graphicData uri="http://schemas.openxmlformats.org/drawingml/2006/table">
+            <a:tbl>
+              <a:tblPr/>
+              <a:tblGrid>
+                <a:gridCol w="822960"/>
+                <a:gridCol w="2651760"/>
+                <a:gridCol w="3657600"/>
+                <a:gridCol w="3959352"/>
+              </a:tblGrid>
+              <a:tr h="411480">
+                <a:tc>
+                  <a:txBody>
+                    <a:bodyPr/>
+                    <a:lstStyle/>
+                    <a:p>
+                      <a:pPr indent="0" marL="0">
+                        <a:buNone/>
+                      </a:pPr>
+                      <a:r>
+                        <a:rPr lang="en-US" sz="1100" b="1" dirty="0">
+                          <a:solidFill>
+                            <a:srgbClr val="FFFFFF"/>
+                          </a:solidFill>
+                          <a:latin typeface="Microsoft YaHei" pitchFamily="34" charset="0"/>
+                          <a:ea typeface="Microsoft YaHei" pitchFamily="34" charset="-122"/>
+                          <a:cs typeface="Microsoft YaHei" pitchFamily="34" charset="-120"/>
+                        </a:rPr>
+                        <a:t>脚本</a:t>
+                      </a:r>
+                      <a:endParaRPr lang="en-US" sz="1100" dirty="0">
+                        <a:latin typeface="Microsoft YaHei" charset="0"/>
+                        <a:ea typeface="Microsoft YaHei" charset="0"/>
+                        <a:cs typeface="Microsoft YaHei" charset="0"/>
+                      </a:endParaRPr>
+                    </a:p>
+                  </a:txBody>
+                  <a:tcPr marL="91440" marR="91440" marT="45720" marB="45720" anchor="ctr">
+                    <a:lnL w="9525" cap="flat" cmpd="sng" algn="ctr">
+                      <a:solidFill>
+                        <a:srgbClr val="D5DCE5"/>
+                      </a:solidFill>
+                      <a:prstDash val="solid"/>
+                      <a:round/>
+                      <a:headEnd type="none" w="med" len="med"/>
+                      <a:tailEnd type="none" w="med" len="med"/>
+                    </a:lnL>
+                    <a:lnR w="9525" cap="flat" cmpd="sng" algn="ctr">
+                      <a:solidFill>
+                        <a:srgbClr val="D5DCE5"/>
+                      </a:solidFill>
+                      <a:prstDash val="solid"/>
+                      <a:round/>
+                      <a:headEnd type="none" w="med" len="med"/>
+                      <a:tailEnd type="none" w="med" len="med"/>
+                    </a:lnR>
+                    <a:lnT w="9525" cap="flat" cmpd="sng" algn="ctr">
+                      <a:solidFill>
+                        <a:srgbClr val="D5DCE5"/>
+                      </a:solidFill>
+                      <a:prstDash val="solid"/>
+                      <a:round/>
+                      <a:headEnd type="none" w="med" len="med"/>
+                      <a:tailEnd type="none" w="med" len="med"/>
+                    </a:lnT>
+                    <a:lnB w="9525" cap="flat" cmpd="sng" algn="ctr">
+                      <a:solidFill>
+                        <a:srgbClr val="D5DCE5"/>
+                      </a:solidFill>
+                      <a:prstDash val="solid"/>
+                      <a:round/>
+                      <a:headEnd type="none" w="med" len="med"/>
+                      <a:tailEnd type="none" w="med" len="med"/>
+                    </a:lnB>
+                    <a:solidFill>
+                      <a:srgbClr val="152238"/>
+                    </a:solidFill>
+                  </a:tcPr>
+                </a:tc>
+                <a:tc>
+                  <a:txBody>
+                    <a:bodyPr/>
+                    <a:lstStyle/>
+                    <a:p>
+                      <a:pPr indent="0" marL="0">
+                        <a:buNone/>
+                      </a:pPr>
+                      <a:r>
+                        <a:rPr lang="en-US" sz="1100" b="1" dirty="0">
+                          <a:solidFill>
+                            <a:srgbClr val="FFFFFF"/>
+                          </a:solidFill>
+                          <a:latin typeface="Microsoft YaHei" pitchFamily="34" charset="0"/>
+                          <a:ea typeface="Microsoft YaHei" pitchFamily="34" charset="-122"/>
+                          <a:cs typeface="Microsoft YaHei" pitchFamily="34" charset="-120"/>
+                        </a:rPr>
+                        <a:t>验收项</a:t>
+                      </a:r>
+                      <a:endParaRPr lang="en-US" sz="1100" dirty="0">
+                        <a:latin typeface="Microsoft YaHei" charset="0"/>
+                        <a:ea typeface="Microsoft YaHei" charset="0"/>
+                        <a:cs typeface="Microsoft YaHei" charset="0"/>
+                      </a:endParaRPr>
+                    </a:p>
+                  </a:txBody>
+                  <a:tcPr marL="91440" marR="91440" marT="45720" marB="45720" anchor="ctr">
+                    <a:lnL w="9525" cap="flat" cmpd="sng" algn="ctr">
+                      <a:solidFill>
+                        <a:srgbClr val="D5DCE5"/>
+                      </a:solidFill>
+                      <a:prstDash val="solid"/>
+                      <a:round/>
+                      <a:headEnd type="none" w="med" len="med"/>
+                      <a:tailEnd type="none" w="med" len="med"/>
+                    </a:lnL>
+                    <a:lnR w="9525" cap="flat" cmpd="sng" algn="ctr">
+                      <a:solidFill>
+                        <a:srgbClr val="D5DCE5"/>
+                      </a:solidFill>
+                      <a:prstDash val="solid"/>
+                      <a:round/>
+                      <a:headEnd type="none" w="med" len="med"/>
+                      <a:tailEnd type="none" w="med" len="med"/>
+                    </a:lnR>
+                    <a:lnT w="9525" cap="flat" cmpd="sng" algn="ctr">
+                      <a:solidFill>
+                        <a:srgbClr val="D5DCE5"/>
+                      </a:solidFill>
+                      <a:prstDash val="solid"/>
+                      <a:round/>
+                      <a:headEnd type="none" w="med" len="med"/>
+                      <a:tailEnd type="none" w="med" len="med"/>
+                    </a:lnT>
+                    <a:lnB w="9525" cap="flat" cmpd="sng" algn="ctr">
+                      <a:solidFill>
+                        <a:srgbClr val="D5DCE5"/>
+                      </a:solidFill>
+                      <a:prstDash val="solid"/>
+                      <a:round/>
+                      <a:headEnd type="none" w="med" len="med"/>
+                      <a:tailEnd type="none" w="med" len="med"/>
+                    </a:lnB>
+                    <a:solidFill>
+                      <a:srgbClr val="152238"/>
+                    </a:solidFill>
+                  </a:tcPr>
+                </a:tc>
+                <a:tc>
+                  <a:txBody>
+                    <a:bodyPr/>
+                    <a:lstStyle/>
+                    <a:p>
+                      <a:pPr indent="0" marL="0">
+                        <a:buNone/>
+                      </a:pPr>
+                      <a:r>
+                        <a:rPr lang="en-US" sz="1100" b="1" dirty="0">
+                          <a:solidFill>
+                            <a:srgbClr val="FFFFFF"/>
+                          </a:solidFill>
+                          <a:latin typeface="Microsoft YaHei" pitchFamily="34" charset="0"/>
+                          <a:ea typeface="Microsoft YaHei" pitchFamily="34" charset="-122"/>
+                          <a:cs typeface="Microsoft YaHei" pitchFamily="34" charset="-120"/>
+                        </a:rPr>
+                        <a:t>要求</a:t>
+                      </a:r>
+                      <a:endParaRPr lang="en-US" sz="1100" dirty="0">
+                        <a:latin typeface="Microsoft YaHei" charset="0"/>
+                        <a:ea typeface="Microsoft YaHei" charset="0"/>
+                        <a:cs typeface="Microsoft YaHei" charset="0"/>
+                      </a:endParaRPr>
+                    </a:p>
+                  </a:txBody>
+                  <a:tcPr marL="91440" marR="91440" marT="45720" marB="45720" anchor="ctr">
+                    <a:lnL w="9525" cap="flat" cmpd="sng" algn="ctr">
+                      <a:solidFill>
+                        <a:srgbClr val="D5DCE5"/>
+                      </a:solidFill>
+                      <a:prstDash val="solid"/>
+                      <a:round/>
+                      <a:headEnd type="none" w="med" len="med"/>
+                      <a:tailEnd type="none" w="med" len="med"/>
+                    </a:lnL>
+                    <a:lnR w="9525" cap="flat" cmpd="sng" algn="ctr">
+                      <a:solidFill>
+                        <a:srgbClr val="D5DCE5"/>
+                      </a:solidFill>
+                      <a:prstDash val="solid"/>
+                      <a:round/>
+                      <a:headEnd type="none" w="med" len="med"/>
+                      <a:tailEnd type="none" w="med" len="med"/>
+                    </a:lnR>
+                    <a:lnT w="9525" cap="flat" cmpd="sng" algn="ctr">
+                      <a:solidFill>
+                        <a:srgbClr val="D5DCE5"/>
+                      </a:solidFill>
+                      <a:prstDash val="solid"/>
+                      <a:round/>
+                      <a:headEnd type="none" w="med" len="med"/>
+                      <a:tailEnd type="none" w="med" len="med"/>
+                    </a:lnT>
+                    <a:lnB w="9525" cap="flat" cmpd="sng" algn="ctr">
+                      <a:solidFill>
+                        <a:srgbClr val="D5DCE5"/>
+                      </a:solidFill>
+                      <a:prstDash val="solid"/>
+                      <a:round/>
+                      <a:headEnd type="none" w="med" len="med"/>
+                      <a:tailEnd type="none" w="med" len="med"/>
+                    </a:lnB>
+                    <a:solidFill>
+                      <a:srgbClr val="152238"/>
+                    </a:solidFill>
+                  </a:tcPr>
+                </a:tc>
+                <a:tc>
+                  <a:txBody>
+                    <a:bodyPr/>
+                    <a:lstStyle/>
+                    <a:p>
+                      <a:pPr indent="0" marL="0">
+                        <a:buNone/>
+                      </a:pPr>
+                      <a:r>
+                        <a:rPr lang="en-US" sz="1100" b="1" dirty="0">
+                          <a:solidFill>
+                            <a:srgbClr val="FFFFFF"/>
+                          </a:solidFill>
+                          <a:latin typeface="Microsoft YaHei" pitchFamily="34" charset="0"/>
+                          <a:ea typeface="Microsoft YaHei" pitchFamily="34" charset="-122"/>
+                          <a:cs typeface="Microsoft YaHei" pitchFamily="34" charset="-120"/>
+                        </a:rPr>
+                        <a:t>实际</a:t>
+                      </a:r>
+                      <a:endParaRPr lang="en-US" sz="1100" dirty="0">
+                        <a:latin typeface="Microsoft YaHei" charset="0"/>
+                        <a:ea typeface="Microsoft YaHei" charset="0"/>
+                        <a:cs typeface="Microsoft YaHei" charset="0"/>
+                      </a:endParaRPr>
+                    </a:p>
+                  </a:txBody>
+                  <a:tcPr marL="91440" marR="91440" marT="45720" marB="45720" anchor="ctr">
+                    <a:lnL w="9525" cap="flat" cmpd="sng" algn="ctr">
+                      <a:solidFill>
+                        <a:srgbClr val="D5DCE5"/>
+                      </a:solidFill>
+                      <a:prstDash val="solid"/>
+                      <a:round/>
+                      <a:headEnd type="none" w="med" len="med"/>
+                      <a:tailEnd type="none" w="med" len="med"/>
+                    </a:lnL>
+                    <a:lnR w="9525" cap="flat" cmpd="sng" algn="ctr">
+                      <a:solidFill>
+                        <a:srgbClr val="D5DCE5"/>
+                      </a:solidFill>
+                      <a:prstDash val="solid"/>
+                      <a:round/>
+                      <a:headEnd type="none" w="med" len="med"/>
+                      <a:tailEnd type="none" w="med" len="med"/>
+                    </a:lnR>
+                    <a:lnT w="9525" cap="flat" cmpd="sng" algn="ctr">
+                      <a:solidFill>
+                        <a:srgbClr val="D5DCE5"/>
+                      </a:solidFill>
+                      <a:prstDash val="solid"/>
+                      <a:round/>
+                      <a:headEnd type="none" w="med" len="med"/>
+                      <a:tailEnd type="none" w="med" len="med"/>
+                    </a:lnT>
+                    <a:lnB w="9525" cap="flat" cmpd="sng" algn="ctr">
+                      <a:solidFill>
+                        <a:srgbClr val="D5DCE5"/>
+                      </a:solidFill>
+                      <a:prstDash val="solid"/>
+                      <a:round/>
+                      <a:headEnd type="none" w="med" len="med"/>
+                      <a:tailEnd type="none" w="med" len="med"/>
+                    </a:lnB>
+                    <a:solidFill>
+                      <a:srgbClr val="152238"/>
+                    </a:solidFill>
+                  </a:tcPr>
+                </a:tc>
+              </a:tr>
+              <a:tr h="411480">
+                <a:tc>
+                  <a:txBody>
+                    <a:bodyPr/>
+                    <a:lstStyle/>
+                    <a:p>
+                      <a:pPr indent="0" marL="0">
+                        <a:buNone/>
+                      </a:pPr>
+                      <a:r>
+                        <a:rPr lang="en-US" sz="1050" b="1" dirty="0">
+                          <a:solidFill>
+                            <a:srgbClr val="152238"/>
+                          </a:solidFill>
+                          <a:latin typeface="Times New Roman" pitchFamily="34" charset="0"/>
+                          <a:ea typeface="Times New Roman" pitchFamily="34" charset="-122"/>
+                          <a:cs typeface="Times New Roman" pitchFamily="34" charset="-120"/>
+                        </a:rPr>
+                        <a:t>s01</a:t>
+                      </a:r>
+                      <a:endParaRPr lang="en-US" sz="1050" dirty="0">
+                        <a:latin typeface="Times New Roman" charset="0"/>
+                        <a:ea typeface="Times New Roman" charset="0"/>
+                        <a:cs typeface="Times New Roman" charset="0"/>
+                      </a:endParaRPr>
+                    </a:p>
+                  </a:txBody>
+                  <a:tcPr marL="91440" marR="91440" marT="45720" marB="45720" anchor="ctr">
+                    <a:lnL w="9525" cap="flat" cmpd="sng" algn="ctr">
+                      <a:solidFill>
+                        <a:srgbClr val="D5DCE5"/>
+                      </a:solidFill>
+                      <a:prstDash val="solid"/>
+                      <a:round/>
+                      <a:headEnd type="none" w="med" len="med"/>
+                      <a:tailEnd type="none" w="med" len="med"/>
+                    </a:lnL>
+                    <a:lnR w="9525" cap="flat" cmpd="sng" algn="ctr">
+                      <a:solidFill>
+                        <a:srgbClr val="D5DCE5"/>
+                      </a:solidFill>
+                      <a:prstDash val="solid"/>
+                      <a:round/>
+                      <a:headEnd type="none" w="med" len="med"/>
+                      <a:tailEnd type="none" w="med" len="med"/>
+                    </a:lnR>
+                    <a:lnT w="9525" cap="flat" cmpd="sng" algn="ctr">
+                      <a:solidFill>
+                        <a:srgbClr val="D5DCE5"/>
+                      </a:solidFill>
+                      <a:prstDash val="solid"/>
+                      <a:round/>
+                      <a:headEnd type="none" w="med" len="med"/>
+                      <a:tailEnd type="none" w="med" len="med"/>
+                    </a:lnT>
+                    <a:lnB w="9525" cap="flat" cmpd="sng" algn="ctr">
+                      <a:solidFill>
+                        <a:srgbClr val="D5DCE5"/>
+                      </a:solidFill>
+                      <a:prstDash val="solid"/>
+                      <a:round/>
+                      <a:headEnd type="none" w="med" len="med"/>
+                      <a:tailEnd type="none" w="med" len="med"/>
+                    </a:lnB>
+                    <a:solidFill>
+                      <a:srgbClr val="FFFFFF"/>
+                    </a:solidFill>
+                  </a:tcPr>
+                </a:tc>
+                <a:tc>
+                  <a:txBody>
+                    <a:bodyPr/>
+                    <a:lstStyle/>
+                    <a:p>
+                      <a:pPr indent="0" marL="0">
+                        <a:buNone/>
+                      </a:pPr>
+                      <a:r>
+                        <a:rPr lang="en-US" sz="1050" dirty="0">
+                          <a:solidFill>
+                            <a:srgbClr val="1A1A1A"/>
+                          </a:solidFill>
+                          <a:latin typeface="Microsoft YaHei" pitchFamily="34" charset="0"/>
+                          <a:ea typeface="Microsoft YaHei" pitchFamily="34" charset="-122"/>
+                          <a:cs typeface="Microsoft YaHei" pitchFamily="34" charset="-120"/>
+                        </a:rPr>
+                        <a:t>训练集</a:t>
+                      </a:r>
+                      <a:endParaRPr lang="en-US" sz="1050" dirty="0">
+                        <a:latin typeface="Microsoft YaHei" charset="0"/>
+                        <a:ea typeface="Microsoft YaHei" charset="0"/>
+                        <a:cs typeface="Microsoft YaHei" charset="0"/>
+                      </a:endParaRPr>
+                    </a:p>
+                  </a:txBody>
+                  <a:tcPr marL="91440" marR="91440" marT="45720" marB="45720" anchor="ctr">
+                    <a:lnL w="9525" cap="flat" cmpd="sng" algn="ctr">
+                      <a:solidFill>
+                        <a:srgbClr val="D5DCE5"/>
+                      </a:solidFill>
+                      <a:prstDash val="solid"/>
+                      <a:round/>
+                      <a:headEnd type="none" w="med" len="med"/>
+                      <a:tailEnd type="none" w="med" len="med"/>
+                    </a:lnL>
+                    <a:lnR w="9525" cap="flat" cmpd="sng" algn="ctr">
+                      <a:solidFill>
+                        <a:srgbClr val="D5DCE5"/>
+                      </a:solidFill>
+                      <a:prstDash val="solid"/>
+                      <a:round/>
+                      <a:headEnd type="none" w="med" len="med"/>
+                      <a:tailEnd type="none" w="med" len="med"/>
+                    </a:lnR>
+                    <a:lnT w="9525" cap="flat" cmpd="sng" algn="ctr">
+                      <a:solidFill>
+                        <a:srgbClr val="D5DCE5"/>
+                      </a:solidFill>
+                      <a:prstDash val="solid"/>
+                      <a:round/>
+                      <a:headEnd type="none" w="med" len="med"/>
+                      <a:tailEnd type="none" w="med" len="med"/>
+                    </a:lnT>
+                    <a:lnB w="9525" cap="flat" cmpd="sng" algn="ctr">
+                      <a:solidFill>
+                        <a:srgbClr val="D5DCE5"/>
+                      </a:solidFill>
+                      <a:prstDash val="solid"/>
+                      <a:round/>
+                      <a:headEnd type="none" w="med" len="med"/>
+                      <a:tailEnd type="none" w="med" len="med"/>
+                    </a:lnB>
+                    <a:solidFill>
+                      <a:srgbClr val="FFFFFF"/>
+                    </a:solidFill>
+                  </a:tcPr>
+                </a:tc>
+                <a:tc>
+                  <a:txBody>
+                    <a:bodyPr/>
+                    <a:lstStyle/>
+                    <a:p>
+                      <a:pPr indent="0" marL="0">
+                        <a:buNone/>
+                      </a:pPr>
+                      <a:r>
+                        <a:rPr lang="en-US" sz="1050" dirty="0">
+                          <a:solidFill>
+                            <a:srgbClr val="1A1A1A"/>
+                          </a:solidFill>
+                          <a:latin typeface="Microsoft YaHei" pitchFamily="34" charset="0"/>
+                          <a:ea typeface="Microsoft YaHei" pitchFamily="34" charset="-122"/>
+                          <a:cs typeface="Microsoft YaHei" pitchFamily="34" charset="-120"/>
+                        </a:rPr>
+                        <a:t>100 台，20631 行，循环 128 到 362</a:t>
+                      </a:r>
+                      <a:endParaRPr lang="en-US" sz="1050" dirty="0">
+                        <a:latin typeface="Microsoft YaHei" charset="0"/>
+                        <a:ea typeface="Microsoft YaHei" charset="0"/>
+                        <a:cs typeface="Microsoft YaHei" charset="0"/>
+                      </a:endParaRPr>
+                    </a:p>
+                  </a:txBody>
+                  <a:tcPr marL="91440" marR="91440" marT="45720" marB="45720" anchor="ctr">
+                    <a:lnL w="9525" cap="flat" cmpd="sng" algn="ctr">
+                      <a:solidFill>
+                        <a:srgbClr val="D5DCE5"/>
+                      </a:solidFill>
+                      <a:prstDash val="solid"/>
+                      <a:round/>
+                      <a:headEnd type="none" w="med" len="med"/>
+                      <a:tailEnd type="none" w="med" len="med"/>
+                    </a:lnL>
+                    <a:lnR w="9525" cap="flat" cmpd="sng" algn="ctr">
+                      <a:solidFill>
+                        <a:srgbClr val="D5DCE5"/>
+                      </a:solidFill>
+                      <a:prstDash val="solid"/>
+                      <a:round/>
+                      <a:headEnd type="none" w="med" len="med"/>
+                      <a:tailEnd type="none" w="med" len="med"/>
+                    </a:lnR>
+                    <a:lnT w="9525" cap="flat" cmpd="sng" algn="ctr">
+                      <a:solidFill>
+                        <a:srgbClr val="D5DCE5"/>
+                      </a:solidFill>
+                      <a:prstDash val="solid"/>
+                      <a:round/>
+                      <a:headEnd type="none" w="med" len="med"/>
+                      <a:tailEnd type="none" w="med" len="med"/>
+                    </a:lnT>
+                    <a:lnB w="9525" cap="flat" cmpd="sng" algn="ctr">
+                      <a:solidFill>
+                        <a:srgbClr val="D5DCE5"/>
+                      </a:solidFill>
+                      <a:prstDash val="solid"/>
+                      <a:round/>
+                      <a:headEnd type="none" w="med" len="med"/>
+                      <a:tailEnd type="none" w="med" len="med"/>
+                    </a:lnB>
+                    <a:solidFill>
+                      <a:srgbClr val="FFFFFF"/>
+                    </a:solidFill>
+                  </a:tcPr>
+                </a:tc>
+                <a:tc>
+                  <a:txBody>
+                    <a:bodyPr/>
+                    <a:lstStyle/>
+                    <a:p>
+                      <a:pPr indent="0" marL="0">
+                        <a:buNone/>
+                      </a:pPr>
+                      <a:r>
+                        <a:rPr lang="en-US" sz="1050" b="1" dirty="0">
+                          <a:solidFill>
+                            <a:srgbClr val="3D7A5A"/>
+                          </a:solidFill>
+                          <a:latin typeface="Microsoft YaHei" pitchFamily="34" charset="0"/>
+                          <a:ea typeface="Microsoft YaHei" pitchFamily="34" charset="-122"/>
+                          <a:cs typeface="Microsoft YaHei" pitchFamily="34" charset="-120"/>
+                        </a:rPr>
+                        <a:t>100 台，20631 行，128 到 362</a:t>
+                      </a:r>
+                      <a:endParaRPr lang="en-US" sz="1050" dirty="0">
+                        <a:latin typeface="Microsoft YaHei" charset="0"/>
+                        <a:ea typeface="Microsoft YaHei" charset="0"/>
+                        <a:cs typeface="Microsoft YaHei" charset="0"/>
+                      </a:endParaRPr>
+                    </a:p>
+                  </a:txBody>
+                  <a:tcPr marL="91440" marR="91440" marT="45720" marB="45720" anchor="ctr">
+                    <a:lnL w="9525" cap="flat" cmpd="sng" algn="ctr">
+                      <a:solidFill>
+                        <a:srgbClr val="D5DCE5"/>
+                      </a:solidFill>
+                      <a:prstDash val="solid"/>
+                      <a:round/>
+                      <a:headEnd type="none" w="med" len="med"/>
+                      <a:tailEnd type="none" w="med" len="med"/>
+                    </a:lnL>
+                    <a:lnR w="9525" cap="flat" cmpd="sng" algn="ctr">
+                      <a:solidFill>
+                        <a:srgbClr val="D5DCE5"/>
+                      </a:solidFill>
+                      <a:prstDash val="solid"/>
+                      <a:round/>
+                      <a:headEnd type="none" w="med" len="med"/>
+                      <a:tailEnd type="none" w="med" len="med"/>
+                    </a:lnR>
+                    <a:lnT w="9525" cap="flat" cmpd="sng" algn="ctr">
+                      <a:solidFill>
+                        <a:srgbClr val="D5DCE5"/>
+                      </a:solidFill>
+                      <a:prstDash val="solid"/>
+                      <a:round/>
+                      <a:headEnd type="none" w="med" len="med"/>
+                      <a:tailEnd type="none" w="med" len="med"/>
+                    </a:lnT>
+                    <a:lnB w="9525" cap="flat" cmpd="sng" algn="ctr">
+                      <a:solidFill>
+                        <a:srgbClr val="D5DCE5"/>
+                      </a:solidFill>
+                      <a:prstDash val="solid"/>
+                      <a:round/>
+                      <a:headEnd type="none" w="med" len="med"/>
+                      <a:tailEnd type="none" w="med" len="med"/>
+                    </a:lnB>
+                    <a:solidFill>
+                      <a:srgbClr val="FFFFFF"/>
+                    </a:solidFill>
+                  </a:tcPr>
+                </a:tc>
+              </a:tr>
+              <a:tr h="411480">
+                <a:tc>
+                  <a:txBody>
+                    <a:bodyPr/>
+                    <a:lstStyle/>
+                    <a:p>
+                      <a:pPr indent="0" marL="0">
+                        <a:buNone/>
+                      </a:pPr>
+                      <a:r>
+                        <a:rPr lang="en-US" sz="1050" b="1" dirty="0">
+                          <a:solidFill>
+                            <a:srgbClr val="152238"/>
+                          </a:solidFill>
+                          <a:latin typeface="Times New Roman" pitchFamily="34" charset="0"/>
+                          <a:ea typeface="Times New Roman" pitchFamily="34" charset="-122"/>
+                          <a:cs typeface="Times New Roman" pitchFamily="34" charset="-120"/>
+                        </a:rPr>
+                        <a:t>s01</a:t>
+                      </a:r>
+                      <a:endParaRPr lang="en-US" sz="1050" dirty="0">
+                        <a:latin typeface="Times New Roman" charset="0"/>
+                        <a:ea typeface="Times New Roman" charset="0"/>
+                        <a:cs typeface="Times New Roman" charset="0"/>
+                      </a:endParaRPr>
+                    </a:p>
+                  </a:txBody>
+                  <a:tcPr marL="91440" marR="91440" marT="45720" marB="45720" anchor="ctr">
+                    <a:lnL w="9525" cap="flat" cmpd="sng" algn="ctr">
+                      <a:solidFill>
+                        <a:srgbClr val="D5DCE5"/>
+                      </a:solidFill>
+                      <a:prstDash val="solid"/>
+                      <a:round/>
+                      <a:headEnd type="none" w="med" len="med"/>
+                      <a:tailEnd type="none" w="med" len="med"/>
+                    </a:lnL>
+                    <a:lnR w="9525" cap="flat" cmpd="sng" algn="ctr">
+                      <a:solidFill>
+                        <a:srgbClr val="D5DCE5"/>
+                      </a:solidFill>
+                      <a:prstDash val="solid"/>
+                      <a:round/>
+                      <a:headEnd type="none" w="med" len="med"/>
+                      <a:tailEnd type="none" w="med" len="med"/>
+                    </a:lnR>
+                    <a:lnT w="9525" cap="flat" cmpd="sng" algn="ctr">
+                      <a:solidFill>
+                        <a:srgbClr val="D5DCE5"/>
+                      </a:solidFill>
+                      <a:prstDash val="solid"/>
+                      <a:round/>
+                      <a:headEnd type="none" w="med" len="med"/>
+                      <a:tailEnd type="none" w="med" len="med"/>
+                    </a:lnT>
+                    <a:lnB w="9525" cap="flat" cmpd="sng" algn="ctr">
+                      <a:solidFill>
+                        <a:srgbClr val="D5DCE5"/>
+                      </a:solidFill>
+                      <a:prstDash val="solid"/>
+                      <a:round/>
+                      <a:headEnd type="none" w="med" len="med"/>
+                      <a:tailEnd type="none" w="med" len="med"/>
+                    </a:lnB>
+                    <a:solidFill>
+                      <a:srgbClr val="FFFFFF"/>
+                    </a:solidFill>
+                  </a:tcPr>
+                </a:tc>
+                <a:tc>
+                  <a:txBody>
+                    <a:bodyPr/>
+                    <a:lstStyle/>
+                    <a:p>
+                      <a:pPr indent="0" marL="0">
+                        <a:buNone/>
+                      </a:pPr>
+                      <a:r>
+                        <a:rPr lang="en-US" sz="1050" dirty="0">
+                          <a:solidFill>
+                            <a:srgbClr val="1A1A1A"/>
+                          </a:solidFill>
+                          <a:latin typeface="Microsoft YaHei" pitchFamily="34" charset="0"/>
+                          <a:ea typeface="Microsoft YaHei" pitchFamily="34" charset="-122"/>
+                          <a:cs typeface="Microsoft YaHei" pitchFamily="34" charset="-120"/>
+                        </a:rPr>
+                        <a:t>测试集 / RUL 文件</a:t>
+                      </a:r>
+                      <a:endParaRPr lang="en-US" sz="1050" dirty="0">
+                        <a:latin typeface="Microsoft YaHei" charset="0"/>
+                        <a:ea typeface="Microsoft YaHei" charset="0"/>
+                        <a:cs typeface="Microsoft YaHei" charset="0"/>
+                      </a:endParaRPr>
+                    </a:p>
+                  </a:txBody>
+                  <a:tcPr marL="91440" marR="91440" marT="45720" marB="45720" anchor="ctr">
+                    <a:lnL w="9525" cap="flat" cmpd="sng" algn="ctr">
+                      <a:solidFill>
+                        <a:srgbClr val="D5DCE5"/>
+                      </a:solidFill>
+                      <a:prstDash val="solid"/>
+                      <a:round/>
+                      <a:headEnd type="none" w="med" len="med"/>
+                      <a:tailEnd type="none" w="med" len="med"/>
+                    </a:lnL>
+                    <a:lnR w="9525" cap="flat" cmpd="sng" algn="ctr">
+                      <a:solidFill>
+                        <a:srgbClr val="D5DCE5"/>
+                      </a:solidFill>
+                      <a:prstDash val="solid"/>
+                      <a:round/>
+                      <a:headEnd type="none" w="med" len="med"/>
+                      <a:tailEnd type="none" w="med" len="med"/>
+                    </a:lnR>
+                    <a:lnT w="9525" cap="flat" cmpd="sng" algn="ctr">
+                      <a:solidFill>
+                        <a:srgbClr val="D5DCE5"/>
+                      </a:solidFill>
+                      <a:prstDash val="solid"/>
+                      <a:round/>
+                      <a:headEnd type="none" w="med" len="med"/>
+                      <a:tailEnd type="none" w="med" len="med"/>
+                    </a:lnT>
+                    <a:lnB w="9525" cap="flat" cmpd="sng" algn="ctr">
+                      <a:solidFill>
+                        <a:srgbClr val="D5DCE5"/>
+                      </a:solidFill>
+                      <a:prstDash val="solid"/>
+                      <a:round/>
+                      <a:headEnd type="none" w="med" len="med"/>
+                      <a:tailEnd type="none" w="med" len="med"/>
+                    </a:lnB>
+                    <a:solidFill>
+                      <a:srgbClr val="FFFFFF"/>
+                    </a:solidFill>
+                  </a:tcPr>
+                </a:tc>
+                <a:tc>
+                  <a:txBody>
+                    <a:bodyPr/>
+                    <a:lstStyle/>
+                    <a:p>
+                      <a:pPr indent="0" marL="0">
+                        <a:buNone/>
+                      </a:pPr>
+                      <a:r>
+                        <a:rPr lang="en-US" sz="1050" dirty="0">
+                          <a:solidFill>
+                            <a:srgbClr val="1A1A1A"/>
+                          </a:solidFill>
+                          <a:latin typeface="Microsoft YaHei" pitchFamily="34" charset="0"/>
+                          <a:ea typeface="Microsoft YaHei" pitchFamily="34" charset="-122"/>
+                          <a:cs typeface="Microsoft YaHei" pitchFamily="34" charset="-120"/>
+                        </a:rPr>
+                        <a:t>100 台 13096 行 / 100 行</a:t>
+                      </a:r>
+                      <a:endParaRPr lang="en-US" sz="1050" dirty="0">
+                        <a:latin typeface="Microsoft YaHei" charset="0"/>
+                        <a:ea typeface="Microsoft YaHei" charset="0"/>
+                        <a:cs typeface="Microsoft YaHei" charset="0"/>
+                      </a:endParaRPr>
+                    </a:p>
+                  </a:txBody>
+                  <a:tcPr marL="91440" marR="91440" marT="45720" marB="45720" anchor="ctr">
+                    <a:lnL w="9525" cap="flat" cmpd="sng" algn="ctr">
+                      <a:solidFill>
+                        <a:srgbClr val="D5DCE5"/>
+                      </a:solidFill>
+                      <a:prstDash val="solid"/>
+                      <a:round/>
+                      <a:headEnd type="none" w="med" len="med"/>
+                      <a:tailEnd type="none" w="med" len="med"/>
+                    </a:lnL>
+                    <a:lnR w="9525" cap="flat" cmpd="sng" algn="ctr">
+                      <a:solidFill>
+                        <a:srgbClr val="D5DCE5"/>
+                      </a:solidFill>
+                      <a:prstDash val="solid"/>
+                      <a:round/>
+                      <a:headEnd type="none" w="med" len="med"/>
+                      <a:tailEnd type="none" w="med" len="med"/>
+                    </a:lnR>
+                    <a:lnT w="9525" cap="flat" cmpd="sng" algn="ctr">
+                      <a:solidFill>
+                        <a:srgbClr val="D5DCE5"/>
+                      </a:solidFill>
+                      <a:prstDash val="solid"/>
+                      <a:round/>
+                      <a:headEnd type="none" w="med" len="med"/>
+                      <a:tailEnd type="none" w="med" len="med"/>
+                    </a:lnT>
+                    <a:lnB w="9525" cap="flat" cmpd="sng" algn="ctr">
+                      <a:solidFill>
+                        <a:srgbClr val="D5DCE5"/>
+                      </a:solidFill>
+                      <a:prstDash val="solid"/>
+                      <a:round/>
+                      <a:headEnd type="none" w="med" len="med"/>
+                      <a:tailEnd type="none" w="med" len="med"/>
+                    </a:lnB>
+                    <a:solidFill>
+                      <a:srgbClr val="FFFFFF"/>
+                    </a:solidFill>
+                  </a:tcPr>
+                </a:tc>
+                <a:tc>
+                  <a:txBody>
+                    <a:bodyPr/>
+                    <a:lstStyle/>
+                    <a:p>
+                      <a:pPr indent="0" marL="0">
+                        <a:buNone/>
+                      </a:pPr>
+                      <a:r>
+                        <a:rPr lang="en-US" sz="1050" b="1" dirty="0">
+                          <a:solidFill>
+                            <a:srgbClr val="3D7A5A"/>
+                          </a:solidFill>
+                          <a:latin typeface="Microsoft YaHei" pitchFamily="34" charset="0"/>
+                          <a:ea typeface="Microsoft YaHei" pitchFamily="34" charset="-122"/>
+                          <a:cs typeface="Microsoft YaHei" pitchFamily="34" charset="-120"/>
+                        </a:rPr>
+                        <a:t>100 台 13096 行 / 100 行</a:t>
+                      </a:r>
+                      <a:endParaRPr lang="en-US" sz="1050" dirty="0">
+                        <a:latin typeface="Microsoft YaHei" charset="0"/>
+                        <a:ea typeface="Microsoft YaHei" charset="0"/>
+                        <a:cs typeface="Microsoft YaHei" charset="0"/>
+                      </a:endParaRPr>
+                    </a:p>
+                  </a:txBody>
+                  <a:tcPr marL="91440" marR="91440" marT="45720" marB="45720" anchor="ctr">
+                    <a:lnL w="9525" cap="flat" cmpd="sng" algn="ctr">
+                      <a:solidFill>
+                        <a:srgbClr val="D5DCE5"/>
+                      </a:solidFill>
+                      <a:prstDash val="solid"/>
+                      <a:round/>
+                      <a:headEnd type="none" w="med" len="med"/>
+                      <a:tailEnd type="none" w="med" len="med"/>
+                    </a:lnL>
+                    <a:lnR w="9525" cap="flat" cmpd="sng" algn="ctr">
+                      <a:solidFill>
+                        <a:srgbClr val="D5DCE5"/>
+                      </a:solidFill>
+                      <a:prstDash val="solid"/>
+                      <a:round/>
+                      <a:headEnd type="none" w="med" len="med"/>
+                      <a:tailEnd type="none" w="med" len="med"/>
+                    </a:lnR>
+                    <a:lnT w="9525" cap="flat" cmpd="sng" algn="ctr">
+                      <a:solidFill>
+                        <a:srgbClr val="D5DCE5"/>
+                      </a:solidFill>
+                      <a:prstDash val="solid"/>
+                      <a:round/>
+                      <a:headEnd type="none" w="med" len="med"/>
+                      <a:tailEnd type="none" w="med" len="med"/>
+                    </a:lnT>
+                    <a:lnB w="9525" cap="flat" cmpd="sng" algn="ctr">
+                      <a:solidFill>
+                        <a:srgbClr val="D5DCE5"/>
+                      </a:solidFill>
+                      <a:prstDash val="solid"/>
+                      <a:round/>
+                      <a:headEnd type="none" w="med" len="med"/>
+                      <a:tailEnd type="none" w="med" len="med"/>
+                    </a:lnB>
+                    <a:solidFill>
+                      <a:srgbClr val="FFFFFF"/>
+                    </a:solidFill>
+                  </a:tcPr>
+                </a:tc>
+              </a:tr>
+              <a:tr h="411480">
+                <a:tc>
+                  <a:txBody>
+                    <a:bodyPr/>
+                    <a:lstStyle/>
+                    <a:p>
+                      <a:pPr indent="0" marL="0">
+                        <a:buNone/>
+                      </a:pPr>
+                      <a:r>
+                        <a:rPr lang="en-US" sz="1050" b="1" dirty="0">
+                          <a:solidFill>
+                            <a:srgbClr val="152238"/>
+                          </a:solidFill>
+                          <a:latin typeface="Times New Roman" pitchFamily="34" charset="0"/>
+                          <a:ea typeface="Times New Roman" pitchFamily="34" charset="-122"/>
+                          <a:cs typeface="Times New Roman" pitchFamily="34" charset="-120"/>
+                        </a:rPr>
+                        <a:t>s01</a:t>
+                      </a:r>
+                      <a:endParaRPr lang="en-US" sz="1050" dirty="0">
+                        <a:latin typeface="Times New Roman" charset="0"/>
+                        <a:ea typeface="Times New Roman" charset="0"/>
+                        <a:cs typeface="Times New Roman" charset="0"/>
+                      </a:endParaRPr>
+                    </a:p>
+                  </a:txBody>
+                  <a:tcPr marL="91440" marR="91440" marT="45720" marB="45720" anchor="ctr">
+                    <a:lnL w="9525" cap="flat" cmpd="sng" algn="ctr">
+                      <a:solidFill>
+                        <a:srgbClr val="D5DCE5"/>
+                      </a:solidFill>
+                      <a:prstDash val="solid"/>
+                      <a:round/>
+                      <a:headEnd type="none" w="med" len="med"/>
+                      <a:tailEnd type="none" w="med" len="med"/>
+                    </a:lnL>
+                    <a:lnR w="9525" cap="flat" cmpd="sng" algn="ctr">
+                      <a:solidFill>
+                        <a:srgbClr val="D5DCE5"/>
+                      </a:solidFill>
+                      <a:prstDash val="solid"/>
+                      <a:round/>
+                      <a:headEnd type="none" w="med" len="med"/>
+                      <a:tailEnd type="none" w="med" len="med"/>
+                    </a:lnR>
+                    <a:lnT w="9525" cap="flat" cmpd="sng" algn="ctr">
+                      <a:solidFill>
+                        <a:srgbClr val="D5DCE5"/>
+                      </a:solidFill>
+                      <a:prstDash val="solid"/>
+                      <a:round/>
+                      <a:headEnd type="none" w="med" len="med"/>
+                      <a:tailEnd type="none" w="med" len="med"/>
+                    </a:lnT>
+                    <a:lnB w="9525" cap="flat" cmpd="sng" algn="ctr">
+                      <a:solidFill>
+                        <a:srgbClr val="D5DCE5"/>
+                      </a:solidFill>
+                      <a:prstDash val="solid"/>
+                      <a:round/>
+                      <a:headEnd type="none" w="med" len="med"/>
+                      <a:tailEnd type="none" w="med" len="med"/>
+                    </a:lnB>
+                    <a:solidFill>
+                      <a:srgbClr val="FFFFFF"/>
+                    </a:solidFill>
+                  </a:tcPr>
+                </a:tc>
+                <a:tc>
+                  <a:txBody>
+                    <a:bodyPr/>
+                    <a:lstStyle/>
+                    <a:p>
+                      <a:pPr indent="0" marL="0">
+                        <a:buNone/>
+                      </a:pPr>
+                      <a:r>
+                        <a:rPr lang="en-US" sz="1050" dirty="0">
+                          <a:solidFill>
+                            <a:srgbClr val="1A1A1A"/>
+                          </a:solidFill>
+                          <a:latin typeface="Microsoft YaHei" pitchFamily="34" charset="0"/>
+                          <a:ea typeface="Microsoft YaHei" pitchFamily="34" charset="-122"/>
+                          <a:cs typeface="Microsoft YaHei" pitchFamily="34" charset="-120"/>
+                        </a:rPr>
+                        <a:t>近零方差传感器</a:t>
+                      </a:r>
+                      <a:endParaRPr lang="en-US" sz="1050" dirty="0">
+                        <a:latin typeface="Microsoft YaHei" charset="0"/>
+                        <a:ea typeface="Microsoft YaHei" charset="0"/>
+                        <a:cs typeface="Microsoft YaHei" charset="0"/>
+                      </a:endParaRPr>
+                    </a:p>
+                  </a:txBody>
+                  <a:tcPr marL="91440" marR="91440" marT="45720" marB="45720" anchor="ctr">
+                    <a:lnL w="9525" cap="flat" cmpd="sng" algn="ctr">
+                      <a:solidFill>
+                        <a:srgbClr val="D5DCE5"/>
+                      </a:solidFill>
+                      <a:prstDash val="solid"/>
+                      <a:round/>
+                      <a:headEnd type="none" w="med" len="med"/>
+                      <a:tailEnd type="none" w="med" len="med"/>
+                    </a:lnL>
+                    <a:lnR w="9525" cap="flat" cmpd="sng" algn="ctr">
+                      <a:solidFill>
+                        <a:srgbClr val="D5DCE5"/>
+                      </a:solidFill>
+                      <a:prstDash val="solid"/>
+                      <a:round/>
+                      <a:headEnd type="none" w="med" len="med"/>
+                      <a:tailEnd type="none" w="med" len="med"/>
+                    </a:lnR>
+                    <a:lnT w="9525" cap="flat" cmpd="sng" algn="ctr">
+                      <a:solidFill>
+                        <a:srgbClr val="D5DCE5"/>
+                      </a:solidFill>
+                      <a:prstDash val="solid"/>
+                      <a:round/>
+                      <a:headEnd type="none" w="med" len="med"/>
+                      <a:tailEnd type="none" w="med" len="med"/>
+                    </a:lnT>
+                    <a:lnB w="9525" cap="flat" cmpd="sng" algn="ctr">
+                      <a:solidFill>
+                        <a:srgbClr val="D5DCE5"/>
+                      </a:solidFill>
+                      <a:prstDash val="solid"/>
+                      <a:round/>
+                      <a:headEnd type="none" w="med" len="med"/>
+                      <a:tailEnd type="none" w="med" len="med"/>
+                    </a:lnB>
+                    <a:solidFill>
+                      <a:srgbClr val="FFFFFF"/>
+                    </a:solidFill>
+                  </a:tcPr>
+                </a:tc>
+                <a:tc>
+                  <a:txBody>
+                    <a:bodyPr/>
+                    <a:lstStyle/>
+                    <a:p>
+                      <a:pPr indent="0" marL="0">
+                        <a:buNone/>
+                      </a:pPr>
+                      <a:r>
+                        <a:rPr lang="en-US" sz="1050" dirty="0">
+                          <a:solidFill>
+                            <a:srgbClr val="1A1A1A"/>
+                          </a:solidFill>
+                          <a:latin typeface="Microsoft YaHei" pitchFamily="34" charset="0"/>
+                          <a:ea typeface="Microsoft YaHei" pitchFamily="34" charset="-122"/>
+                          <a:cs typeface="Microsoft YaHei" pitchFamily="34" charset="-120"/>
+                        </a:rPr>
+                        <a:t>1, 5, 6, 10, 16, 18, 19</a:t>
+                      </a:r>
+                      <a:endParaRPr lang="en-US" sz="1050" dirty="0">
+                        <a:latin typeface="Microsoft YaHei" charset="0"/>
+                        <a:ea typeface="Microsoft YaHei" charset="0"/>
+                        <a:cs typeface="Microsoft YaHei" charset="0"/>
+                      </a:endParaRPr>
+                    </a:p>
+                  </a:txBody>
+                  <a:tcPr marL="91440" marR="91440" marT="45720" marB="45720" anchor="ctr">
+                    <a:lnL w="9525" cap="flat" cmpd="sng" algn="ctr">
+                      <a:solidFill>
+                        <a:srgbClr val="D5DCE5"/>
+                      </a:solidFill>
+                      <a:prstDash val="solid"/>
+                      <a:round/>
+                      <a:headEnd type="none" w="med" len="med"/>
+                      <a:tailEnd type="none" w="med" len="med"/>
+                    </a:lnL>
+                    <a:lnR w="9525" cap="flat" cmpd="sng" algn="ctr">
+                      <a:solidFill>
+                        <a:srgbClr val="D5DCE5"/>
+                      </a:solidFill>
+                      <a:prstDash val="solid"/>
+                      <a:round/>
+                      <a:headEnd type="none" w="med" len="med"/>
+                      <a:tailEnd type="none" w="med" len="med"/>
+                    </a:lnR>
+                    <a:lnT w="9525" cap="flat" cmpd="sng" algn="ctr">
+                      <a:solidFill>
+                        <a:srgbClr val="D5DCE5"/>
+                      </a:solidFill>
+                      <a:prstDash val="solid"/>
+                      <a:round/>
+                      <a:headEnd type="none" w="med" len="med"/>
+                      <a:tailEnd type="none" w="med" len="med"/>
+                    </a:lnT>
+                    <a:lnB w="9525" cap="flat" cmpd="sng" algn="ctr">
+                      <a:solidFill>
+                        <a:srgbClr val="D5DCE5"/>
+                      </a:solidFill>
+                      <a:prstDash val="solid"/>
+                      <a:round/>
+                      <a:headEnd type="none" w="med" len="med"/>
+                      <a:tailEnd type="none" w="med" len="med"/>
+                    </a:lnB>
+                    <a:solidFill>
+                      <a:srgbClr val="FFFFFF"/>
+                    </a:solidFill>
+                  </a:tcPr>
+                </a:tc>
+                <a:tc>
+                  <a:txBody>
+                    <a:bodyPr/>
+                    <a:lstStyle/>
+                    <a:p>
+                      <a:pPr indent="0" marL="0">
+                        <a:buNone/>
+                      </a:pPr>
+                      <a:r>
+                        <a:rPr lang="en-US" sz="1050" b="1" dirty="0">
+                          <a:solidFill>
+                            <a:srgbClr val="3D7A5A"/>
+                          </a:solidFill>
+                          <a:latin typeface="Microsoft YaHei" pitchFamily="34" charset="0"/>
+                          <a:ea typeface="Microsoft YaHei" pitchFamily="34" charset="-122"/>
+                          <a:cs typeface="Microsoft YaHei" pitchFamily="34" charset="-120"/>
+                        </a:rPr>
+                        <a:t>1, 5, 6, 10, 16, 18, 19（传感器 6 的 std = 0.0014）</a:t>
+                      </a:r>
+                      <a:endParaRPr lang="en-US" sz="1050" dirty="0">
+                        <a:latin typeface="Microsoft YaHei" charset="0"/>
+                        <a:ea typeface="Microsoft YaHei" charset="0"/>
+                        <a:cs typeface="Microsoft YaHei" charset="0"/>
+                      </a:endParaRPr>
+                    </a:p>
+                  </a:txBody>
+                  <a:tcPr marL="91440" marR="91440" marT="45720" marB="45720" anchor="ctr">
+                    <a:lnL w="9525" cap="flat" cmpd="sng" algn="ctr">
+                      <a:solidFill>
+                        <a:srgbClr val="D5DCE5"/>
+                      </a:solidFill>
+                      <a:prstDash val="solid"/>
+                      <a:round/>
+                      <a:headEnd type="none" w="med" len="med"/>
+                      <a:tailEnd type="none" w="med" len="med"/>
+                    </a:lnL>
+                    <a:lnR w="9525" cap="flat" cmpd="sng" algn="ctr">
+                      <a:solidFill>
+                        <a:srgbClr val="D5DCE5"/>
+                      </a:solidFill>
+                      <a:prstDash val="solid"/>
+                      <a:round/>
+                      <a:headEnd type="none" w="med" len="med"/>
+                      <a:tailEnd type="none" w="med" len="med"/>
+                    </a:lnR>
+                    <a:lnT w="9525" cap="flat" cmpd="sng" algn="ctr">
+                      <a:solidFill>
+                        <a:srgbClr val="D5DCE5"/>
+                      </a:solidFill>
+                      <a:prstDash val="solid"/>
+                      <a:round/>
+                      <a:headEnd type="none" w="med" len="med"/>
+                      <a:tailEnd type="none" w="med" len="med"/>
+                    </a:lnT>
+                    <a:lnB w="9525" cap="flat" cmpd="sng" algn="ctr">
+                      <a:solidFill>
+                        <a:srgbClr val="D5DCE5"/>
+                      </a:solidFill>
+                      <a:prstDash val="solid"/>
+                      <a:round/>
+                      <a:headEnd type="none" w="med" len="med"/>
+                      <a:tailEnd type="none" w="med" len="med"/>
+                    </a:lnB>
+                    <a:solidFill>
+                      <a:srgbClr val="FFFFFF"/>
+                    </a:solidFill>
+                  </a:tcPr>
+                </a:tc>
+              </a:tr>
+              <a:tr h="411480">
+                <a:tc>
+                  <a:txBody>
+                    <a:bodyPr/>
+                    <a:lstStyle/>
+                    <a:p>
+                      <a:pPr indent="0" marL="0">
+                        <a:buNone/>
+                      </a:pPr>
+                      <a:r>
+                        <a:rPr lang="en-US" sz="1050" b="1" dirty="0">
+                          <a:solidFill>
+                            <a:srgbClr val="152238"/>
+                          </a:solidFill>
+                          <a:latin typeface="Times New Roman" pitchFamily="34" charset="0"/>
+                          <a:ea typeface="Times New Roman" pitchFamily="34" charset="-122"/>
+                          <a:cs typeface="Times New Roman" pitchFamily="34" charset="-120"/>
+                        </a:rPr>
+                        <a:t>s01</a:t>
+                      </a:r>
+                      <a:endParaRPr lang="en-US" sz="1050" dirty="0">
+                        <a:latin typeface="Times New Roman" charset="0"/>
+                        <a:ea typeface="Times New Roman" charset="0"/>
+                        <a:cs typeface="Times New Roman" charset="0"/>
+                      </a:endParaRPr>
+                    </a:p>
+                  </a:txBody>
+                  <a:tcPr marL="91440" marR="91440" marT="45720" marB="45720" anchor="ctr">
+                    <a:lnL w="9525" cap="flat" cmpd="sng" algn="ctr">
+                      <a:solidFill>
+                        <a:srgbClr val="D5DCE5"/>
+                      </a:solidFill>
+                      <a:prstDash val="solid"/>
+                      <a:round/>
+                      <a:headEnd type="none" w="med" len="med"/>
+                      <a:tailEnd type="none" w="med" len="med"/>
+                    </a:lnL>
+                    <a:lnR w="9525" cap="flat" cmpd="sng" algn="ctr">
+                      <a:solidFill>
+                        <a:srgbClr val="D5DCE5"/>
+                      </a:solidFill>
+                      <a:prstDash val="solid"/>
+                      <a:round/>
+                      <a:headEnd type="none" w="med" len="med"/>
+                      <a:tailEnd type="none" w="med" len="med"/>
+                    </a:lnR>
+                    <a:lnT w="9525" cap="flat" cmpd="sng" algn="ctr">
+                      <a:solidFill>
+                        <a:srgbClr val="D5DCE5"/>
+                      </a:solidFill>
+                      <a:prstDash val="solid"/>
+                      <a:round/>
+                      <a:headEnd type="none" w="med" len="med"/>
+                      <a:tailEnd type="none" w="med" len="med"/>
+                    </a:lnT>
+                    <a:lnB w="9525" cap="flat" cmpd="sng" algn="ctr">
+                      <a:solidFill>
+                        <a:srgbClr val="D5DCE5"/>
+                      </a:solidFill>
+                      <a:prstDash val="solid"/>
+                      <a:round/>
+                      <a:headEnd type="none" w="med" len="med"/>
+                      <a:tailEnd type="none" w="med" len="med"/>
+                    </a:lnB>
+                    <a:solidFill>
+                      <a:srgbClr val="FFFFFF"/>
+                    </a:solidFill>
+                  </a:tcPr>
+                </a:tc>
+                <a:tc>
+                  <a:txBody>
+                    <a:bodyPr/>
+                    <a:lstStyle/>
+                    <a:p>
+                      <a:pPr indent="0" marL="0">
+                        <a:buNone/>
+                      </a:pPr>
+                      <a:r>
+                        <a:rPr lang="en-US" sz="1050" dirty="0">
+                          <a:solidFill>
+                            <a:srgbClr val="1A1A1A"/>
+                          </a:solidFill>
+                          <a:latin typeface="Microsoft YaHei" pitchFamily="34" charset="0"/>
+                          <a:ea typeface="Microsoft YaHei" pitchFamily="34" charset="-122"/>
+                          <a:cs typeface="Microsoft YaHei" pitchFamily="34" charset="-120"/>
+                        </a:rPr>
+                        <a:t>工况组合数</a:t>
+                      </a:r>
+                      <a:endParaRPr lang="en-US" sz="1050" dirty="0">
+                        <a:latin typeface="Microsoft YaHei" charset="0"/>
+                        <a:ea typeface="Microsoft YaHei" charset="0"/>
+                        <a:cs typeface="Microsoft YaHei" charset="0"/>
+                      </a:endParaRPr>
+                    </a:p>
+                  </a:txBody>
+                  <a:tcPr marL="91440" marR="91440" marT="45720" marB="45720" anchor="ctr">
+                    <a:lnL w="9525" cap="flat" cmpd="sng" algn="ctr">
+                      <a:solidFill>
+                        <a:srgbClr val="D5DCE5"/>
+                      </a:solidFill>
+                      <a:prstDash val="solid"/>
+                      <a:round/>
+                      <a:headEnd type="none" w="med" len="med"/>
+                      <a:tailEnd type="none" w="med" len="med"/>
+                    </a:lnL>
+                    <a:lnR w="9525" cap="flat" cmpd="sng" algn="ctr">
+                      <a:solidFill>
+                        <a:srgbClr val="D5DCE5"/>
+                      </a:solidFill>
+                      <a:prstDash val="solid"/>
+                      <a:round/>
+                      <a:headEnd type="none" w="med" len="med"/>
+                      <a:tailEnd type="none" w="med" len="med"/>
+                    </a:lnR>
+                    <a:lnT w="9525" cap="flat" cmpd="sng" algn="ctr">
+                      <a:solidFill>
+                        <a:srgbClr val="D5DCE5"/>
+                      </a:solidFill>
+                      <a:prstDash val="solid"/>
+                      <a:round/>
+                      <a:headEnd type="none" w="med" len="med"/>
+                      <a:tailEnd type="none" w="med" len="med"/>
+                    </a:lnT>
+                    <a:lnB w="9525" cap="flat" cmpd="sng" algn="ctr">
+                      <a:solidFill>
+                        <a:srgbClr val="D5DCE5"/>
+                      </a:solidFill>
+                      <a:prstDash val="solid"/>
+                      <a:round/>
+                      <a:headEnd type="none" w="med" len="med"/>
+                      <a:tailEnd type="none" w="med" len="med"/>
+                    </a:lnB>
+                    <a:solidFill>
+                      <a:srgbClr val="FFFFFF"/>
+                    </a:solidFill>
+                  </a:tcPr>
+                </a:tc>
+                <a:tc>
+                  <a:txBody>
+                    <a:bodyPr/>
+                    <a:lstStyle/>
+                    <a:p>
+                      <a:pPr indent="0" marL="0">
+                        <a:buNone/>
+                      </a:pPr>
+                      <a:r>
+                        <a:rPr lang="en-US" sz="1050" dirty="0">
+                          <a:solidFill>
+                            <a:srgbClr val="1A1A1A"/>
+                          </a:solidFill>
+                          <a:latin typeface="Microsoft YaHei" pitchFamily="34" charset="0"/>
+                          <a:ea typeface="Microsoft YaHei" pitchFamily="34" charset="-122"/>
+                          <a:cs typeface="Microsoft YaHei" pitchFamily="34" charset="-120"/>
+                        </a:rPr>
+                        <a:t>FD001 为 1，FD002 / FD004 为 6</a:t>
+                      </a:r>
+                      <a:endParaRPr lang="en-US" sz="1050" dirty="0">
+                        <a:latin typeface="Microsoft YaHei" charset="0"/>
+                        <a:ea typeface="Microsoft YaHei" charset="0"/>
+                        <a:cs typeface="Microsoft YaHei" charset="0"/>
+                      </a:endParaRPr>
+                    </a:p>
+                  </a:txBody>
+                  <a:tcPr marL="91440" marR="91440" marT="45720" marB="45720" anchor="ctr">
+                    <a:lnL w="9525" cap="flat" cmpd="sng" algn="ctr">
+                      <a:solidFill>
+                        <a:srgbClr val="D5DCE5"/>
+                      </a:solidFill>
+                      <a:prstDash val="solid"/>
+                      <a:round/>
+                      <a:headEnd type="none" w="med" len="med"/>
+                      <a:tailEnd type="none" w="med" len="med"/>
+                    </a:lnL>
+                    <a:lnR w="9525" cap="flat" cmpd="sng" algn="ctr">
+                      <a:solidFill>
+                        <a:srgbClr val="D5DCE5"/>
+                      </a:solidFill>
+                      <a:prstDash val="solid"/>
+                      <a:round/>
+                      <a:headEnd type="none" w="med" len="med"/>
+                      <a:tailEnd type="none" w="med" len="med"/>
+                    </a:lnR>
+                    <a:lnT w="9525" cap="flat" cmpd="sng" algn="ctr">
+                      <a:solidFill>
+                        <a:srgbClr val="D5DCE5"/>
+                      </a:solidFill>
+                      <a:prstDash val="solid"/>
+                      <a:round/>
+                      <a:headEnd type="none" w="med" len="med"/>
+                      <a:tailEnd type="none" w="med" len="med"/>
+                    </a:lnT>
+                    <a:lnB w="9525" cap="flat" cmpd="sng" algn="ctr">
+                      <a:solidFill>
+                        <a:srgbClr val="D5DCE5"/>
+                      </a:solidFill>
+                      <a:prstDash val="solid"/>
+                      <a:round/>
+                      <a:headEnd type="none" w="med" len="med"/>
+                      <a:tailEnd type="none" w="med" len="med"/>
+                    </a:lnB>
+                    <a:solidFill>
+                      <a:srgbClr val="FFFFFF"/>
+                    </a:solidFill>
+                  </a:tcPr>
+                </a:tc>
+                <a:tc>
+                  <a:txBody>
+                    <a:bodyPr/>
+                    <a:lstStyle/>
+                    <a:p>
+                      <a:pPr indent="0" marL="0">
+                        <a:buNone/>
+                      </a:pPr>
+                      <a:r>
+                        <a:rPr lang="en-US" sz="1050" b="1" dirty="0">
+                          <a:solidFill>
+                            <a:srgbClr val="3D7A5A"/>
+                          </a:solidFill>
+                          <a:latin typeface="Microsoft YaHei" pitchFamily="34" charset="0"/>
+                          <a:ea typeface="Microsoft YaHei" pitchFamily="34" charset="-122"/>
+                          <a:cs typeface="Microsoft YaHei" pitchFamily="34" charset="-120"/>
+                        </a:rPr>
+                        <a:t>1，6，6</a:t>
+                      </a:r>
+                      <a:endParaRPr lang="en-US" sz="1050" dirty="0">
+                        <a:latin typeface="Microsoft YaHei" charset="0"/>
+                        <a:ea typeface="Microsoft YaHei" charset="0"/>
+                        <a:cs typeface="Microsoft YaHei" charset="0"/>
+                      </a:endParaRPr>
+                    </a:p>
+                  </a:txBody>
+                  <a:tcPr marL="91440" marR="91440" marT="45720" marB="45720" anchor="ctr">
+                    <a:lnL w="9525" cap="flat" cmpd="sng" algn="ctr">
+                      <a:solidFill>
+                        <a:srgbClr val="D5DCE5"/>
+                      </a:solidFill>
+                      <a:prstDash val="solid"/>
+                      <a:round/>
+                      <a:headEnd type="none" w="med" len="med"/>
+                      <a:tailEnd type="none" w="med" len="med"/>
+                    </a:lnL>
+                    <a:lnR w="9525" cap="flat" cmpd="sng" algn="ctr">
+                      <a:solidFill>
+                        <a:srgbClr val="D5DCE5"/>
+                      </a:solidFill>
+                      <a:prstDash val="solid"/>
+                      <a:round/>
+                      <a:headEnd type="none" w="med" len="med"/>
+                      <a:tailEnd type="none" w="med" len="med"/>
+                    </a:lnR>
+                    <a:lnT w="9525" cap="flat" cmpd="sng" algn="ctr">
+                      <a:solidFill>
+                        <a:srgbClr val="D5DCE5"/>
+                      </a:solidFill>
+                      <a:prstDash val="solid"/>
+                      <a:round/>
+                      <a:headEnd type="none" w="med" len="med"/>
+                      <a:tailEnd type="none" w="med" len="med"/>
+                    </a:lnT>
+                    <a:lnB w="9525" cap="flat" cmpd="sng" algn="ctr">
+                      <a:solidFill>
+                        <a:srgbClr val="D5DCE5"/>
+                      </a:solidFill>
+                      <a:prstDash val="solid"/>
+                      <a:round/>
+                      <a:headEnd type="none" w="med" len="med"/>
+                      <a:tailEnd type="none" w="med" len="med"/>
+                    </a:lnB>
+                    <a:solidFill>
+                      <a:srgbClr val="FFFFFF"/>
+                    </a:solidFill>
+                  </a:tcPr>
+                </a:tc>
+              </a:tr>
+              <a:tr h="411480">
+                <a:tc>
+                  <a:txBody>
+                    <a:bodyPr/>
+                    <a:lstStyle/>
+                    <a:p>
+                      <a:pPr indent="0" marL="0">
+                        <a:buNone/>
+                      </a:pPr>
+                      <a:r>
+                        <a:rPr lang="en-US" sz="1050" b="1" dirty="0">
+                          <a:solidFill>
+                            <a:srgbClr val="152238"/>
+                          </a:solidFill>
+                          <a:latin typeface="Times New Roman" pitchFamily="34" charset="0"/>
+                          <a:ea typeface="Times New Roman" pitchFamily="34" charset="-122"/>
+                          <a:cs typeface="Times New Roman" pitchFamily="34" charset="-120"/>
+                        </a:rPr>
+                        <a:t>s02</a:t>
+                      </a:r>
+                      <a:endParaRPr lang="en-US" sz="1050" dirty="0">
+                        <a:latin typeface="Times New Roman" charset="0"/>
+                        <a:ea typeface="Times New Roman" charset="0"/>
+                        <a:cs typeface="Times New Roman" charset="0"/>
+                      </a:endParaRPr>
+                    </a:p>
+                  </a:txBody>
+                  <a:tcPr marL="91440" marR="91440" marT="45720" marB="45720" anchor="ctr">
+                    <a:lnL w="9525" cap="flat" cmpd="sng" algn="ctr">
+                      <a:solidFill>
+                        <a:srgbClr val="D5DCE5"/>
+                      </a:solidFill>
+                      <a:prstDash val="solid"/>
+                      <a:round/>
+                      <a:headEnd type="none" w="med" len="med"/>
+                      <a:tailEnd type="none" w="med" len="med"/>
+                    </a:lnL>
+                    <a:lnR w="9525" cap="flat" cmpd="sng" algn="ctr">
+                      <a:solidFill>
+                        <a:srgbClr val="D5DCE5"/>
+                      </a:solidFill>
+                      <a:prstDash val="solid"/>
+                      <a:round/>
+                      <a:headEnd type="none" w="med" len="med"/>
+                      <a:tailEnd type="none" w="med" len="med"/>
+                    </a:lnR>
+                    <a:lnT w="9525" cap="flat" cmpd="sng" algn="ctr">
+                      <a:solidFill>
+                        <a:srgbClr val="D5DCE5"/>
+                      </a:solidFill>
+                      <a:prstDash val="solid"/>
+                      <a:round/>
+                      <a:headEnd type="none" w="med" len="med"/>
+                      <a:tailEnd type="none" w="med" len="med"/>
+                    </a:lnT>
+                    <a:lnB w="9525" cap="flat" cmpd="sng" algn="ctr">
+                      <a:solidFill>
+                        <a:srgbClr val="D5DCE5"/>
+                      </a:solidFill>
+                      <a:prstDash val="solid"/>
+                      <a:round/>
+                      <a:headEnd type="none" w="med" len="med"/>
+                      <a:tailEnd type="none" w="med" len="med"/>
+                    </a:lnB>
+                    <a:solidFill>
+                      <a:srgbClr val="FFFFFF"/>
+                    </a:solidFill>
+                  </a:tcPr>
+                </a:tc>
+                <a:tc>
+                  <a:txBody>
+                    <a:bodyPr/>
+                    <a:lstStyle/>
+                    <a:p>
+                      <a:pPr indent="0" marL="0">
+                        <a:buNone/>
+                      </a:pPr>
+                      <a:r>
+                        <a:rPr lang="en-US" sz="1050" dirty="0">
+                          <a:solidFill>
+                            <a:srgbClr val="1A1A1A"/>
+                          </a:solidFill>
+                          <a:latin typeface="Microsoft YaHei" pitchFamily="34" charset="0"/>
+                          <a:ea typeface="Microsoft YaHei" pitchFamily="34" charset="-122"/>
+                          <a:cs typeface="Microsoft YaHei" pitchFamily="34" charset="-120"/>
+                        </a:rPr>
+                        <a:t>两侧区间覆盖率（全部循环）</a:t>
+                      </a:r>
+                      <a:endParaRPr lang="en-US" sz="1050" dirty="0">
+                        <a:latin typeface="Microsoft YaHei" charset="0"/>
+                        <a:ea typeface="Microsoft YaHei" charset="0"/>
+                        <a:cs typeface="Microsoft YaHei" charset="0"/>
+                      </a:endParaRPr>
+                    </a:p>
+                  </a:txBody>
+                  <a:tcPr marL="91440" marR="91440" marT="45720" marB="45720" anchor="ctr">
+                    <a:lnL w="9525" cap="flat" cmpd="sng" algn="ctr">
+                      <a:solidFill>
+                        <a:srgbClr val="D5DCE5"/>
+                      </a:solidFill>
+                      <a:prstDash val="solid"/>
+                      <a:round/>
+                      <a:headEnd type="none" w="med" len="med"/>
+                      <a:tailEnd type="none" w="med" len="med"/>
+                    </a:lnL>
+                    <a:lnR w="9525" cap="flat" cmpd="sng" algn="ctr">
+                      <a:solidFill>
+                        <a:srgbClr val="D5DCE5"/>
+                      </a:solidFill>
+                      <a:prstDash val="solid"/>
+                      <a:round/>
+                      <a:headEnd type="none" w="med" len="med"/>
+                      <a:tailEnd type="none" w="med" len="med"/>
+                    </a:lnR>
+                    <a:lnT w="9525" cap="flat" cmpd="sng" algn="ctr">
+                      <a:solidFill>
+                        <a:srgbClr val="D5DCE5"/>
+                      </a:solidFill>
+                      <a:prstDash val="solid"/>
+                      <a:round/>
+                      <a:headEnd type="none" w="med" len="med"/>
+                      <a:tailEnd type="none" w="med" len="med"/>
+                    </a:lnT>
+                    <a:lnB w="9525" cap="flat" cmpd="sng" algn="ctr">
+                      <a:solidFill>
+                        <a:srgbClr val="D5DCE5"/>
+                      </a:solidFill>
+                      <a:prstDash val="solid"/>
+                      <a:round/>
+                      <a:headEnd type="none" w="med" len="med"/>
+                      <a:tailEnd type="none" w="med" len="med"/>
+                    </a:lnB>
+                    <a:solidFill>
+                      <a:srgbClr val="FFFFFF"/>
+                    </a:solidFill>
+                  </a:tcPr>
+                </a:tc>
+                <a:tc>
+                  <a:txBody>
+                    <a:bodyPr/>
+                    <a:lstStyle/>
+                    <a:p>
+                      <a:pPr indent="0" marL="0">
+                        <a:buNone/>
+                      </a:pPr>
+                      <a:r>
+                        <a:rPr lang="en-US" sz="1050" dirty="0">
+                          <a:solidFill>
+                            <a:srgbClr val="1A1A1A"/>
+                          </a:solidFill>
+                          <a:latin typeface="Microsoft YaHei" pitchFamily="34" charset="0"/>
+                          <a:ea typeface="Microsoft YaHei" pitchFamily="34" charset="-122"/>
+                          <a:cs typeface="Microsoft YaHei" pitchFamily="34" charset="-120"/>
+                        </a:rPr>
+                        <a:t>0.87 到 0.93</a:t>
+                      </a:r>
+                      <a:endParaRPr lang="en-US" sz="1050" dirty="0">
+                        <a:latin typeface="Microsoft YaHei" charset="0"/>
+                        <a:ea typeface="Microsoft YaHei" charset="0"/>
+                        <a:cs typeface="Microsoft YaHei" charset="0"/>
+                      </a:endParaRPr>
+                    </a:p>
+                  </a:txBody>
+                  <a:tcPr marL="91440" marR="91440" marT="45720" marB="45720" anchor="ctr">
+                    <a:lnL w="9525" cap="flat" cmpd="sng" algn="ctr">
+                      <a:solidFill>
+                        <a:srgbClr val="D5DCE5"/>
+                      </a:solidFill>
+                      <a:prstDash val="solid"/>
+                      <a:round/>
+                      <a:headEnd type="none" w="med" len="med"/>
+                      <a:tailEnd type="none" w="med" len="med"/>
+                    </a:lnL>
+                    <a:lnR w="9525" cap="flat" cmpd="sng" algn="ctr">
+                      <a:solidFill>
+                        <a:srgbClr val="D5DCE5"/>
+                      </a:solidFill>
+                      <a:prstDash val="solid"/>
+                      <a:round/>
+                      <a:headEnd type="none" w="med" len="med"/>
+                      <a:tailEnd type="none" w="med" len="med"/>
+                    </a:lnR>
+                    <a:lnT w="9525" cap="flat" cmpd="sng" algn="ctr">
+                      <a:solidFill>
+                        <a:srgbClr val="D5DCE5"/>
+                      </a:solidFill>
+                      <a:prstDash val="solid"/>
+                      <a:round/>
+                      <a:headEnd type="none" w="med" len="med"/>
+                      <a:tailEnd type="none" w="med" len="med"/>
+                    </a:lnT>
+                    <a:lnB w="9525" cap="flat" cmpd="sng" algn="ctr">
+                      <a:solidFill>
+                        <a:srgbClr val="D5DCE5"/>
+                      </a:solidFill>
+                      <a:prstDash val="solid"/>
+                      <a:round/>
+                      <a:headEnd type="none" w="med" len="med"/>
+                      <a:tailEnd type="none" w="med" len="med"/>
+                    </a:lnB>
+                    <a:solidFill>
+                      <a:srgbClr val="FFFFFF"/>
+                    </a:solidFill>
+                  </a:tcPr>
+                </a:tc>
+                <a:tc>
+                  <a:txBody>
+                    <a:bodyPr/>
+                    <a:lstStyle/>
+                    <a:p>
+                      <a:pPr indent="0" marL="0">
+                        <a:buNone/>
+                      </a:pPr>
+                      <a:r>
+                        <a:rPr lang="en-US" sz="1050" b="1" dirty="0">
+                          <a:solidFill>
+                            <a:srgbClr val="3D7A5A"/>
+                          </a:solidFill>
+                          <a:latin typeface="Microsoft YaHei" pitchFamily="34" charset="0"/>
+                          <a:ea typeface="Microsoft YaHei" pitchFamily="34" charset="-122"/>
+                          <a:cs typeface="Microsoft YaHei" pitchFamily="34" charset="-120"/>
+                        </a:rPr>
+                        <a:t>0.896（q = 28.8，宽 57.7）</a:t>
+                      </a:r>
+                      <a:endParaRPr lang="en-US" sz="1050" dirty="0">
+                        <a:latin typeface="Microsoft YaHei" charset="0"/>
+                        <a:ea typeface="Microsoft YaHei" charset="0"/>
+                        <a:cs typeface="Microsoft YaHei" charset="0"/>
+                      </a:endParaRPr>
+                    </a:p>
+                  </a:txBody>
+                  <a:tcPr marL="91440" marR="91440" marT="45720" marB="45720" anchor="ctr">
+                    <a:lnL w="9525" cap="flat" cmpd="sng" algn="ctr">
+                      <a:solidFill>
+                        <a:srgbClr val="D5DCE5"/>
+                      </a:solidFill>
+                      <a:prstDash val="solid"/>
+                      <a:round/>
+                      <a:headEnd type="none" w="med" len="med"/>
+                      <a:tailEnd type="none" w="med" len="med"/>
+                    </a:lnL>
+                    <a:lnR w="9525" cap="flat" cmpd="sng" algn="ctr">
+                      <a:solidFill>
+                        <a:srgbClr val="D5DCE5"/>
+                      </a:solidFill>
+                      <a:prstDash val="solid"/>
+                      <a:round/>
+                      <a:headEnd type="none" w="med" len="med"/>
+                      <a:tailEnd type="none" w="med" len="med"/>
+                    </a:lnR>
+                    <a:lnT w="9525" cap="flat" cmpd="sng" algn="ctr">
+                      <a:solidFill>
+                        <a:srgbClr val="D5DCE5"/>
+                      </a:solidFill>
+                      <a:prstDash val="solid"/>
+                      <a:round/>
+                      <a:headEnd type="none" w="med" len="med"/>
+                      <a:tailEnd type="none" w="med" len="med"/>
+                    </a:lnT>
+                    <a:lnB w="9525" cap="flat" cmpd="sng" algn="ctr">
+                      <a:solidFill>
+                        <a:srgbClr val="D5DCE5"/>
+                      </a:solidFill>
+                      <a:prstDash val="solid"/>
+                      <a:round/>
+                      <a:headEnd type="none" w="med" len="med"/>
+                      <a:tailEnd type="none" w="med" len="med"/>
+                    </a:lnB>
+                    <a:solidFill>
+                      <a:srgbClr val="FFFFFF"/>
+                    </a:solidFill>
+                  </a:tcPr>
+                </a:tc>
+              </a:tr>
+              <a:tr h="411480">
+                <a:tc>
+                  <a:txBody>
+                    <a:bodyPr/>
+                    <a:lstStyle/>
+                    <a:p>
+                      <a:pPr indent="0" marL="0">
+                        <a:buNone/>
+                      </a:pPr>
+                      <a:r>
+                        <a:rPr lang="en-US" sz="1050" b="1" dirty="0">
+                          <a:solidFill>
+                            <a:srgbClr val="152238"/>
+                          </a:solidFill>
+                          <a:latin typeface="Times New Roman" pitchFamily="34" charset="0"/>
+                          <a:ea typeface="Times New Roman" pitchFamily="34" charset="-122"/>
+                          <a:cs typeface="Times New Roman" pitchFamily="34" charset="-120"/>
+                        </a:rPr>
+                        <a:t>s02</a:t>
+                      </a:r>
+                      <a:endParaRPr lang="en-US" sz="1050" dirty="0">
+                        <a:latin typeface="Times New Roman" charset="0"/>
+                        <a:ea typeface="Times New Roman" charset="0"/>
+                        <a:cs typeface="Times New Roman" charset="0"/>
+                      </a:endParaRPr>
+                    </a:p>
+                  </a:txBody>
+                  <a:tcPr marL="91440" marR="91440" marT="45720" marB="45720" anchor="ctr">
+                    <a:lnL w="9525" cap="flat" cmpd="sng" algn="ctr">
+                      <a:solidFill>
+                        <a:srgbClr val="D5DCE5"/>
+                      </a:solidFill>
+                      <a:prstDash val="solid"/>
+                      <a:round/>
+                      <a:headEnd type="none" w="med" len="med"/>
+                      <a:tailEnd type="none" w="med" len="med"/>
+                    </a:lnL>
+                    <a:lnR w="9525" cap="flat" cmpd="sng" algn="ctr">
+                      <a:solidFill>
+                        <a:srgbClr val="D5DCE5"/>
+                      </a:solidFill>
+                      <a:prstDash val="solid"/>
+                      <a:round/>
+                      <a:headEnd type="none" w="med" len="med"/>
+                      <a:tailEnd type="none" w="med" len="med"/>
+                    </a:lnR>
+                    <a:lnT w="9525" cap="flat" cmpd="sng" algn="ctr">
+                      <a:solidFill>
+                        <a:srgbClr val="D5DCE5"/>
+                      </a:solidFill>
+                      <a:prstDash val="solid"/>
+                      <a:round/>
+                      <a:headEnd type="none" w="med" len="med"/>
+                      <a:tailEnd type="none" w="med" len="med"/>
+                    </a:lnT>
+                    <a:lnB w="9525" cap="flat" cmpd="sng" algn="ctr">
+                      <a:solidFill>
+                        <a:srgbClr val="D5DCE5"/>
+                      </a:solidFill>
+                      <a:prstDash val="solid"/>
+                      <a:round/>
+                      <a:headEnd type="none" w="med" len="med"/>
+                      <a:tailEnd type="none" w="med" len="med"/>
+                    </a:lnB>
+                    <a:solidFill>
+                      <a:srgbClr val="FFFFFF"/>
+                    </a:solidFill>
+                  </a:tcPr>
+                </a:tc>
+                <a:tc>
+                  <a:txBody>
+                    <a:bodyPr/>
+                    <a:lstStyle/>
+                    <a:p>
+                      <a:pPr indent="0" marL="0">
+                        <a:buNone/>
+                      </a:pPr>
+                      <a:r>
+                        <a:rPr lang="en-US" sz="1050" dirty="0">
+                          <a:solidFill>
+                            <a:srgbClr val="1A1A1A"/>
+                          </a:solidFill>
+                          <a:latin typeface="Microsoft YaHei" pitchFamily="34" charset="0"/>
+                          <a:ea typeface="Microsoft YaHei" pitchFamily="34" charset="-122"/>
+                          <a:cs typeface="Microsoft YaHei" pitchFamily="34" charset="-120"/>
+                        </a:rPr>
+                        <a:t>一侧下界覆盖率</a:t>
+                      </a:r>
+                      <a:endParaRPr lang="en-US" sz="1050" dirty="0">
+                        <a:latin typeface="Microsoft YaHei" charset="0"/>
+                        <a:ea typeface="Microsoft YaHei" charset="0"/>
+                        <a:cs typeface="Microsoft YaHei" charset="0"/>
+                      </a:endParaRPr>
+                    </a:p>
+                  </a:txBody>
+                  <a:tcPr marL="91440" marR="91440" marT="45720" marB="45720" anchor="ctr">
+                    <a:lnL w="9525" cap="flat" cmpd="sng" algn="ctr">
+                      <a:solidFill>
+                        <a:srgbClr val="D5DCE5"/>
+                      </a:solidFill>
+                      <a:prstDash val="solid"/>
+                      <a:round/>
+                      <a:headEnd type="none" w="med" len="med"/>
+                      <a:tailEnd type="none" w="med" len="med"/>
+                    </a:lnL>
+                    <a:lnR w="9525" cap="flat" cmpd="sng" algn="ctr">
+                      <a:solidFill>
+                        <a:srgbClr val="D5DCE5"/>
+                      </a:solidFill>
+                      <a:prstDash val="solid"/>
+                      <a:round/>
+                      <a:headEnd type="none" w="med" len="med"/>
+                      <a:tailEnd type="none" w="med" len="med"/>
+                    </a:lnR>
+                    <a:lnT w="9525" cap="flat" cmpd="sng" algn="ctr">
+                      <a:solidFill>
+                        <a:srgbClr val="D5DCE5"/>
+                      </a:solidFill>
+                      <a:prstDash val="solid"/>
+                      <a:round/>
+                      <a:headEnd type="none" w="med" len="med"/>
+                      <a:tailEnd type="none" w="med" len="med"/>
+                    </a:lnT>
+                    <a:lnB w="9525" cap="flat" cmpd="sng" algn="ctr">
+                      <a:solidFill>
+                        <a:srgbClr val="D5DCE5"/>
+                      </a:solidFill>
+                      <a:prstDash val="solid"/>
+                      <a:round/>
+                      <a:headEnd type="none" w="med" len="med"/>
+                      <a:tailEnd type="none" w="med" len="med"/>
+                    </a:lnB>
+                    <a:solidFill>
+                      <a:srgbClr val="FFFFFF"/>
+                    </a:solidFill>
+                  </a:tcPr>
+                </a:tc>
+                <a:tc>
+                  <a:txBody>
+                    <a:bodyPr/>
+                    <a:lstStyle/>
+                    <a:p>
+                      <a:pPr indent="0" marL="0">
+                        <a:buNone/>
+                      </a:pPr>
+                      <a:r>
+                        <a:rPr lang="en-US" sz="1050" dirty="0">
+                          <a:solidFill>
+                            <a:srgbClr val="1A1A1A"/>
+                          </a:solidFill>
+                          <a:latin typeface="Microsoft YaHei" pitchFamily="34" charset="0"/>
+                          <a:ea typeface="Microsoft YaHei" pitchFamily="34" charset="-122"/>
+                          <a:cs typeface="Microsoft YaHei" pitchFamily="34" charset="-120"/>
+                        </a:rPr>
+                        <a:t>不明显低于 0.85</a:t>
+                      </a:r>
+                      <a:endParaRPr lang="en-US" sz="1050" dirty="0">
+                        <a:latin typeface="Microsoft YaHei" charset="0"/>
+                        <a:ea typeface="Microsoft YaHei" charset="0"/>
+                        <a:cs typeface="Microsoft YaHei" charset="0"/>
+                      </a:endParaRPr>
+                    </a:p>
+                  </a:txBody>
+                  <a:tcPr marL="91440" marR="91440" marT="45720" marB="45720" anchor="ctr">
+                    <a:lnL w="9525" cap="flat" cmpd="sng" algn="ctr">
+                      <a:solidFill>
+                        <a:srgbClr val="D5DCE5"/>
+                      </a:solidFill>
+                      <a:prstDash val="solid"/>
+                      <a:round/>
+                      <a:headEnd type="none" w="med" len="med"/>
+                      <a:tailEnd type="none" w="med" len="med"/>
+                    </a:lnL>
+                    <a:lnR w="9525" cap="flat" cmpd="sng" algn="ctr">
+                      <a:solidFill>
+                        <a:srgbClr val="D5DCE5"/>
+                      </a:solidFill>
+                      <a:prstDash val="solid"/>
+                      <a:round/>
+                      <a:headEnd type="none" w="med" len="med"/>
+                      <a:tailEnd type="none" w="med" len="med"/>
+                    </a:lnR>
+                    <a:lnT w="9525" cap="flat" cmpd="sng" algn="ctr">
+                      <a:solidFill>
+                        <a:srgbClr val="D5DCE5"/>
+                      </a:solidFill>
+                      <a:prstDash val="solid"/>
+                      <a:round/>
+                      <a:headEnd type="none" w="med" len="med"/>
+                      <a:tailEnd type="none" w="med" len="med"/>
+                    </a:lnT>
+                    <a:lnB w="9525" cap="flat" cmpd="sng" algn="ctr">
+                      <a:solidFill>
+                        <a:srgbClr val="D5DCE5"/>
+                      </a:solidFill>
+                      <a:prstDash val="solid"/>
+                      <a:round/>
+                      <a:headEnd type="none" w="med" len="med"/>
+                      <a:tailEnd type="none" w="med" len="med"/>
+                    </a:lnB>
+                    <a:solidFill>
+                      <a:srgbClr val="FFFFFF"/>
+                    </a:solidFill>
+                  </a:tcPr>
+                </a:tc>
+                <a:tc>
+                  <a:txBody>
+                    <a:bodyPr/>
+                    <a:lstStyle/>
+                    <a:p>
+                      <a:pPr indent="0" marL="0">
+                        <a:buNone/>
+                      </a:pPr>
+                      <a:r>
+                        <a:rPr lang="en-US" sz="1050" b="1" dirty="0">
+                          <a:solidFill>
+                            <a:srgbClr val="3D7A5A"/>
+                          </a:solidFill>
+                          <a:latin typeface="Microsoft YaHei" pitchFamily="34" charset="0"/>
+                          <a:ea typeface="Microsoft YaHei" pitchFamily="34" charset="-122"/>
+                          <a:cs typeface="Microsoft YaHei" pitchFamily="34" charset="-120"/>
+                        </a:rPr>
+                        <a:t>全部循环 0.934；一机一点 0.948</a:t>
+                      </a:r>
+                      <a:endParaRPr lang="en-US" sz="1050" dirty="0">
+                        <a:latin typeface="Microsoft YaHei" charset="0"/>
+                        <a:ea typeface="Microsoft YaHei" charset="0"/>
+                        <a:cs typeface="Microsoft YaHei" charset="0"/>
+                      </a:endParaRPr>
+                    </a:p>
+                  </a:txBody>
+                  <a:tcPr marL="91440" marR="91440" marT="45720" marB="45720" anchor="ctr">
+                    <a:lnL w="9525" cap="flat" cmpd="sng" algn="ctr">
+                      <a:solidFill>
+                        <a:srgbClr val="D5DCE5"/>
+                      </a:solidFill>
+                      <a:prstDash val="solid"/>
+                      <a:round/>
+                      <a:headEnd type="none" w="med" len="med"/>
+                      <a:tailEnd type="none" w="med" len="med"/>
+                    </a:lnL>
+                    <a:lnR w="9525" cap="flat" cmpd="sng" algn="ctr">
+                      <a:solidFill>
+                        <a:srgbClr val="D5DCE5"/>
+                      </a:solidFill>
+                      <a:prstDash val="solid"/>
+                      <a:round/>
+                      <a:headEnd type="none" w="med" len="med"/>
+                      <a:tailEnd type="none" w="med" len="med"/>
+                    </a:lnR>
+                    <a:lnT w="9525" cap="flat" cmpd="sng" algn="ctr">
+                      <a:solidFill>
+                        <a:srgbClr val="D5DCE5"/>
+                      </a:solidFill>
+                      <a:prstDash val="solid"/>
+                      <a:round/>
+                      <a:headEnd type="none" w="med" len="med"/>
+                      <a:tailEnd type="none" w="med" len="med"/>
+                    </a:lnT>
+                    <a:lnB w="9525" cap="flat" cmpd="sng" algn="ctr">
+                      <a:solidFill>
+                        <a:srgbClr val="D5DCE5"/>
+                      </a:solidFill>
+                      <a:prstDash val="solid"/>
+                      <a:round/>
+                      <a:headEnd type="none" w="med" len="med"/>
+                      <a:tailEnd type="none" w="med" len="med"/>
+                    </a:lnB>
+                    <a:solidFill>
+                      <a:srgbClr val="FFFFFF"/>
+                    </a:solidFill>
+                  </a:tcPr>
+                </a:tc>
+              </a:tr>
+              <a:tr h="411480">
+                <a:tc>
+                  <a:txBody>
+                    <a:bodyPr/>
+                    <a:lstStyle/>
+                    <a:p>
+                      <a:pPr indent="0" marL="0">
+                        <a:buNone/>
+                      </a:pPr>
+                      <a:r>
+                        <a:rPr lang="en-US" sz="1050" b="1" dirty="0">
+                          <a:solidFill>
+                            <a:srgbClr val="152238"/>
+                          </a:solidFill>
+                          <a:latin typeface="Times New Roman" pitchFamily="34" charset="0"/>
+                          <a:ea typeface="Times New Roman" pitchFamily="34" charset="-122"/>
+                          <a:cs typeface="Times New Roman" pitchFamily="34" charset="-120"/>
+                        </a:rPr>
+                        <a:t>s03</a:t>
+                      </a:r>
+                      <a:endParaRPr lang="en-US" sz="1050" dirty="0">
+                        <a:latin typeface="Times New Roman" charset="0"/>
+                        <a:ea typeface="Times New Roman" charset="0"/>
+                        <a:cs typeface="Times New Roman" charset="0"/>
+                      </a:endParaRPr>
+                    </a:p>
+                  </a:txBody>
+                  <a:tcPr marL="91440" marR="91440" marT="45720" marB="45720" anchor="ctr">
+                    <a:lnL w="9525" cap="flat" cmpd="sng" algn="ctr">
+                      <a:solidFill>
+                        <a:srgbClr val="D5DCE5"/>
+                      </a:solidFill>
+                      <a:prstDash val="solid"/>
+                      <a:round/>
+                      <a:headEnd type="none" w="med" len="med"/>
+                      <a:tailEnd type="none" w="med" len="med"/>
+                    </a:lnL>
+                    <a:lnR w="9525" cap="flat" cmpd="sng" algn="ctr">
+                      <a:solidFill>
+                        <a:srgbClr val="D5DCE5"/>
+                      </a:solidFill>
+                      <a:prstDash val="solid"/>
+                      <a:round/>
+                      <a:headEnd type="none" w="med" len="med"/>
+                      <a:tailEnd type="none" w="med" len="med"/>
+                    </a:lnR>
+                    <a:lnT w="9525" cap="flat" cmpd="sng" algn="ctr">
+                      <a:solidFill>
+                        <a:srgbClr val="D5DCE5"/>
+                      </a:solidFill>
+                      <a:prstDash val="solid"/>
+                      <a:round/>
+                      <a:headEnd type="none" w="med" len="med"/>
+                      <a:tailEnd type="none" w="med" len="med"/>
+                    </a:lnT>
+                    <a:lnB w="9525" cap="flat" cmpd="sng" algn="ctr">
+                      <a:solidFill>
+                        <a:srgbClr val="D5DCE5"/>
+                      </a:solidFill>
+                      <a:prstDash val="solid"/>
+                      <a:round/>
+                      <a:headEnd type="none" w="med" len="med"/>
+                      <a:tailEnd type="none" w="med" len="med"/>
+                    </a:lnB>
+                    <a:solidFill>
+                      <a:srgbClr val="FFFFFF"/>
+                    </a:solidFill>
+                  </a:tcPr>
+                </a:tc>
+                <a:tc>
+                  <a:txBody>
+                    <a:bodyPr/>
+                    <a:lstStyle/>
+                    <a:p>
+                      <a:pPr indent="0" marL="0">
+                        <a:buNone/>
+                      </a:pPr>
+                      <a:r>
+                        <a:rPr lang="en-US" sz="1050" dirty="0">
+                          <a:solidFill>
+                            <a:srgbClr val="1A1A1A"/>
+                          </a:solidFill>
+                          <a:latin typeface="Microsoft YaHei" pitchFamily="34" charset="0"/>
+                          <a:ea typeface="Microsoft YaHei" pitchFamily="34" charset="-122"/>
+                          <a:cs typeface="Microsoft YaHei" pitchFamily="34" charset="-120"/>
+                        </a:rPr>
+                        <a:t>实际删失率与目标之差</a:t>
+                      </a:r>
+                      <a:endParaRPr lang="en-US" sz="1050" dirty="0">
+                        <a:latin typeface="Microsoft YaHei" charset="0"/>
+                        <a:ea typeface="Microsoft YaHei" charset="0"/>
+                        <a:cs typeface="Microsoft YaHei" charset="0"/>
+                      </a:endParaRPr>
+                    </a:p>
+                  </a:txBody>
+                  <a:tcPr marL="91440" marR="91440" marT="45720" marB="45720" anchor="ctr">
+                    <a:lnL w="9525" cap="flat" cmpd="sng" algn="ctr">
+                      <a:solidFill>
+                        <a:srgbClr val="D5DCE5"/>
+                      </a:solidFill>
+                      <a:prstDash val="solid"/>
+                      <a:round/>
+                      <a:headEnd type="none" w="med" len="med"/>
+                      <a:tailEnd type="none" w="med" len="med"/>
+                    </a:lnL>
+                    <a:lnR w="9525" cap="flat" cmpd="sng" algn="ctr">
+                      <a:solidFill>
+                        <a:srgbClr val="D5DCE5"/>
+                      </a:solidFill>
+                      <a:prstDash val="solid"/>
+                      <a:round/>
+                      <a:headEnd type="none" w="med" len="med"/>
+                      <a:tailEnd type="none" w="med" len="med"/>
+                    </a:lnR>
+                    <a:lnT w="9525" cap="flat" cmpd="sng" algn="ctr">
+                      <a:solidFill>
+                        <a:srgbClr val="D5DCE5"/>
+                      </a:solidFill>
+                      <a:prstDash val="solid"/>
+                      <a:round/>
+                      <a:headEnd type="none" w="med" len="med"/>
+                      <a:tailEnd type="none" w="med" len="med"/>
+                    </a:lnT>
+                    <a:lnB w="9525" cap="flat" cmpd="sng" algn="ctr">
+                      <a:solidFill>
+                        <a:srgbClr val="D5DCE5"/>
+                      </a:solidFill>
+                      <a:prstDash val="solid"/>
+                      <a:round/>
+                      <a:headEnd type="none" w="med" len="med"/>
+                      <a:tailEnd type="none" w="med" len="med"/>
+                    </a:lnB>
+                    <a:solidFill>
+                      <a:srgbClr val="FFFFFF"/>
+                    </a:solidFill>
+                  </a:tcPr>
+                </a:tc>
+                <a:tc>
+                  <a:txBody>
+                    <a:bodyPr/>
+                    <a:lstStyle/>
+                    <a:p>
+                      <a:pPr indent="0" marL="0">
+                        <a:buNone/>
+                      </a:pPr>
+                      <a:r>
+                        <a:rPr lang="en-US" sz="1050" dirty="0">
+                          <a:solidFill>
+                            <a:srgbClr val="1A1A1A"/>
+                          </a:solidFill>
+                          <a:latin typeface="Microsoft YaHei" pitchFamily="34" charset="0"/>
+                          <a:ea typeface="Microsoft YaHei" pitchFamily="34" charset="-122"/>
+                          <a:cs typeface="Microsoft YaHei" pitchFamily="34" charset="-120"/>
+                        </a:rPr>
+                        <a:t>不超过 0.03</a:t>
+                      </a:r>
+                      <a:endParaRPr lang="en-US" sz="1050" dirty="0">
+                        <a:latin typeface="Microsoft YaHei" charset="0"/>
+                        <a:ea typeface="Microsoft YaHei" charset="0"/>
+                        <a:cs typeface="Microsoft YaHei" charset="0"/>
+                      </a:endParaRPr>
+                    </a:p>
+                  </a:txBody>
+                  <a:tcPr marL="91440" marR="91440" marT="45720" marB="45720" anchor="ctr">
+                    <a:lnL w="9525" cap="flat" cmpd="sng" algn="ctr">
+                      <a:solidFill>
+                        <a:srgbClr val="D5DCE5"/>
+                      </a:solidFill>
+                      <a:prstDash val="solid"/>
+                      <a:round/>
+                      <a:headEnd type="none" w="med" len="med"/>
+                      <a:tailEnd type="none" w="med" len="med"/>
+                    </a:lnL>
+                    <a:lnR w="9525" cap="flat" cmpd="sng" algn="ctr">
+                      <a:solidFill>
+                        <a:srgbClr val="D5DCE5"/>
+                      </a:solidFill>
+                      <a:prstDash val="solid"/>
+                      <a:round/>
+                      <a:headEnd type="none" w="med" len="med"/>
+                      <a:tailEnd type="none" w="med" len="med"/>
+                    </a:lnR>
+                    <a:lnT w="9525" cap="flat" cmpd="sng" algn="ctr">
+                      <a:solidFill>
+                        <a:srgbClr val="D5DCE5"/>
+                      </a:solidFill>
+                      <a:prstDash val="solid"/>
+                      <a:round/>
+                      <a:headEnd type="none" w="med" len="med"/>
+                      <a:tailEnd type="none" w="med" len="med"/>
+                    </a:lnT>
+                    <a:lnB w="9525" cap="flat" cmpd="sng" algn="ctr">
+                      <a:solidFill>
+                        <a:srgbClr val="D5DCE5"/>
+                      </a:solidFill>
+                      <a:prstDash val="solid"/>
+                      <a:round/>
+                      <a:headEnd type="none" w="med" len="med"/>
+                      <a:tailEnd type="none" w="med" len="med"/>
+                    </a:lnB>
+                    <a:solidFill>
+                      <a:srgbClr val="FFFFFF"/>
+                    </a:solidFill>
+                  </a:tcPr>
+                </a:tc>
+                <a:tc>
+                  <a:txBody>
+                    <a:bodyPr/>
+                    <a:lstStyle/>
+                    <a:p>
+                      <a:pPr indent="0" marL="0">
+                        <a:buNone/>
+                      </a:pPr>
+                      <a:r>
+                        <a:rPr lang="en-US" sz="1050" b="1" dirty="0">
+                          <a:solidFill>
+                            <a:srgbClr val="3D7A5A"/>
+                          </a:solidFill>
+                          <a:latin typeface="Microsoft YaHei" pitchFamily="34" charset="0"/>
+                          <a:ea typeface="Microsoft YaHei" pitchFamily="34" charset="-122"/>
+                          <a:cs typeface="Microsoft YaHei" pitchFamily="34" charset="-120"/>
+                        </a:rPr>
+                        <a:t>0.20 / 0.40 / 0.60，差为 0</a:t>
+                      </a:r>
+                      <a:endParaRPr lang="en-US" sz="1050" dirty="0">
+                        <a:latin typeface="Microsoft YaHei" charset="0"/>
+                        <a:ea typeface="Microsoft YaHei" charset="0"/>
+                        <a:cs typeface="Microsoft YaHei" charset="0"/>
+                      </a:endParaRPr>
+                    </a:p>
+                  </a:txBody>
+                  <a:tcPr marL="91440" marR="91440" marT="45720" marB="45720" anchor="ctr">
+                    <a:lnL w="9525" cap="flat" cmpd="sng" algn="ctr">
+                      <a:solidFill>
+                        <a:srgbClr val="D5DCE5"/>
+                      </a:solidFill>
+                      <a:prstDash val="solid"/>
+                      <a:round/>
+                      <a:headEnd type="none" w="med" len="med"/>
+                      <a:tailEnd type="none" w="med" len="med"/>
+                    </a:lnL>
+                    <a:lnR w="9525" cap="flat" cmpd="sng" algn="ctr">
+                      <a:solidFill>
+                        <a:srgbClr val="D5DCE5"/>
+                      </a:solidFill>
+                      <a:prstDash val="solid"/>
+                      <a:round/>
+                      <a:headEnd type="none" w="med" len="med"/>
+                      <a:tailEnd type="none" w="med" len="med"/>
+                    </a:lnR>
+                    <a:lnT w="9525" cap="flat" cmpd="sng" algn="ctr">
+                      <a:solidFill>
+                        <a:srgbClr val="D5DCE5"/>
+                      </a:solidFill>
+                      <a:prstDash val="solid"/>
+                      <a:round/>
+                      <a:headEnd type="none" w="med" len="med"/>
+                      <a:tailEnd type="none" w="med" len="med"/>
+                    </a:lnT>
+                    <a:lnB w="9525" cap="flat" cmpd="sng" algn="ctr">
+                      <a:solidFill>
+                        <a:srgbClr val="D5DCE5"/>
+                      </a:solidFill>
+                      <a:prstDash val="solid"/>
+                      <a:round/>
+                      <a:headEnd type="none" w="med" len="med"/>
+                      <a:tailEnd type="none" w="med" len="med"/>
+                    </a:lnB>
+                    <a:solidFill>
+                      <a:srgbClr val="FFFFFF"/>
+                    </a:solidFill>
+                  </a:tcPr>
+                </a:tc>
+              </a:tr>
+              <a:tr h="411480">
+                <a:tc>
+                  <a:txBody>
+                    <a:bodyPr/>
+                    <a:lstStyle/>
+                    <a:p>
+                      <a:pPr indent="0" marL="0">
+                        <a:buNone/>
+                      </a:pPr>
+                      <a:r>
+                        <a:rPr lang="en-US" sz="1050" b="1" dirty="0">
+                          <a:solidFill>
+                            <a:srgbClr val="152238"/>
+                          </a:solidFill>
+                          <a:latin typeface="Times New Roman" pitchFamily="34" charset="0"/>
+                          <a:ea typeface="Times New Roman" pitchFamily="34" charset="-122"/>
+                          <a:cs typeface="Times New Roman" pitchFamily="34" charset="-120"/>
+                        </a:rPr>
+                        <a:t>s03</a:t>
+                      </a:r>
+                      <a:endParaRPr lang="en-US" sz="1050" dirty="0">
+                        <a:latin typeface="Times New Roman" charset="0"/>
+                        <a:ea typeface="Times New Roman" charset="0"/>
+                        <a:cs typeface="Times New Roman" charset="0"/>
+                      </a:endParaRPr>
+                    </a:p>
+                  </a:txBody>
+                  <a:tcPr marL="91440" marR="91440" marT="45720" marB="45720" anchor="ctr">
+                    <a:lnL w="9525" cap="flat" cmpd="sng" algn="ctr">
+                      <a:solidFill>
+                        <a:srgbClr val="D5DCE5"/>
+                      </a:solidFill>
+                      <a:prstDash val="solid"/>
+                      <a:round/>
+                      <a:headEnd type="none" w="med" len="med"/>
+                      <a:tailEnd type="none" w="med" len="med"/>
+                    </a:lnL>
+                    <a:lnR w="9525" cap="flat" cmpd="sng" algn="ctr">
+                      <a:solidFill>
+                        <a:srgbClr val="D5DCE5"/>
+                      </a:solidFill>
+                      <a:prstDash val="solid"/>
+                      <a:round/>
+                      <a:headEnd type="none" w="med" len="med"/>
+                      <a:tailEnd type="none" w="med" len="med"/>
+                    </a:lnR>
+                    <a:lnT w="9525" cap="flat" cmpd="sng" algn="ctr">
+                      <a:solidFill>
+                        <a:srgbClr val="D5DCE5"/>
+                      </a:solidFill>
+                      <a:prstDash val="solid"/>
+                      <a:round/>
+                      <a:headEnd type="none" w="med" len="med"/>
+                      <a:tailEnd type="none" w="med" len="med"/>
+                    </a:lnT>
+                    <a:lnB w="9525" cap="flat" cmpd="sng" algn="ctr">
+                      <a:solidFill>
+                        <a:srgbClr val="D5DCE5"/>
+                      </a:solidFill>
+                      <a:prstDash val="solid"/>
+                      <a:round/>
+                      <a:headEnd type="none" w="med" len="med"/>
+                      <a:tailEnd type="none" w="med" len="med"/>
+                    </a:lnB>
+                    <a:solidFill>
+                      <a:srgbClr val="FFFFFF"/>
+                    </a:solidFill>
+                  </a:tcPr>
+                </a:tc>
+                <a:tc>
+                  <a:txBody>
+                    <a:bodyPr/>
+                    <a:lstStyle/>
+                    <a:p>
+                      <a:pPr indent="0" marL="0">
+                        <a:buNone/>
+                      </a:pPr>
+                      <a:r>
+                        <a:rPr lang="en-US" sz="1050" dirty="0">
+                          <a:solidFill>
+                            <a:srgbClr val="1A1A1A"/>
+                          </a:solidFill>
+                          <a:latin typeface="Microsoft YaHei" pitchFamily="34" charset="0"/>
+                          <a:ea typeface="Microsoft YaHei" pitchFamily="34" charset="-122"/>
+                          <a:cs typeface="Microsoft YaHei" pitchFamily="34" charset="-120"/>
+                        </a:rPr>
+                        <a:t>标签核对断言</a:t>
+                      </a:r>
+                      <a:endParaRPr lang="en-US" sz="1050" dirty="0">
+                        <a:latin typeface="Microsoft YaHei" charset="0"/>
+                        <a:ea typeface="Microsoft YaHei" charset="0"/>
+                        <a:cs typeface="Microsoft YaHei" charset="0"/>
+                      </a:endParaRPr>
+                    </a:p>
+                  </a:txBody>
+                  <a:tcPr marL="91440" marR="91440" marT="45720" marB="45720" anchor="ctr">
+                    <a:lnL w="9525" cap="flat" cmpd="sng" algn="ctr">
+                      <a:solidFill>
+                        <a:srgbClr val="D5DCE5"/>
+                      </a:solidFill>
+                      <a:prstDash val="solid"/>
+                      <a:round/>
+                      <a:headEnd type="none" w="med" len="med"/>
+                      <a:tailEnd type="none" w="med" len="med"/>
+                    </a:lnL>
+                    <a:lnR w="9525" cap="flat" cmpd="sng" algn="ctr">
+                      <a:solidFill>
+                        <a:srgbClr val="D5DCE5"/>
+                      </a:solidFill>
+                      <a:prstDash val="solid"/>
+                      <a:round/>
+                      <a:headEnd type="none" w="med" len="med"/>
+                      <a:tailEnd type="none" w="med" len="med"/>
+                    </a:lnR>
+                    <a:lnT w="9525" cap="flat" cmpd="sng" algn="ctr">
+                      <a:solidFill>
+                        <a:srgbClr val="D5DCE5"/>
+                      </a:solidFill>
+                      <a:prstDash val="solid"/>
+                      <a:round/>
+                      <a:headEnd type="none" w="med" len="med"/>
+                      <a:tailEnd type="none" w="med" len="med"/>
+                    </a:lnT>
+                    <a:lnB w="9525" cap="flat" cmpd="sng" algn="ctr">
+                      <a:solidFill>
+                        <a:srgbClr val="D5DCE5"/>
+                      </a:solidFill>
+                      <a:prstDash val="solid"/>
+                      <a:round/>
+                      <a:headEnd type="none" w="med" len="med"/>
+                      <a:tailEnd type="none" w="med" len="med"/>
+                    </a:lnB>
+                    <a:solidFill>
+                      <a:srgbClr val="FFFFFF"/>
+                    </a:solidFill>
+                  </a:tcPr>
+                </a:tc>
+                <a:tc>
+                  <a:txBody>
+                    <a:bodyPr/>
+                    <a:lstStyle/>
+                    <a:p>
+                      <a:pPr indent="0" marL="0">
+                        <a:buNone/>
+                      </a:pPr>
+                      <a:r>
+                        <a:rPr lang="en-US" sz="1050" dirty="0">
+                          <a:solidFill>
+                            <a:srgbClr val="1A1A1A"/>
+                          </a:solidFill>
+                          <a:latin typeface="Microsoft YaHei" pitchFamily="34" charset="0"/>
+                          <a:ea typeface="Microsoft YaHei" pitchFamily="34" charset="-122"/>
+                          <a:cs typeface="Microsoft YaHei" pitchFamily="34" charset="-120"/>
+                        </a:rPr>
+                        <a:t>不触发</a:t>
+                      </a:r>
+                      <a:endParaRPr lang="en-US" sz="1050" dirty="0">
+                        <a:latin typeface="Microsoft YaHei" charset="0"/>
+                        <a:ea typeface="Microsoft YaHei" charset="0"/>
+                        <a:cs typeface="Microsoft YaHei" charset="0"/>
+                      </a:endParaRPr>
+                    </a:p>
+                  </a:txBody>
+                  <a:tcPr marL="91440" marR="91440" marT="45720" marB="45720" anchor="ctr">
+                    <a:lnL w="9525" cap="flat" cmpd="sng" algn="ctr">
+                      <a:solidFill>
+                        <a:srgbClr val="D5DCE5"/>
+                      </a:solidFill>
+                      <a:prstDash val="solid"/>
+                      <a:round/>
+                      <a:headEnd type="none" w="med" len="med"/>
+                      <a:tailEnd type="none" w="med" len="med"/>
+                    </a:lnL>
+                    <a:lnR w="9525" cap="flat" cmpd="sng" algn="ctr">
+                      <a:solidFill>
+                        <a:srgbClr val="D5DCE5"/>
+                      </a:solidFill>
+                      <a:prstDash val="solid"/>
+                      <a:round/>
+                      <a:headEnd type="none" w="med" len="med"/>
+                      <a:tailEnd type="none" w="med" len="med"/>
+                    </a:lnR>
+                    <a:lnT w="9525" cap="flat" cmpd="sng" algn="ctr">
+                      <a:solidFill>
+                        <a:srgbClr val="D5DCE5"/>
+                      </a:solidFill>
+                      <a:prstDash val="solid"/>
+                      <a:round/>
+                      <a:headEnd type="none" w="med" len="med"/>
+                      <a:tailEnd type="none" w="med" len="med"/>
+                    </a:lnT>
+                    <a:lnB w="9525" cap="flat" cmpd="sng" algn="ctr">
+                      <a:solidFill>
+                        <a:srgbClr val="D5DCE5"/>
+                      </a:solidFill>
+                      <a:prstDash val="solid"/>
+                      <a:round/>
+                      <a:headEnd type="none" w="med" len="med"/>
+                      <a:tailEnd type="none" w="med" len="med"/>
+                    </a:lnB>
+                    <a:solidFill>
+                      <a:srgbClr val="FFFFFF"/>
+                    </a:solidFill>
+                  </a:tcPr>
+                </a:tc>
+                <a:tc>
+                  <a:txBody>
+                    <a:bodyPr/>
+                    <a:lstStyle/>
+                    <a:p>
+                      <a:pPr indent="0" marL="0">
+                        <a:buNone/>
+                      </a:pPr>
+                      <a:r>
+                        <a:rPr lang="en-US" sz="1050" b="1" dirty="0">
+                          <a:solidFill>
+                            <a:srgbClr val="3D7A5A"/>
+                          </a:solidFill>
+                          <a:latin typeface="Microsoft YaHei" pitchFamily="34" charset="0"/>
+                          <a:ea typeface="Microsoft YaHei" pitchFamily="34" charset="-122"/>
+                          <a:cs typeface="Microsoft YaHei" pitchFamily="34" charset="-120"/>
+                        </a:rPr>
+                        <a:t>未触发；results/ 15 个 s03 文件</a:t>
+                      </a:r>
+                      <a:endParaRPr lang="en-US" sz="1050" dirty="0">
+                        <a:latin typeface="Microsoft YaHei" charset="0"/>
+                        <a:ea typeface="Microsoft YaHei" charset="0"/>
+                        <a:cs typeface="Microsoft YaHei" charset="0"/>
+                      </a:endParaRPr>
+                    </a:p>
+                  </a:txBody>
+                  <a:tcPr marL="91440" marR="91440" marT="45720" marB="45720" anchor="ctr">
+                    <a:lnL w="9525" cap="flat" cmpd="sng" algn="ctr">
+                      <a:solidFill>
+                        <a:srgbClr val="D5DCE5"/>
+                      </a:solidFill>
+                      <a:prstDash val="solid"/>
+                      <a:round/>
+                      <a:headEnd type="none" w="med" len="med"/>
+                      <a:tailEnd type="none" w="med" len="med"/>
+                    </a:lnL>
+                    <a:lnR w="9525" cap="flat" cmpd="sng" algn="ctr">
+                      <a:solidFill>
+                        <a:srgbClr val="D5DCE5"/>
+                      </a:solidFill>
+                      <a:prstDash val="solid"/>
+                      <a:round/>
+                      <a:headEnd type="none" w="med" len="med"/>
+                      <a:tailEnd type="none" w="med" len="med"/>
+                    </a:lnR>
+                    <a:lnT w="9525" cap="flat" cmpd="sng" algn="ctr">
+                      <a:solidFill>
+                        <a:srgbClr val="D5DCE5"/>
+                      </a:solidFill>
+                      <a:prstDash val="solid"/>
+                      <a:round/>
+                      <a:headEnd type="none" w="med" len="med"/>
+                      <a:tailEnd type="none" w="med" len="med"/>
+                    </a:lnT>
+                    <a:lnB w="9525" cap="flat" cmpd="sng" algn="ctr">
+                      <a:solidFill>
+                        <a:srgbClr val="D5DCE5"/>
+                      </a:solidFill>
+                      <a:prstDash val="solid"/>
+                      <a:round/>
+                      <a:headEnd type="none" w="med" len="med"/>
+                      <a:tailEnd type="none" w="med" len="med"/>
+                    </a:lnB>
+                    <a:solidFill>
+                      <a:srgbClr val="FFFFFF"/>
+                    </a:solidFill>
+                  </a:tcPr>
+                </a:tc>
+              </a:tr>
+            </a:tbl>
+          </a:graphicData>
+        </a:graphic>
+      </p:graphicFrame>
+      <p:sp>
+        <p:nvSpPr>
+          <p:cNvPr id="5" name="Shape 2"/>
           <p:cNvSpPr/>
           <p:nvPr/>
         </p:nvSpPr>
         <p:spPr>
           <a:xfrm>
-            <a:off x="548640" y="1280160"/>
+            <a:off x="548640" y="5349240"/>
             <a:ext cx="11091672" cy="960120"/>
           </a:xfrm>
           <a:prstGeom prst="rect">
             <a:avLst/>
           </a:prstGeom>
           <a:solidFill>
-            <a:srgbClr val="1F3352"/>
+            <a:srgbClr val="FFF4E0"/>
           </a:solidFill>
           <a:ln w="12700">
             <a:solidFill>
-              <a:srgbClr val="1F3352"/>
+              <a:srgbClr val="FFF4E0"/>
             </a:solidFill>
             <a:prstDash val="solid"/>
           </a:ln>
@@ -12309,105 +15380,298 @@
       </p:sp>
       <p:sp>
         <p:nvSpPr>
-          <p:cNvPr id="4" name="Text 2"/>
-          <p:cNvSpPr txBox="1"/>
-          <p:nvPr/>
-        </p:nvSpPr>
-        <p:spPr>
-          <a:xfrm>
-            <a:off x="822960" y="1280160"/>
-            <a:ext cx="1280160" cy="960120"/>
-          </a:xfrm>
-          <a:prstGeom prst="rect">
-            <a:avLst/>
-          </a:prstGeom>
-          <a:noFill/>
-          <a:ln/>
-        </p:spPr>
-        <p:txBody>
-          <a:bodyPr wrap="square" lIns="0" tIns="0" rIns="0" bIns="0" rtlCol="0" anchor="ctr"/>
-          <a:lstStyle/>
-          <a:p>
-            <a:pPr indent="0" marL="0">
-              <a:buNone/>
-            </a:pPr>
-            <a:r>
-              <a:rPr lang="en-US" sz="1400" b="1" dirty="0">
-                <a:solidFill>
-                  <a:srgbClr val="F2C46D"/>
+          <p:cNvPr id="6" name="Text 3"/>
+          <p:cNvSpPr txBox="1"/>
+          <p:nvPr/>
+        </p:nvSpPr>
+        <p:spPr>
+          <a:xfrm>
+            <a:off x="749808" y="5513832"/>
+            <a:ext cx="10689336" cy="310896"/>
+          </a:xfrm>
+          <a:prstGeom prst="rect">
+            <a:avLst/>
+          </a:prstGeom>
+          <a:noFill/>
+          <a:ln/>
+        </p:spPr>
+        <p:txBody>
+          <a:bodyPr wrap="square" lIns="0" tIns="0" rIns="0" bIns="0" rtlCol="0" anchor="t"/>
+          <a:lstStyle/>
+          <a:p>
+            <a:pPr indent="0" marL="0">
+              <a:buNone/>
+            </a:pPr>
+            <a:r>
+              <a:rPr lang="en-US" sz="1200" b="1" dirty="0">
+                <a:solidFill>
+                  <a:srgbClr val="9A6510"/>
                 </a:solidFill>
                 <a:latin typeface="Microsoft YaHei" pitchFamily="34" charset="0"/>
                 <a:ea typeface="Microsoft YaHei" pitchFamily="34" charset="-122"/>
                 <a:cs typeface="Microsoft YaHei" pitchFamily="34" charset="-120"/>
               </a:rPr>
-              <a:t>作业一</a:t>
-            </a:r>
-            <a:endParaRPr lang="en-US" sz="1400" dirty="0"/>
-          </a:p>
-        </p:txBody>
-      </p:sp>
-      <p:sp>
-        <p:nvSpPr>
-          <p:cNvPr id="5" name="Text 3"/>
-          <p:cNvSpPr txBox="1"/>
-          <p:nvPr/>
-        </p:nvSpPr>
-        <p:spPr>
-          <a:xfrm>
-            <a:off x="2286000" y="1280160"/>
-            <a:ext cx="9079992" cy="960120"/>
-          </a:xfrm>
-          <a:prstGeom prst="rect">
-            <a:avLst/>
-          </a:prstGeom>
-          <a:noFill/>
-          <a:ln/>
-        </p:spPr>
-        <p:txBody>
-          <a:bodyPr wrap="square" lIns="0" tIns="0" rIns="0" bIns="0" rtlCol="0" anchor="ctr"/>
+              <a:t>点预测精度只求够用</a:t>
+            </a:r>
+            <a:endParaRPr lang="en-US" sz="1200" dirty="0"/>
+          </a:p>
+        </p:txBody>
+      </p:sp>
+      <p:sp>
+        <p:nvSpPr>
+          <p:cNvPr id="7" name="Text 4"/>
+          <p:cNvSpPr txBox="1"/>
+          <p:nvPr/>
+        </p:nvSpPr>
+        <p:spPr>
+          <a:xfrm>
+            <a:off x="749808" y="5897880"/>
+            <a:ext cx="10689336" cy="274320"/>
+          </a:xfrm>
+          <a:prstGeom prst="rect">
+            <a:avLst/>
+          </a:prstGeom>
+          <a:noFill/>
+          <a:ln/>
+        </p:spPr>
+        <p:txBody>
+          <a:bodyPr wrap="square" lIns="0" tIns="0" rIns="0" bIns="0" rtlCol="0" anchor="t"/>
           <a:lstStyle/>
           <a:p>
             <a:pPr indent="0" marL="0">
               <a:lnSpc>
                 <a:spcPct val="125000"/>
               </a:lnSpc>
-              <a:buNone/>
-            </a:pPr>
-            <a:r>
-              <a:rPr lang="en-US" sz="1200" dirty="0">
-                <a:solidFill>
-                  <a:srgbClr val="DCE7F2"/>
+              <a:spcAft>
+                <a:spcPts val="500"/>
+              </a:spcAft>
+              <a:buNone/>
+            </a:pPr>
+            <a:r>
+              <a:rPr lang="en-US" sz="1100" dirty="0">
+                <a:solidFill>
+                  <a:srgbClr val="9A6510"/>
                 </a:solidFill>
                 <a:latin typeface="Microsoft YaHei" pitchFamily="34" charset="0"/>
                 <a:ea typeface="Microsoft YaHei" pitchFamily="34" charset="-122"/>
                 <a:cs typeface="Microsoft YaHei" pitchFamily="34" charset="-120"/>
               </a:rPr>
-              <a:t>五个脚本跑通（四个 Python 一个 R），控制台输出和图贴到群里，按移交文档第 9 节的顺序。跑不通的贴报错，不要自己改代码。</a:t>
+              <a:t>RMSE：测试机最后一循环 17.2，测试全部循环 16.6，校准折 16.3。论文二报的量级相当。没有调参，也不打算调。</a:t>
+            </a:r>
+            <a:endParaRPr lang="en-US" sz="1100" dirty="0"/>
+          </a:p>
+        </p:txBody>
+      </p:sp>
+      <p:sp>
+        <p:nvSpPr>
+          <p:cNvPr id="8" name="Text 5"/>
+          <p:cNvSpPr txBox="1"/>
+          <p:nvPr/>
+        </p:nvSpPr>
+        <p:spPr>
+          <a:xfrm>
+            <a:off x="11274552" y="6473952"/>
+            <a:ext cx="457200" cy="274320"/>
+          </a:xfrm>
+          <a:prstGeom prst="rect">
+            <a:avLst/>
+          </a:prstGeom>
+          <a:noFill/>
+          <a:ln/>
+        </p:spPr>
+        <p:txBody>
+          <a:bodyPr wrap="square" lIns="0" tIns="0" rIns="0" bIns="0" rtlCol="0" anchor="ctr"/>
+          <a:lstStyle/>
+          <a:p>
+            <a:pPr algn="r" indent="0" marL="0">
+              <a:buNone/>
+            </a:pPr>
+            <a:r>
+              <a:rPr lang="en-US" sz="1000" dirty="0">
+                <a:solidFill>
+                  <a:srgbClr val="9FB2C9"/>
+                </a:solidFill>
+                <a:latin typeface="Times New Roman" pitchFamily="34" charset="0"/>
+                <a:ea typeface="Times New Roman" pitchFamily="34" charset="-122"/>
+                <a:cs typeface="Times New Roman" pitchFamily="34" charset="-120"/>
+              </a:rPr>
+              <a:t>16</a:t>
+            </a:r>
+            <a:endParaRPr lang="en-US" sz="1000" dirty="0"/>
+          </a:p>
+        </p:txBody>
+      </p:sp>
+    </p:spTree>
+  </p:cSld>
+  <p:clrMapOvr>
+    <a:masterClrMapping/>
+  </p:clrMapOvr>
+</p:sld>
+</file>
+
+<file path=ppt/slides/slide17.xml><?xml version="1.0" encoding="utf-8"?>
+<p:sld xmlns:a="http://schemas.openxmlformats.org/drawingml/2006/main" xmlns:r="http://schemas.openxmlformats.org/officeDocument/2006/relationships" xmlns:p="http://schemas.openxmlformats.org/presentationml/2006/main">
+  <p:cSld name="Slide 17">
+    <p:spTree>
+      <p:nvGrpSpPr>
+        <p:cNvPr id="1" name=""/>
+        <p:cNvGrpSpPr/>
+        <p:nvPr/>
+      </p:nvGrpSpPr>
+      <p:grpSpPr>
+        <a:xfrm>
+          <a:off x="0" y="0"/>
+          <a:ext cx="0" cy="0"/>
+          <a:chOff x="0" y="0"/>
+          <a:chExt cx="0" cy="0"/>
+        </a:xfrm>
+      </p:grpSpPr>
+      <p:sp>
+        <p:nvSpPr>
+          <p:cNvPr id="2" name="Text 0"/>
+          <p:cNvSpPr txBox="1"/>
+          <p:nvPr/>
+        </p:nvSpPr>
+        <p:spPr>
+          <a:xfrm>
+            <a:off x="548640" y="347472"/>
+            <a:ext cx="11091672" cy="548640"/>
+          </a:xfrm>
+          <a:prstGeom prst="rect">
+            <a:avLst/>
+          </a:prstGeom>
+          <a:noFill/>
+          <a:ln/>
+        </p:spPr>
+        <p:txBody>
+          <a:bodyPr wrap="square" lIns="0" tIns="0" rIns="0" bIns="0" rtlCol="0" anchor="ctr"/>
+          <a:lstStyle/>
+          <a:p>
+            <a:pPr indent="0" marL="0">
+              <a:buNone/>
+            </a:pPr>
+            <a:r>
+              <a:rPr lang="en-US" sz="2600" b="1" dirty="0">
+                <a:solidFill>
+                  <a:srgbClr val="152238"/>
+                </a:solidFill>
+                <a:latin typeface="Microsoft YaHei" pitchFamily="34" charset="0"/>
+                <a:ea typeface="Microsoft YaHei" pitchFamily="34" charset="-122"/>
+                <a:cs typeface="Microsoft YaHei" pitchFamily="34" charset="-120"/>
+              </a:rPr>
+              <a:t>结果一：样本量核算与权重曲线</a:t>
+            </a:r>
+            <a:endParaRPr lang="en-US" sz="2600" dirty="0"/>
+          </a:p>
+        </p:txBody>
+      </p:sp>
+      <p:sp>
+        <p:nvSpPr>
+          <p:cNvPr id="3" name="Text 1"/>
+          <p:cNvSpPr txBox="1"/>
+          <p:nvPr/>
+        </p:nvSpPr>
+        <p:spPr>
+          <a:xfrm>
+            <a:off x="548640" y="896112"/>
+            <a:ext cx="11091672" cy="292608"/>
+          </a:xfrm>
+          <a:prstGeom prst="rect">
+            <a:avLst/>
+          </a:prstGeom>
+          <a:noFill/>
+          <a:ln/>
+        </p:spPr>
+        <p:txBody>
+          <a:bodyPr wrap="square" lIns="0" tIns="0" rIns="0" bIns="0" rtlCol="0" anchor="ctr"/>
+          <a:lstStyle/>
+          <a:p>
+            <a:pPr indent="0" marL="0">
+              <a:buNone/>
+            </a:pPr>
+            <a:r>
+              <a:rPr lang="en-US" sz="1200" dirty="0">
+                <a:solidFill>
+                  <a:srgbClr val="6E7A8A"/>
+                </a:solidFill>
+                <a:latin typeface="Microsoft YaHei" pitchFamily="34" charset="0"/>
+                <a:ea typeface="Microsoft YaHei" pitchFamily="34" charset="-122"/>
+                <a:cs typeface="Microsoft YaHei" pitchFamily="34" charset="-120"/>
+              </a:rPr>
+              <a:t>F04 与 F05，s03 的 [A] 表和权重打印画成图</a:t>
             </a:r>
             <a:endParaRPr lang="en-US" sz="1200" dirty="0"/>
           </a:p>
         </p:txBody>
       </p:sp>
-      <p:sp>
-        <p:nvSpPr>
-          <p:cNvPr id="6" name="Shape 4"/>
+      <p:pic>
+        <p:nvPicPr>
+          <p:cNvPr id="4" name="Image 0" descr="/home/user/lxfs/RUL_censored_conformal_handover/03_code/figures/F04_sample_accounting.png">    </p:cNvPr>
+          <p:cNvPicPr>
+            <a:picLocks noChangeAspect="1"/>
+          </p:cNvPicPr>
+          <p:nvPr/>
+        </p:nvPicPr>
+        <p:blipFill>
+          <a:blip r:embed="rId1"/>
+          <a:stretch>
+            <a:fillRect/>
+          </a:stretch>
+        </p:blipFill>
+        <p:spPr>
+          <a:xfrm>
+            <a:off x="548640" y="1371600"/>
+            <a:ext cx="6949440" cy="3044952"/>
+          </a:xfrm>
+          <a:prstGeom prst="rect">
+            <a:avLst/>
+          </a:prstGeom>
+        </p:spPr>
+      </p:pic>
+      <p:pic>
+        <p:nvPicPr>
+          <p:cNvPr id="5" name="Image 1" descr="/home/user/lxfs/RUL_censored_conformal_handover/03_code/figures/F05_weights_vs_t.png">    </p:cNvPr>
+          <p:cNvPicPr>
+            <a:picLocks noChangeAspect="1"/>
+          </p:cNvPicPr>
+          <p:nvPr/>
+        </p:nvPicPr>
+        <p:blipFill>
+          <a:blip r:embed="rId2"/>
+          <a:stretch>
+            <a:fillRect/>
+          </a:stretch>
+        </p:blipFill>
+        <p:spPr>
+          <a:xfrm>
+            <a:off x="7680960" y="1371600"/>
+            <a:ext cx="3959352" cy="3026664"/>
+          </a:xfrm>
+          <a:prstGeom prst="rect">
+            <a:avLst/>
+          </a:prstGeom>
+        </p:spPr>
+      </p:pic>
+      <p:sp>
+        <p:nvSpPr>
+          <p:cNvPr id="6" name="Shape 2"/>
           <p:cNvSpPr/>
           <p:nvPr/>
         </p:nvSpPr>
         <p:spPr>
           <a:xfrm>
-            <a:off x="548640" y="2377440"/>
-            <a:ext cx="11091672" cy="960120"/>
+            <a:off x="548640" y="4572000"/>
+            <a:ext cx="5394960" cy="1737360"/>
           </a:xfrm>
           <a:prstGeom prst="rect">
             <a:avLst/>
           </a:prstGeom>
           <a:solidFill>
-            <a:srgbClr val="1F3352"/>
+            <a:srgbClr val="F4F7FA"/>
           </a:solidFill>
           <a:ln w="12700">
             <a:solidFill>
-              <a:srgbClr val="1F3352"/>
+              <a:srgbClr val="F4F7FA"/>
             </a:solidFill>
             <a:prstDash val="solid"/>
           </a:ln>
@@ -12415,105 +15679,108 @@
       </p:sp>
       <p:sp>
         <p:nvSpPr>
-          <p:cNvPr id="7" name="Text 5"/>
-          <p:cNvSpPr txBox="1"/>
-          <p:nvPr/>
-        </p:nvSpPr>
-        <p:spPr>
-          <a:xfrm>
-            <a:off x="822960" y="2377440"/>
-            <a:ext cx="1280160" cy="960120"/>
-          </a:xfrm>
-          <a:prstGeom prst="rect">
-            <a:avLst/>
-          </a:prstGeom>
-          <a:noFill/>
-          <a:ln/>
-        </p:spPr>
-        <p:txBody>
-          <a:bodyPr wrap="square" lIns="0" tIns="0" rIns="0" bIns="0" rtlCol="0" anchor="ctr"/>
-          <a:lstStyle/>
-          <a:p>
-            <a:pPr indent="0" marL="0">
-              <a:buNone/>
-            </a:pPr>
-            <a:r>
-              <a:rPr lang="en-US" sz="1400" b="1" dirty="0">
-                <a:solidFill>
-                  <a:srgbClr val="F2C46D"/>
+          <p:cNvPr id="7" name="Text 3"/>
+          <p:cNvSpPr txBox="1"/>
+          <p:nvPr/>
+        </p:nvSpPr>
+        <p:spPr>
+          <a:xfrm>
+            <a:off x="749808" y="4736592"/>
+            <a:ext cx="4992624" cy="310896"/>
+          </a:xfrm>
+          <a:prstGeom prst="rect">
+            <a:avLst/>
+          </a:prstGeom>
+          <a:noFill/>
+          <a:ln/>
+        </p:spPr>
+        <p:txBody>
+          <a:bodyPr wrap="square" lIns="0" tIns="0" rIns="0" bIns="0" rtlCol="0" anchor="t"/>
+          <a:lstStyle/>
+          <a:p>
+            <a:pPr indent="0" marL="0">
+              <a:buNone/>
+            </a:pPr>
+            <a:r>
+              <a:rPr lang="en-US" sz="1200" b="1" dirty="0">
+                <a:solidFill>
+                  <a:srgbClr val="152238"/>
                 </a:solidFill>
                 <a:latin typeface="Microsoft YaHei" pitchFamily="34" charset="0"/>
                 <a:ea typeface="Microsoft YaHei" pitchFamily="34" charset="-122"/>
                 <a:cs typeface="Microsoft YaHei" pitchFamily="34" charset="-120"/>
               </a:rPr>
-              <a:t>作业二</a:t>
-            </a:r>
-            <a:endParaRPr lang="en-US" sz="1400" dirty="0"/>
-          </a:p>
-        </p:txBody>
-      </p:sp>
-      <p:sp>
-        <p:nvSpPr>
-          <p:cNvPr id="8" name="Text 6"/>
-          <p:cNvSpPr txBox="1"/>
-          <p:nvPr/>
-        </p:nvSpPr>
-        <p:spPr>
-          <a:xfrm>
-            <a:off x="2286000" y="2377440"/>
-            <a:ext cx="9079992" cy="960120"/>
-          </a:xfrm>
-          <a:prstGeom prst="rect">
-            <a:avLst/>
-          </a:prstGeom>
-          <a:noFill/>
-          <a:ln/>
-        </p:spPr>
-        <p:txBody>
-          <a:bodyPr wrap="square" lIns="0" tIns="0" rIns="0" bIns="0" rtlCol="0" anchor="ctr"/>
+              <a:t>核算表说了什么</a:t>
+            </a:r>
+            <a:endParaRPr lang="en-US" sz="1200" dirty="0"/>
+          </a:p>
+        </p:txBody>
+      </p:sp>
+      <p:sp>
+        <p:nvSpPr>
+          <p:cNvPr id="8" name="Text 4"/>
+          <p:cNvSpPr txBox="1"/>
+          <p:nvPr/>
+        </p:nvSpPr>
+        <p:spPr>
+          <a:xfrm>
+            <a:off x="749808" y="5120640"/>
+            <a:ext cx="4992624" cy="1051560"/>
+          </a:xfrm>
+          <a:prstGeom prst="rect">
+            <a:avLst/>
+          </a:prstGeom>
+          <a:noFill/>
+          <a:ln/>
+        </p:spPr>
+        <p:txBody>
+          <a:bodyPr wrap="square" lIns="0" tIns="0" rIns="0" bIns="0" rtlCol="0" anchor="t"/>
           <a:lstStyle/>
           <a:p>
             <a:pPr indent="0" marL="0">
               <a:lnSpc>
                 <a:spcPct val="125000"/>
               </a:lnSpc>
-              <a:buNone/>
-            </a:pPr>
-            <a:r>
-              <a:rPr lang="en-US" sz="1200" dirty="0">
-                <a:solidFill>
-                  <a:srgbClr val="DCE7F2"/>
+              <a:spcAft>
+                <a:spcPts val="500"/>
+              </a:spcAft>
+              <a:buNone/>
+            </a:pPr>
+            <a:r>
+              <a:rPr lang="en-US" sz="1100" dirty="0">
+                <a:solidFill>
+                  <a:srgbClr val="1A1A1A"/>
                 </a:solidFill>
                 <a:latin typeface="Microsoft YaHei" pitchFamily="34" charset="0"/>
                 <a:ea typeface="Microsoft YaHei" pitchFamily="34" charset="-122"/>
                 <a:cs typeface="Microsoft YaHei" pitchFamily="34" charset="-120"/>
               </a:rPr>
-              <a:t>看 s03 的核算表，回答：60% 删失率那一档要不要保留。理由只能是“校准折保留发动机”那一列的数。</a:t>
-            </a:r>
-            <a:endParaRPr lang="en-US" sz="1200" dirty="0"/>
-          </a:p>
-        </p:txBody>
-      </p:sp>
-      <p:sp>
-        <p:nvSpPr>
-          <p:cNvPr id="9" name="Shape 7"/>
+              <a:t>保留样本占观测样本的比例：删失 20% 时 94% 到 99%，60% 时 79% 到 96%。校准折保留发动机在全部 12 个组合里都是 40 台，因为下线时刻下限 C_MIN = 60 大于最大的 c0 = 50。作业二的答案：按这一列，60% 那档不用放弃。</a:t>
+            </a:r>
+            <a:endParaRPr lang="en-US" sz="1100" dirty="0"/>
+          </a:p>
+        </p:txBody>
+      </p:sp>
+      <p:sp>
+        <p:nvSpPr>
+          <p:cNvPr id="9" name="Shape 5"/>
           <p:cNvSpPr/>
           <p:nvPr/>
         </p:nvSpPr>
         <p:spPr>
           <a:xfrm>
-            <a:off x="548640" y="3474720"/>
-            <a:ext cx="11091672" cy="960120"/>
+            <a:off x="6126480" y="4572000"/>
+            <a:ext cx="5513832" cy="1737360"/>
           </a:xfrm>
           <a:prstGeom prst="rect">
             <a:avLst/>
           </a:prstGeom>
           <a:solidFill>
-            <a:srgbClr val="1F3352"/>
+            <a:srgbClr val="152238"/>
           </a:solidFill>
           <a:ln w="12700">
             <a:solidFill>
-              <a:srgbClr val="1F3352"/>
+              <a:srgbClr val="152238"/>
             </a:solidFill>
             <a:prstDash val="solid"/>
           </a:ln>
@@ -12521,30 +15788,30 @@
       </p:sp>
       <p:sp>
         <p:nvSpPr>
-          <p:cNvPr id="10" name="Text 8"/>
-          <p:cNvSpPr txBox="1"/>
-          <p:nvPr/>
-        </p:nvSpPr>
-        <p:spPr>
-          <a:xfrm>
-            <a:off x="822960" y="3474720"/>
-            <a:ext cx="1280160" cy="960120"/>
-          </a:xfrm>
-          <a:prstGeom prst="rect">
-            <a:avLst/>
-          </a:prstGeom>
-          <a:noFill/>
-          <a:ln/>
-        </p:spPr>
-        <p:txBody>
-          <a:bodyPr wrap="square" lIns="0" tIns="0" rIns="0" bIns="0" rtlCol="0" anchor="ctr"/>
-          <a:lstStyle/>
-          <a:p>
-            <a:pPr indent="0" marL="0">
-              <a:buNone/>
-            </a:pPr>
-            <a:r>
-              <a:rPr lang="en-US" sz="1400" b="1" dirty="0">
+          <p:cNvPr id="10" name="Text 6"/>
+          <p:cNvSpPr txBox="1"/>
+          <p:nvPr/>
+        </p:nvSpPr>
+        <p:spPr>
+          <a:xfrm>
+            <a:off x="6327648" y="4736592"/>
+            <a:ext cx="5111496" cy="310896"/>
+          </a:xfrm>
+          <a:prstGeom prst="rect">
+            <a:avLst/>
+          </a:prstGeom>
+          <a:noFill/>
+          <a:ln/>
+        </p:spPr>
+        <p:txBody>
+          <a:bodyPr wrap="square" lIns="0" tIns="0" rIns="0" bIns="0" rtlCol="0" anchor="t"/>
+          <a:lstStyle/>
+          <a:p>
+            <a:pPr indent="0" marL="0">
+              <a:buNone/>
+            </a:pPr>
+            <a:r>
+              <a:rPr lang="en-US" sz="1200" b="1" dirty="0">
                 <a:solidFill>
                   <a:srgbClr val="F2C46D"/>
                 </a:solidFill>
@@ -12552,41 +15819,44 @@
                 <a:ea typeface="Microsoft YaHei" pitchFamily="34" charset="-122"/>
                 <a:cs typeface="Microsoft YaHei" pitchFamily="34" charset="-120"/>
               </a:rPr>
-              <a:t>作业三</a:t>
-            </a:r>
-            <a:endParaRPr lang="en-US" sz="1400" dirty="0"/>
-          </a:p>
-        </p:txBody>
-      </p:sp>
-      <p:sp>
-        <p:nvSpPr>
-          <p:cNvPr id="11" name="Text 9"/>
-          <p:cNvSpPr txBox="1"/>
-          <p:nvPr/>
-        </p:nvSpPr>
-        <p:spPr>
-          <a:xfrm>
-            <a:off x="2286000" y="3474720"/>
-            <a:ext cx="9079992" cy="960120"/>
-          </a:xfrm>
-          <a:prstGeom prst="rect">
-            <a:avLst/>
-          </a:prstGeom>
-          <a:noFill/>
-          <a:ln/>
-        </p:spPr>
-        <p:txBody>
-          <a:bodyPr wrap="square" lIns="0" tIns="0" rIns="0" bIns="0" rtlCol="0" anchor="ctr"/>
+              <a:t>权重说了什么</a:t>
+            </a:r>
+            <a:endParaRPr lang="en-US" sz="1200" dirty="0"/>
+          </a:p>
+        </p:txBody>
+      </p:sp>
+      <p:sp>
+        <p:nvSpPr>
+          <p:cNvPr id="11" name="Text 7"/>
+          <p:cNvSpPr txBox="1"/>
+          <p:nvPr/>
+        </p:nvSpPr>
+        <p:spPr>
+          <a:xfrm>
+            <a:off x="6327648" y="5120640"/>
+            <a:ext cx="5111496" cy="1051560"/>
+          </a:xfrm>
+          <a:prstGeom prst="rect">
+            <a:avLst/>
+          </a:prstGeom>
+          <a:noFill/>
+          <a:ln/>
+        </p:spPr>
+        <p:txBody>
+          <a:bodyPr wrap="square" lIns="0" tIns="0" rIns="0" bIns="0" rtlCol="0" anchor="t"/>
           <a:lstStyle/>
           <a:p>
             <a:pPr indent="0" marL="0">
               <a:lnSpc>
                 <a:spcPct val="125000"/>
               </a:lnSpc>
-              <a:buNone/>
-            </a:pPr>
-            <a:r>
-              <a:rPr lang="en-US" sz="1200" dirty="0">
+              <a:spcAft>
+                <a:spcPts val="500"/>
+              </a:spcAft>
+              <a:buNone/>
+            </a:pPr>
+            <a:r>
+              <a:rPr lang="en-US" sz="1100" dirty="0">
                 <a:solidFill>
                   <a:srgbClr val="DCE7F2"/>
                 </a:solidFill>
@@ -12594,22 +15864,22 @@
                 <a:ea typeface="Microsoft YaHei" pitchFamily="34" charset="-122"/>
                 <a:cs typeface="Microsoft YaHei" pitchFamily="34" charset="-120"/>
               </a:rPr>
-              <a:t>对比 s03 结果表里 Cu 和 Cw 的 cov_dec，用一句话解释差从哪来。答案在第 5 页。再对比 Cw 和 Cw1 的 mean_L，说这是谁的代价。</a:t>
-            </a:r>
-            <a:endParaRPr lang="en-US" sz="1200" dirty="0"/>
-          </a:p>
-        </p:txBody>
-      </p:sp>
-      <p:sp>
-        <p:nvSpPr>
-          <p:cNvPr id="12" name="Text 10"/>
-          <p:cNvSpPr txBox="1"/>
-          <p:nvPr/>
-        </p:nvSpPr>
-        <p:spPr>
-          <a:xfrm>
-            <a:off x="548640" y="4709160"/>
-            <a:ext cx="3657600" cy="365760"/>
+              <a:t>删失 20% 时权重最大 1.6，接近常数；40% 和 60% 时晚期循环权重到 60，也就是下限 1 / 训练折台数被触发。删失越重、t 越大，留下来的样本要顶越多人的份。这就是第 5 页那个发现的真数据版本。</a:t>
+            </a:r>
+            <a:endParaRPr lang="en-US" sz="1100" dirty="0"/>
+          </a:p>
+        </p:txBody>
+      </p:sp>
+      <p:sp>
+        <p:nvSpPr>
+          <p:cNvPr id="12" name="Text 8"/>
+          <p:cNvSpPr txBox="1"/>
+          <p:nvPr/>
+        </p:nvSpPr>
+        <p:spPr>
+          <a:xfrm>
+            <a:off x="548640" y="6382512"/>
+            <a:ext cx="11091672" cy="274320"/>
           </a:xfrm>
           <a:prstGeom prst="rect">
             <a:avLst/>
@@ -12625,131 +15895,2809 @@
               <a:buNone/>
             </a:pPr>
             <a:r>
-              <a:rPr lang="en-US" sz="1500" b="1" dirty="0">
-                <a:solidFill>
-                  <a:srgbClr val="FFFFFF"/>
+              <a:rPr lang="en-US" sz="900" dirty="0">
+                <a:solidFill>
+                  <a:srgbClr val="6E7A8A"/>
                 </a:solidFill>
                 <a:latin typeface="Microsoft YaHei" pitchFamily="34" charset="0"/>
                 <a:ea typeface="Microsoft YaHei" pitchFamily="34" charset="-122"/>
                 <a:cs typeface="Microsoft YaHei" pitchFamily="34" charset="-120"/>
               </a:rPr>
-              <a:t>下次课</a:t>
-            </a:r>
-            <a:endParaRPr lang="en-US" sz="1500" dirty="0"/>
-          </a:p>
-        </p:txBody>
-      </p:sp>
-      <p:sp>
-        <p:nvSpPr>
-          <p:cNvPr id="13" name="Text 11"/>
-          <p:cNvSpPr txBox="1"/>
-          <p:nvPr/>
-        </p:nvSpPr>
-        <p:spPr>
-          <a:xfrm>
-            <a:off x="548640" y="5120640"/>
-            <a:ext cx="11091672" cy="1554480"/>
-          </a:xfrm>
-          <a:prstGeom prst="rect">
-            <a:avLst/>
-          </a:prstGeom>
-          <a:noFill/>
-          <a:ln/>
-        </p:spPr>
-        <p:txBody>
-          <a:bodyPr wrap="square" lIns="0" tIns="0" rIns="0" bIns="0" rtlCol="0" anchor="t"/>
-          <a:lstStyle/>
-          <a:p>
-            <a:pPr indent="0" marL="0">
-              <a:lnSpc>
-                <a:spcPct val="130000"/>
-              </a:lnSpc>
-              <a:spcAft>
-                <a:spcPts val="300"/>
-              </a:spcAft>
-              <a:buNone/>
-            </a:pPr>
-            <a:r>
-              <a:rPr lang="en-US" sz="1150" dirty="0">
+              <a:t>图为 Linux 预览版（替代字体 Liberation Serif 与文泉驿）。论文用图在 Windows 上重跑 s04 即为宋体五号与 Times New Roman 五号。删失为人工构造。</a:t>
+            </a:r>
+            <a:endParaRPr lang="en-US" sz="900" dirty="0"/>
+          </a:p>
+        </p:txBody>
+      </p:sp>
+      <p:sp>
+        <p:nvSpPr>
+          <p:cNvPr id="13" name="Text 9"/>
+          <p:cNvSpPr txBox="1"/>
+          <p:nvPr/>
+        </p:nvSpPr>
+        <p:spPr>
+          <a:xfrm>
+            <a:off x="11274552" y="6473952"/>
+            <a:ext cx="457200" cy="274320"/>
+          </a:xfrm>
+          <a:prstGeom prst="rect">
+            <a:avLst/>
+          </a:prstGeom>
+          <a:noFill/>
+          <a:ln/>
+        </p:spPr>
+        <p:txBody>
+          <a:bodyPr wrap="square" lIns="0" tIns="0" rIns="0" bIns="0" rtlCol="0" anchor="ctr"/>
+          <a:lstStyle/>
+          <a:p>
+            <a:pPr algn="r" indent="0" marL="0">
+              <a:buNone/>
+            </a:pPr>
+            <a:r>
+              <a:rPr lang="en-US" sz="1000" dirty="0">
                 <a:solidFill>
                   <a:srgbClr val="9FB2C9"/>
+                </a:solidFill>
+                <a:latin typeface="Times New Roman" pitchFamily="34" charset="0"/>
+                <a:ea typeface="Times New Roman" pitchFamily="34" charset="-122"/>
+                <a:cs typeface="Times New Roman" pitchFamily="34" charset="-120"/>
+              </a:rPr>
+              <a:t>17</a:t>
+            </a:r>
+            <a:endParaRPr lang="en-US" sz="1000" dirty="0"/>
+          </a:p>
+        </p:txBody>
+      </p:sp>
+    </p:spTree>
+  </p:cSld>
+  <p:clrMapOvr>
+    <a:masterClrMapping/>
+  </p:clrMapOvr>
+</p:sld>
+</file>
+
+<file path=ppt/slides/slide18.xml><?xml version="1.0" encoding="utf-8"?>
+<p:sld xmlns:a="http://schemas.openxmlformats.org/drawingml/2006/main" xmlns:r="http://schemas.openxmlformats.org/officeDocument/2006/relationships" xmlns:p="http://schemas.openxmlformats.org/presentationml/2006/main">
+  <p:cSld name="Slide 18">
+    <p:spTree>
+      <p:nvGrpSpPr>
+        <p:cNvPr id="1" name=""/>
+        <p:cNvGrpSpPr/>
+        <p:nvPr/>
+      </p:nvGrpSpPr>
+      <p:grpSpPr>
+        <a:xfrm>
+          <a:off x="0" y="0"/>
+          <a:ext cx="0" cy="0"/>
+          <a:chOff x="0" y="0"/>
+          <a:chExt cx="0" cy="0"/>
+        </a:xfrm>
+      </p:grpSpPr>
+      <p:sp>
+        <p:nvSpPr>
+          <p:cNvPr id="2" name="Text 0"/>
+          <p:cNvSpPr txBox="1"/>
+          <p:nvPr/>
+        </p:nvSpPr>
+        <p:spPr>
+          <a:xfrm>
+            <a:off x="548640" y="347472"/>
+            <a:ext cx="11091672" cy="548640"/>
+          </a:xfrm>
+          <a:prstGeom prst="rect">
+            <a:avLst/>
+          </a:prstGeom>
+          <a:noFill/>
+          <a:ln/>
+        </p:spPr>
+        <p:txBody>
+          <a:bodyPr wrap="square" lIns="0" tIns="0" rIns="0" bIns="0" rtlCol="0" anchor="ctr"/>
+          <a:lstStyle/>
+          <a:p>
+            <a:pPr indent="0" marL="0">
+              <a:buNone/>
+            </a:pPr>
+            <a:r>
+              <a:rPr lang="en-US" sz="2600" b="1" dirty="0">
+                <a:solidFill>
+                  <a:srgbClr val="152238"/>
                 </a:solidFill>
                 <a:latin typeface="Microsoft YaHei" pitchFamily="34" charset="0"/>
                 <a:ea typeface="Microsoft YaHei" pitchFamily="34" charset="-122"/>
                 <a:cs typeface="Microsoft YaHei" pitchFamily="34" charset="-120"/>
               </a:rPr>
-              <a:t>先对作业二、作业三的答案。</a:t>
-            </a:r>
-            <a:endParaRPr lang="en-US" sz="1150" dirty="0"/>
-          </a:p>
-          <a:p>
-            <a:pPr indent="0" marL="0">
-              <a:lnSpc>
-                <a:spcPct val="130000"/>
-              </a:lnSpc>
-              <a:spcAft>
-                <a:spcPts val="300"/>
-              </a:spcAft>
-              <a:buNone/>
-            </a:pPr>
-            <a:r>
-              <a:rPr lang="en-US" sz="1150" dirty="0">
-                <a:solidFill>
-                  <a:srgbClr val="9FB2C9"/>
+              <a:t>结果二：总体覆盖率与决策区覆盖率随删失率</a:t>
+            </a:r>
+            <a:endParaRPr lang="en-US" sz="2600" dirty="0"/>
+          </a:p>
+        </p:txBody>
+      </p:sp>
+      <p:sp>
+        <p:nvSpPr>
+          <p:cNvPr id="3" name="Text 1"/>
+          <p:cNvSpPr txBox="1"/>
+          <p:nvPr/>
+        </p:nvSpPr>
+        <p:spPr>
+          <a:xfrm>
+            <a:off x="548640" y="896112"/>
+            <a:ext cx="11091672" cy="292608"/>
+          </a:xfrm>
+          <a:prstGeom prst="rect">
+            <a:avLst/>
+          </a:prstGeom>
+          <a:noFill/>
+          <a:ln/>
+        </p:spPr>
+        <p:txBody>
+          <a:bodyPr wrap="square" lIns="0" tIns="0" rIns="0" bIns="0" rtlCol="0" anchor="ctr"/>
+          <a:lstStyle/>
+          <a:p>
+            <a:pPr indent="0" marL="0">
+              <a:buNone/>
+            </a:pPr>
+            <a:r>
+              <a:rPr lang="en-US" sz="1200" dirty="0">
+                <a:solidFill>
+                  <a:srgbClr val="6E7A8A"/>
                 </a:solidFill>
                 <a:latin typeface="Microsoft YaHei" pitchFamily="34" charset="0"/>
                 <a:ea typeface="Microsoft YaHei" pitchFamily="34" charset="-122"/>
                 <a:cs typeface="Microsoft YaHei" pitchFamily="34" charset="-120"/>
               </a:rPr>
-              <a:t>按预测值分组做 Mondrian 校准：校准集按 m̂(x) &lt; c0 与否分两组各取分位数，让决策区有自己的保证。这是对“总体达标、决策区不达标”最直接的处理。</a:t>
-            </a:r>
-            <a:endParaRPr lang="en-US" sz="1150" dirty="0"/>
-          </a:p>
+              <a:t>F07，c0 = 30；左总体，右决策区（真实 RUL &lt; 30，307 个测试点）</a:t>
+            </a:r>
+            <a:endParaRPr lang="en-US" sz="1200" dirty="0"/>
+          </a:p>
+        </p:txBody>
+      </p:sp>
+      <p:pic>
+        <p:nvPicPr>
+          <p:cNvPr id="4" name="Image 0" descr="/home/user/lxfs/RUL_censored_conformal_handover/03_code/figures/F07_coverage_vs_censoring_rate.png">    </p:cNvPr>
+          <p:cNvPicPr>
+            <a:picLocks noChangeAspect="1"/>
+          </p:cNvPicPr>
+          <p:nvPr/>
+        </p:nvPicPr>
+        <p:blipFill>
+          <a:blip r:embed="rId1"/>
+          <a:stretch>
+            <a:fillRect/>
+          </a:stretch>
+        </p:blipFill>
+        <p:spPr>
+          <a:xfrm>
+            <a:off x="548640" y="1371600"/>
+            <a:ext cx="6949440" cy="3474720"/>
+          </a:xfrm>
+          <a:prstGeom prst="rect">
+            <a:avLst/>
+          </a:prstGeom>
+        </p:spPr>
+      </p:pic>
+      <p:graphicFrame>
+        <p:nvGraphicFramePr>
+          <p:cNvPr id="19" name="Table 0"/>
+          <p:cNvGraphicFramePr>
+            <a:graphicFrameLocks noGrp="1"/>
+          </p:cNvGraphicFramePr>
+          <p:nvPr>
+            <p:extLst>
+              <p:ext uri="{D42A27DB-BD31-4B8C-83A1-F6EECF244321}">
+                <p14:modId xmlns:p14="http://schemas.microsoft.com/office/powerpoint/2010/main" val="1579011935"/>
+              </p:ext>
+            </p:extLst>
+          </p:nvPr>
+        </p:nvGraphicFramePr>
+        <p:xfrm>
+          <a:off x="7680960" y="1371600"/>
+          <a:ext cx="3959352" cy="914400"/>
+        </p:xfrm>
+        <a:graphic>
+          <a:graphicData uri="http://schemas.openxmlformats.org/drawingml/2006/table">
+            <a:tbl>
+              <a:tblPr/>
+              <a:tblGrid>
+                <a:gridCol w="1490472"/>
+                <a:gridCol w="822960"/>
+                <a:gridCol w="822960"/>
+                <a:gridCol w="822960"/>
+              </a:tblGrid>
+              <a:tr h="384048">
+                <a:tc>
+                  <a:txBody>
+                    <a:bodyPr/>
+                    <a:lstStyle/>
+                    <a:p>
+                      <a:pPr algn="ctr" indent="0" marL="0">
+                        <a:buNone/>
+                      </a:pPr>
+                      <a:r>
+                        <a:rPr lang="en-US" sz="1000" b="1" dirty="0">
+                          <a:solidFill>
+                            <a:srgbClr val="FFFFFF"/>
+                          </a:solidFill>
+                          <a:latin typeface="Microsoft YaHei" pitchFamily="34" charset="0"/>
+                          <a:ea typeface="Microsoft YaHei" pitchFamily="34" charset="-122"/>
+                          <a:cs typeface="Microsoft YaHei" pitchFamily="34" charset="-120"/>
+                        </a:rPr>
+                        <a:t>cov_dec, c0 = 30</a:t>
+                      </a:r>
+                      <a:endParaRPr lang="en-US" sz="1000" dirty="0">
+                        <a:latin typeface="Microsoft YaHei" charset="0"/>
+                        <a:ea typeface="Microsoft YaHei" charset="0"/>
+                        <a:cs typeface="Microsoft YaHei" charset="0"/>
+                      </a:endParaRPr>
+                    </a:p>
+                  </a:txBody>
+                  <a:tcPr marL="91440" marR="91440" marT="45720" marB="45720" anchor="ctr">
+                    <a:lnL w="9525" cap="flat" cmpd="sng" algn="ctr">
+                      <a:solidFill>
+                        <a:srgbClr val="D5DCE5"/>
+                      </a:solidFill>
+                      <a:prstDash val="solid"/>
+                      <a:round/>
+                      <a:headEnd type="none" w="med" len="med"/>
+                      <a:tailEnd type="none" w="med" len="med"/>
+                    </a:lnL>
+                    <a:lnR w="9525" cap="flat" cmpd="sng" algn="ctr">
+                      <a:solidFill>
+                        <a:srgbClr val="D5DCE5"/>
+                      </a:solidFill>
+                      <a:prstDash val="solid"/>
+                      <a:round/>
+                      <a:headEnd type="none" w="med" len="med"/>
+                      <a:tailEnd type="none" w="med" len="med"/>
+                    </a:lnR>
+                    <a:lnT w="9525" cap="flat" cmpd="sng" algn="ctr">
+                      <a:solidFill>
+                        <a:srgbClr val="D5DCE5"/>
+                      </a:solidFill>
+                      <a:prstDash val="solid"/>
+                      <a:round/>
+                      <a:headEnd type="none" w="med" len="med"/>
+                      <a:tailEnd type="none" w="med" len="med"/>
+                    </a:lnT>
+                    <a:lnB w="9525" cap="flat" cmpd="sng" algn="ctr">
+                      <a:solidFill>
+                        <a:srgbClr val="D5DCE5"/>
+                      </a:solidFill>
+                      <a:prstDash val="solid"/>
+                      <a:round/>
+                      <a:headEnd type="none" w="med" len="med"/>
+                      <a:tailEnd type="none" w="med" len="med"/>
+                    </a:lnB>
+                    <a:solidFill>
+                      <a:srgbClr val="152238"/>
+                    </a:solidFill>
+                  </a:tcPr>
+                </a:tc>
+                <a:tc>
+                  <a:txBody>
+                    <a:bodyPr/>
+                    <a:lstStyle/>
+                    <a:p>
+                      <a:pPr algn="ctr" indent="0" marL="0">
+                        <a:buNone/>
+                      </a:pPr>
+                      <a:r>
+                        <a:rPr lang="en-US" sz="1000" b="1" dirty="0">
+                          <a:solidFill>
+                            <a:srgbClr val="FFFFFF"/>
+                          </a:solidFill>
+                          <a:latin typeface="Microsoft YaHei" pitchFamily="34" charset="0"/>
+                          <a:ea typeface="Microsoft YaHei" pitchFamily="34" charset="-122"/>
+                          <a:cs typeface="Microsoft YaHei" pitchFamily="34" charset="-120"/>
+                        </a:rPr>
+                        <a:t>20%</a:t>
+                      </a:r>
+                      <a:endParaRPr lang="en-US" sz="1000" dirty="0">
+                        <a:latin typeface="Microsoft YaHei" charset="0"/>
+                        <a:ea typeface="Microsoft YaHei" charset="0"/>
+                        <a:cs typeface="Microsoft YaHei" charset="0"/>
+                      </a:endParaRPr>
+                    </a:p>
+                  </a:txBody>
+                  <a:tcPr marL="91440" marR="91440" marT="45720" marB="45720" anchor="ctr">
+                    <a:lnL w="9525" cap="flat" cmpd="sng" algn="ctr">
+                      <a:solidFill>
+                        <a:srgbClr val="D5DCE5"/>
+                      </a:solidFill>
+                      <a:prstDash val="solid"/>
+                      <a:round/>
+                      <a:headEnd type="none" w="med" len="med"/>
+                      <a:tailEnd type="none" w="med" len="med"/>
+                    </a:lnL>
+                    <a:lnR w="9525" cap="flat" cmpd="sng" algn="ctr">
+                      <a:solidFill>
+                        <a:srgbClr val="D5DCE5"/>
+                      </a:solidFill>
+                      <a:prstDash val="solid"/>
+                      <a:round/>
+                      <a:headEnd type="none" w="med" len="med"/>
+                      <a:tailEnd type="none" w="med" len="med"/>
+                    </a:lnR>
+                    <a:lnT w="9525" cap="flat" cmpd="sng" algn="ctr">
+                      <a:solidFill>
+                        <a:srgbClr val="D5DCE5"/>
+                      </a:solidFill>
+                      <a:prstDash val="solid"/>
+                      <a:round/>
+                      <a:headEnd type="none" w="med" len="med"/>
+                      <a:tailEnd type="none" w="med" len="med"/>
+                    </a:lnT>
+                    <a:lnB w="9525" cap="flat" cmpd="sng" algn="ctr">
+                      <a:solidFill>
+                        <a:srgbClr val="D5DCE5"/>
+                      </a:solidFill>
+                      <a:prstDash val="solid"/>
+                      <a:round/>
+                      <a:headEnd type="none" w="med" len="med"/>
+                      <a:tailEnd type="none" w="med" len="med"/>
+                    </a:lnB>
+                    <a:solidFill>
+                      <a:srgbClr val="152238"/>
+                    </a:solidFill>
+                  </a:tcPr>
+                </a:tc>
+                <a:tc>
+                  <a:txBody>
+                    <a:bodyPr/>
+                    <a:lstStyle/>
+                    <a:p>
+                      <a:pPr algn="ctr" indent="0" marL="0">
+                        <a:buNone/>
+                      </a:pPr>
+                      <a:r>
+                        <a:rPr lang="en-US" sz="1000" b="1" dirty="0">
+                          <a:solidFill>
+                            <a:srgbClr val="FFFFFF"/>
+                          </a:solidFill>
+                          <a:latin typeface="Microsoft YaHei" pitchFamily="34" charset="0"/>
+                          <a:ea typeface="Microsoft YaHei" pitchFamily="34" charset="-122"/>
+                          <a:cs typeface="Microsoft YaHei" pitchFamily="34" charset="-120"/>
+                        </a:rPr>
+                        <a:t>40%</a:t>
+                      </a:r>
+                      <a:endParaRPr lang="en-US" sz="1000" dirty="0">
+                        <a:latin typeface="Microsoft YaHei" charset="0"/>
+                        <a:ea typeface="Microsoft YaHei" charset="0"/>
+                        <a:cs typeface="Microsoft YaHei" charset="0"/>
+                      </a:endParaRPr>
+                    </a:p>
+                  </a:txBody>
+                  <a:tcPr marL="91440" marR="91440" marT="45720" marB="45720" anchor="ctr">
+                    <a:lnL w="9525" cap="flat" cmpd="sng" algn="ctr">
+                      <a:solidFill>
+                        <a:srgbClr val="D5DCE5"/>
+                      </a:solidFill>
+                      <a:prstDash val="solid"/>
+                      <a:round/>
+                      <a:headEnd type="none" w="med" len="med"/>
+                      <a:tailEnd type="none" w="med" len="med"/>
+                    </a:lnL>
+                    <a:lnR w="9525" cap="flat" cmpd="sng" algn="ctr">
+                      <a:solidFill>
+                        <a:srgbClr val="D5DCE5"/>
+                      </a:solidFill>
+                      <a:prstDash val="solid"/>
+                      <a:round/>
+                      <a:headEnd type="none" w="med" len="med"/>
+                      <a:tailEnd type="none" w="med" len="med"/>
+                    </a:lnR>
+                    <a:lnT w="9525" cap="flat" cmpd="sng" algn="ctr">
+                      <a:solidFill>
+                        <a:srgbClr val="D5DCE5"/>
+                      </a:solidFill>
+                      <a:prstDash val="solid"/>
+                      <a:round/>
+                      <a:headEnd type="none" w="med" len="med"/>
+                      <a:tailEnd type="none" w="med" len="med"/>
+                    </a:lnT>
+                    <a:lnB w="9525" cap="flat" cmpd="sng" algn="ctr">
+                      <a:solidFill>
+                        <a:srgbClr val="D5DCE5"/>
+                      </a:solidFill>
+                      <a:prstDash val="solid"/>
+                      <a:round/>
+                      <a:headEnd type="none" w="med" len="med"/>
+                      <a:tailEnd type="none" w="med" len="med"/>
+                    </a:lnB>
+                    <a:solidFill>
+                      <a:srgbClr val="152238"/>
+                    </a:solidFill>
+                  </a:tcPr>
+                </a:tc>
+                <a:tc>
+                  <a:txBody>
+                    <a:bodyPr/>
+                    <a:lstStyle/>
+                    <a:p>
+                      <a:pPr algn="ctr" indent="0" marL="0">
+                        <a:buNone/>
+                      </a:pPr>
+                      <a:r>
+                        <a:rPr lang="en-US" sz="1000" b="1" dirty="0">
+                          <a:solidFill>
+                            <a:srgbClr val="FFFFFF"/>
+                          </a:solidFill>
+                          <a:latin typeface="Microsoft YaHei" pitchFamily="34" charset="0"/>
+                          <a:ea typeface="Microsoft YaHei" pitchFamily="34" charset="-122"/>
+                          <a:cs typeface="Microsoft YaHei" pitchFamily="34" charset="-120"/>
+                        </a:rPr>
+                        <a:t>60%</a:t>
+                      </a:r>
+                      <a:endParaRPr lang="en-US" sz="1000" dirty="0">
+                        <a:latin typeface="Microsoft YaHei" charset="0"/>
+                        <a:ea typeface="Microsoft YaHei" charset="0"/>
+                        <a:cs typeface="Microsoft YaHei" charset="0"/>
+                      </a:endParaRPr>
+                    </a:p>
+                  </a:txBody>
+                  <a:tcPr marL="91440" marR="91440" marT="45720" marB="45720" anchor="ctr">
+                    <a:lnL w="9525" cap="flat" cmpd="sng" algn="ctr">
+                      <a:solidFill>
+                        <a:srgbClr val="D5DCE5"/>
+                      </a:solidFill>
+                      <a:prstDash val="solid"/>
+                      <a:round/>
+                      <a:headEnd type="none" w="med" len="med"/>
+                      <a:tailEnd type="none" w="med" len="med"/>
+                    </a:lnL>
+                    <a:lnR w="9525" cap="flat" cmpd="sng" algn="ctr">
+                      <a:solidFill>
+                        <a:srgbClr val="D5DCE5"/>
+                      </a:solidFill>
+                      <a:prstDash val="solid"/>
+                      <a:round/>
+                      <a:headEnd type="none" w="med" len="med"/>
+                      <a:tailEnd type="none" w="med" len="med"/>
+                    </a:lnR>
+                    <a:lnT w="9525" cap="flat" cmpd="sng" algn="ctr">
+                      <a:solidFill>
+                        <a:srgbClr val="D5DCE5"/>
+                      </a:solidFill>
+                      <a:prstDash val="solid"/>
+                      <a:round/>
+                      <a:headEnd type="none" w="med" len="med"/>
+                      <a:tailEnd type="none" w="med" len="med"/>
+                    </a:lnT>
+                    <a:lnB w="9525" cap="flat" cmpd="sng" algn="ctr">
+                      <a:solidFill>
+                        <a:srgbClr val="D5DCE5"/>
+                      </a:solidFill>
+                      <a:prstDash val="solid"/>
+                      <a:round/>
+                      <a:headEnd type="none" w="med" len="med"/>
+                      <a:tailEnd type="none" w="med" len="med"/>
+                    </a:lnB>
+                    <a:solidFill>
+                      <a:srgbClr val="152238"/>
+                    </a:solidFill>
+                  </a:tcPr>
+                </a:tc>
+              </a:tr>
+              <a:tr h="384048">
+                <a:tc>
+                  <a:txBody>
+                    <a:bodyPr/>
+                    <a:lstStyle/>
+                    <a:p>
+                      <a:pPr algn="ctr" indent="0" marL="0">
+                        <a:buNone/>
+                      </a:pPr>
+                      <a:r>
+                        <a:rPr lang="en-US" sz="1000" b="1" dirty="0">
+                          <a:solidFill>
+                            <a:srgbClr val="152238"/>
+                          </a:solidFill>
+                          <a:latin typeface="Times New Roman" pitchFamily="34" charset="0"/>
+                          <a:ea typeface="Times New Roman" pitchFamily="34" charset="-122"/>
+                          <a:cs typeface="Times New Roman" pitchFamily="34" charset="-120"/>
+                        </a:rPr>
+                        <a:t>E</a:t>
+                      </a:r>
+                      <a:endParaRPr lang="en-US" sz="1000" dirty="0">
+                        <a:latin typeface="Times New Roman" charset="0"/>
+                        <a:ea typeface="Times New Roman" charset="0"/>
+                        <a:cs typeface="Times New Roman" charset="0"/>
+                      </a:endParaRPr>
+                    </a:p>
+                  </a:txBody>
+                  <a:tcPr marL="91440" marR="91440" marT="45720" marB="45720" anchor="ctr">
+                    <a:lnL w="9525" cap="flat" cmpd="sng" algn="ctr">
+                      <a:solidFill>
+                        <a:srgbClr val="D5DCE5"/>
+                      </a:solidFill>
+                      <a:prstDash val="solid"/>
+                      <a:round/>
+                      <a:headEnd type="none" w="med" len="med"/>
+                      <a:tailEnd type="none" w="med" len="med"/>
+                    </a:lnL>
+                    <a:lnR w="9525" cap="flat" cmpd="sng" algn="ctr">
+                      <a:solidFill>
+                        <a:srgbClr val="D5DCE5"/>
+                      </a:solidFill>
+                      <a:prstDash val="solid"/>
+                      <a:round/>
+                      <a:headEnd type="none" w="med" len="med"/>
+                      <a:tailEnd type="none" w="med" len="med"/>
+                    </a:lnR>
+                    <a:lnT w="9525" cap="flat" cmpd="sng" algn="ctr">
+                      <a:solidFill>
+                        <a:srgbClr val="D5DCE5"/>
+                      </a:solidFill>
+                      <a:prstDash val="solid"/>
+                      <a:round/>
+                      <a:headEnd type="none" w="med" len="med"/>
+                      <a:tailEnd type="none" w="med" len="med"/>
+                    </a:lnT>
+                    <a:lnB w="9525" cap="flat" cmpd="sng" algn="ctr">
+                      <a:solidFill>
+                        <a:srgbClr val="D5DCE5"/>
+                      </a:solidFill>
+                      <a:prstDash val="solid"/>
+                      <a:round/>
+                      <a:headEnd type="none" w="med" len="med"/>
+                      <a:tailEnd type="none" w="med" len="med"/>
+                    </a:lnB>
+                    <a:solidFill>
+                      <a:srgbClr val="FFFFFF"/>
+                    </a:solidFill>
+                  </a:tcPr>
+                </a:tc>
+                <a:tc>
+                  <a:txBody>
+                    <a:bodyPr/>
+                    <a:lstStyle/>
+                    <a:p>
+                      <a:pPr algn="ctr" indent="0" marL="0">
+                        <a:buNone/>
+                      </a:pPr>
+                      <a:r>
+                        <a:rPr lang="en-US" sz="1000" dirty="0">
+                          <a:solidFill>
+                            <a:srgbClr val="1A1A1A"/>
+                          </a:solidFill>
+                          <a:latin typeface="Times New Roman" pitchFamily="34" charset="0"/>
+                          <a:ea typeface="Times New Roman" pitchFamily="34" charset="-122"/>
+                          <a:cs typeface="Times New Roman" pitchFamily="34" charset="-120"/>
+                        </a:rPr>
+                        <a:t>0.450</a:t>
+                      </a:r>
+                      <a:endParaRPr lang="en-US" sz="1000" dirty="0">
+                        <a:latin typeface="Times New Roman" charset="0"/>
+                        <a:ea typeface="Times New Roman" charset="0"/>
+                        <a:cs typeface="Times New Roman" charset="0"/>
+                      </a:endParaRPr>
+                    </a:p>
+                  </a:txBody>
+                  <a:tcPr marL="91440" marR="91440" marT="45720" marB="45720" anchor="ctr">
+                    <a:lnL w="9525" cap="flat" cmpd="sng" algn="ctr">
+                      <a:solidFill>
+                        <a:srgbClr val="D5DCE5"/>
+                      </a:solidFill>
+                      <a:prstDash val="solid"/>
+                      <a:round/>
+                      <a:headEnd type="none" w="med" len="med"/>
+                      <a:tailEnd type="none" w="med" len="med"/>
+                    </a:lnL>
+                    <a:lnR w="9525" cap="flat" cmpd="sng" algn="ctr">
+                      <a:solidFill>
+                        <a:srgbClr val="D5DCE5"/>
+                      </a:solidFill>
+                      <a:prstDash val="solid"/>
+                      <a:round/>
+                      <a:headEnd type="none" w="med" len="med"/>
+                      <a:tailEnd type="none" w="med" len="med"/>
+                    </a:lnR>
+                    <a:lnT w="9525" cap="flat" cmpd="sng" algn="ctr">
+                      <a:solidFill>
+                        <a:srgbClr val="D5DCE5"/>
+                      </a:solidFill>
+                      <a:prstDash val="solid"/>
+                      <a:round/>
+                      <a:headEnd type="none" w="med" len="med"/>
+                      <a:tailEnd type="none" w="med" len="med"/>
+                    </a:lnT>
+                    <a:lnB w="9525" cap="flat" cmpd="sng" algn="ctr">
+                      <a:solidFill>
+                        <a:srgbClr val="D5DCE5"/>
+                      </a:solidFill>
+                      <a:prstDash val="solid"/>
+                      <a:round/>
+                      <a:headEnd type="none" w="med" len="med"/>
+                      <a:tailEnd type="none" w="med" len="med"/>
+                    </a:lnB>
+                    <a:solidFill>
+                      <a:srgbClr val="FFFFFF"/>
+                    </a:solidFill>
+                  </a:tcPr>
+                </a:tc>
+                <a:tc>
+                  <a:txBody>
+                    <a:bodyPr/>
+                    <a:lstStyle/>
+                    <a:p>
+                      <a:pPr algn="ctr" indent="0" marL="0">
+                        <a:buNone/>
+                      </a:pPr>
+                      <a:r>
+                        <a:rPr lang="en-US" sz="1000" dirty="0">
+                          <a:solidFill>
+                            <a:srgbClr val="1A1A1A"/>
+                          </a:solidFill>
+                          <a:latin typeface="Times New Roman" pitchFamily="34" charset="0"/>
+                          <a:ea typeface="Times New Roman" pitchFamily="34" charset="-122"/>
+                          <a:cs typeface="Times New Roman" pitchFamily="34" charset="-120"/>
+                        </a:rPr>
+                        <a:t>0.450</a:t>
+                      </a:r>
+                      <a:endParaRPr lang="en-US" sz="1000" dirty="0">
+                        <a:latin typeface="Times New Roman" charset="0"/>
+                        <a:ea typeface="Times New Roman" charset="0"/>
+                        <a:cs typeface="Times New Roman" charset="0"/>
+                      </a:endParaRPr>
+                    </a:p>
+                  </a:txBody>
+                  <a:tcPr marL="91440" marR="91440" marT="45720" marB="45720" anchor="ctr">
+                    <a:lnL w="9525" cap="flat" cmpd="sng" algn="ctr">
+                      <a:solidFill>
+                        <a:srgbClr val="D5DCE5"/>
+                      </a:solidFill>
+                      <a:prstDash val="solid"/>
+                      <a:round/>
+                      <a:headEnd type="none" w="med" len="med"/>
+                      <a:tailEnd type="none" w="med" len="med"/>
+                    </a:lnL>
+                    <a:lnR w="9525" cap="flat" cmpd="sng" algn="ctr">
+                      <a:solidFill>
+                        <a:srgbClr val="D5DCE5"/>
+                      </a:solidFill>
+                      <a:prstDash val="solid"/>
+                      <a:round/>
+                      <a:headEnd type="none" w="med" len="med"/>
+                      <a:tailEnd type="none" w="med" len="med"/>
+                    </a:lnR>
+                    <a:lnT w="9525" cap="flat" cmpd="sng" algn="ctr">
+                      <a:solidFill>
+                        <a:srgbClr val="D5DCE5"/>
+                      </a:solidFill>
+                      <a:prstDash val="solid"/>
+                      <a:round/>
+                      <a:headEnd type="none" w="med" len="med"/>
+                      <a:tailEnd type="none" w="med" len="med"/>
+                    </a:lnT>
+                    <a:lnB w="9525" cap="flat" cmpd="sng" algn="ctr">
+                      <a:solidFill>
+                        <a:srgbClr val="D5DCE5"/>
+                      </a:solidFill>
+                      <a:prstDash val="solid"/>
+                      <a:round/>
+                      <a:headEnd type="none" w="med" len="med"/>
+                      <a:tailEnd type="none" w="med" len="med"/>
+                    </a:lnB>
+                    <a:solidFill>
+                      <a:srgbClr val="FFFFFF"/>
+                    </a:solidFill>
+                  </a:tcPr>
+                </a:tc>
+                <a:tc>
+                  <a:txBody>
+                    <a:bodyPr/>
+                    <a:lstStyle/>
+                    <a:p>
+                      <a:pPr algn="ctr" indent="0" marL="0">
+                        <a:buNone/>
+                      </a:pPr>
+                      <a:r>
+                        <a:rPr lang="en-US" sz="1000" dirty="0">
+                          <a:solidFill>
+                            <a:srgbClr val="1A1A1A"/>
+                          </a:solidFill>
+                          <a:latin typeface="Times New Roman" pitchFamily="34" charset="0"/>
+                          <a:ea typeface="Times New Roman" pitchFamily="34" charset="-122"/>
+                          <a:cs typeface="Times New Roman" pitchFamily="34" charset="-120"/>
+                        </a:rPr>
+                        <a:t>0.450</a:t>
+                      </a:r>
+                      <a:endParaRPr lang="en-US" sz="1000" dirty="0">
+                        <a:latin typeface="Times New Roman" charset="0"/>
+                        <a:ea typeface="Times New Roman" charset="0"/>
+                        <a:cs typeface="Times New Roman" charset="0"/>
+                      </a:endParaRPr>
+                    </a:p>
+                  </a:txBody>
+                  <a:tcPr marL="91440" marR="91440" marT="45720" marB="45720" anchor="ctr">
+                    <a:lnL w="9525" cap="flat" cmpd="sng" algn="ctr">
+                      <a:solidFill>
+                        <a:srgbClr val="D5DCE5"/>
+                      </a:solidFill>
+                      <a:prstDash val="solid"/>
+                      <a:round/>
+                      <a:headEnd type="none" w="med" len="med"/>
+                      <a:tailEnd type="none" w="med" len="med"/>
+                    </a:lnL>
+                    <a:lnR w="9525" cap="flat" cmpd="sng" algn="ctr">
+                      <a:solidFill>
+                        <a:srgbClr val="D5DCE5"/>
+                      </a:solidFill>
+                      <a:prstDash val="solid"/>
+                      <a:round/>
+                      <a:headEnd type="none" w="med" len="med"/>
+                      <a:tailEnd type="none" w="med" len="med"/>
+                    </a:lnR>
+                    <a:lnT w="9525" cap="flat" cmpd="sng" algn="ctr">
+                      <a:solidFill>
+                        <a:srgbClr val="D5DCE5"/>
+                      </a:solidFill>
+                      <a:prstDash val="solid"/>
+                      <a:round/>
+                      <a:headEnd type="none" w="med" len="med"/>
+                      <a:tailEnd type="none" w="med" len="med"/>
+                    </a:lnT>
+                    <a:lnB w="9525" cap="flat" cmpd="sng" algn="ctr">
+                      <a:solidFill>
+                        <a:srgbClr val="D5DCE5"/>
+                      </a:solidFill>
+                      <a:prstDash val="solid"/>
+                      <a:round/>
+                      <a:headEnd type="none" w="med" len="med"/>
+                      <a:tailEnd type="none" w="med" len="med"/>
+                    </a:lnB>
+                    <a:solidFill>
+                      <a:srgbClr val="FFFFFF"/>
+                    </a:solidFill>
+                  </a:tcPr>
+                </a:tc>
+              </a:tr>
+              <a:tr h="384048">
+                <a:tc>
+                  <a:txBody>
+                    <a:bodyPr/>
+                    <a:lstStyle/>
+                    <a:p>
+                      <a:pPr algn="ctr" indent="0" marL="0">
+                        <a:buNone/>
+                      </a:pPr>
+                      <a:r>
+                        <a:rPr lang="en-US" sz="1000" b="1" dirty="0">
+                          <a:solidFill>
+                            <a:srgbClr val="152238"/>
+                          </a:solidFill>
+                          <a:latin typeface="Times New Roman" pitchFamily="34" charset="0"/>
+                          <a:ea typeface="Times New Roman" pitchFamily="34" charset="-122"/>
+                          <a:cs typeface="Times New Roman" pitchFamily="34" charset="-120"/>
+                        </a:rPr>
+                        <a:t>A</a:t>
+                      </a:r>
+                      <a:endParaRPr lang="en-US" sz="1000" dirty="0">
+                        <a:latin typeface="Times New Roman" charset="0"/>
+                        <a:ea typeface="Times New Roman" charset="0"/>
+                        <a:cs typeface="Times New Roman" charset="0"/>
+                      </a:endParaRPr>
+                    </a:p>
+                  </a:txBody>
+                  <a:tcPr marL="91440" marR="91440" marT="45720" marB="45720" anchor="ctr">
+                    <a:lnL w="9525" cap="flat" cmpd="sng" algn="ctr">
+                      <a:solidFill>
+                        <a:srgbClr val="D5DCE5"/>
+                      </a:solidFill>
+                      <a:prstDash val="solid"/>
+                      <a:round/>
+                      <a:headEnd type="none" w="med" len="med"/>
+                      <a:tailEnd type="none" w="med" len="med"/>
+                    </a:lnL>
+                    <a:lnR w="9525" cap="flat" cmpd="sng" algn="ctr">
+                      <a:solidFill>
+                        <a:srgbClr val="D5DCE5"/>
+                      </a:solidFill>
+                      <a:prstDash val="solid"/>
+                      <a:round/>
+                      <a:headEnd type="none" w="med" len="med"/>
+                      <a:tailEnd type="none" w="med" len="med"/>
+                    </a:lnR>
+                    <a:lnT w="9525" cap="flat" cmpd="sng" algn="ctr">
+                      <a:solidFill>
+                        <a:srgbClr val="D5DCE5"/>
+                      </a:solidFill>
+                      <a:prstDash val="solid"/>
+                      <a:round/>
+                      <a:headEnd type="none" w="med" len="med"/>
+                      <a:tailEnd type="none" w="med" len="med"/>
+                    </a:lnT>
+                    <a:lnB w="9525" cap="flat" cmpd="sng" algn="ctr">
+                      <a:solidFill>
+                        <a:srgbClr val="D5DCE5"/>
+                      </a:solidFill>
+                      <a:prstDash val="solid"/>
+                      <a:round/>
+                      <a:headEnd type="none" w="med" len="med"/>
+                      <a:tailEnd type="none" w="med" len="med"/>
+                    </a:lnB>
+                    <a:solidFill>
+                      <a:srgbClr val="FFFFFF"/>
+                    </a:solidFill>
+                  </a:tcPr>
+                </a:tc>
+                <a:tc>
+                  <a:txBody>
+                    <a:bodyPr/>
+                    <a:lstStyle/>
+                    <a:p>
+                      <a:pPr algn="ctr" indent="0" marL="0">
+                        <a:buNone/>
+                      </a:pPr>
+                      <a:r>
+                        <a:rPr lang="en-US" sz="1000" dirty="0">
+                          <a:solidFill>
+                            <a:srgbClr val="1A1A1A"/>
+                          </a:solidFill>
+                          <a:latin typeface="Times New Roman" pitchFamily="34" charset="0"/>
+                          <a:ea typeface="Times New Roman" pitchFamily="34" charset="-122"/>
+                          <a:cs typeface="Times New Roman" pitchFamily="34" charset="-120"/>
+                        </a:rPr>
+                        <a:t>0.436</a:t>
+                      </a:r>
+                      <a:endParaRPr lang="en-US" sz="1000" dirty="0">
+                        <a:latin typeface="Times New Roman" charset="0"/>
+                        <a:ea typeface="Times New Roman" charset="0"/>
+                        <a:cs typeface="Times New Roman" charset="0"/>
+                      </a:endParaRPr>
+                    </a:p>
+                  </a:txBody>
+                  <a:tcPr marL="91440" marR="91440" marT="45720" marB="45720" anchor="ctr">
+                    <a:lnL w="9525" cap="flat" cmpd="sng" algn="ctr">
+                      <a:solidFill>
+                        <a:srgbClr val="D5DCE5"/>
+                      </a:solidFill>
+                      <a:prstDash val="solid"/>
+                      <a:round/>
+                      <a:headEnd type="none" w="med" len="med"/>
+                      <a:tailEnd type="none" w="med" len="med"/>
+                    </a:lnL>
+                    <a:lnR w="9525" cap="flat" cmpd="sng" algn="ctr">
+                      <a:solidFill>
+                        <a:srgbClr val="D5DCE5"/>
+                      </a:solidFill>
+                      <a:prstDash val="solid"/>
+                      <a:round/>
+                      <a:headEnd type="none" w="med" len="med"/>
+                      <a:tailEnd type="none" w="med" len="med"/>
+                    </a:lnR>
+                    <a:lnT w="9525" cap="flat" cmpd="sng" algn="ctr">
+                      <a:solidFill>
+                        <a:srgbClr val="D5DCE5"/>
+                      </a:solidFill>
+                      <a:prstDash val="solid"/>
+                      <a:round/>
+                      <a:headEnd type="none" w="med" len="med"/>
+                      <a:tailEnd type="none" w="med" len="med"/>
+                    </a:lnT>
+                    <a:lnB w="9525" cap="flat" cmpd="sng" algn="ctr">
+                      <a:solidFill>
+                        <a:srgbClr val="D5DCE5"/>
+                      </a:solidFill>
+                      <a:prstDash val="solid"/>
+                      <a:round/>
+                      <a:headEnd type="none" w="med" len="med"/>
+                      <a:tailEnd type="none" w="med" len="med"/>
+                    </a:lnB>
+                    <a:solidFill>
+                      <a:srgbClr val="FFFFFF"/>
+                    </a:solidFill>
+                  </a:tcPr>
+                </a:tc>
+                <a:tc>
+                  <a:txBody>
+                    <a:bodyPr/>
+                    <a:lstStyle/>
+                    <a:p>
+                      <a:pPr algn="ctr" indent="0" marL="0">
+                        <a:buNone/>
+                      </a:pPr>
+                      <a:r>
+                        <a:rPr lang="en-US" sz="1000" dirty="0">
+                          <a:solidFill>
+                            <a:srgbClr val="1A1A1A"/>
+                          </a:solidFill>
+                          <a:latin typeface="Times New Roman" pitchFamily="34" charset="0"/>
+                          <a:ea typeface="Times New Roman" pitchFamily="34" charset="-122"/>
+                          <a:cs typeface="Times New Roman" pitchFamily="34" charset="-120"/>
+                        </a:rPr>
+                        <a:t>0.384</a:t>
+                      </a:r>
+                      <a:endParaRPr lang="en-US" sz="1000" dirty="0">
+                        <a:latin typeface="Times New Roman" charset="0"/>
+                        <a:ea typeface="Times New Roman" charset="0"/>
+                        <a:cs typeface="Times New Roman" charset="0"/>
+                      </a:endParaRPr>
+                    </a:p>
+                  </a:txBody>
+                  <a:tcPr marL="91440" marR="91440" marT="45720" marB="45720" anchor="ctr">
+                    <a:lnL w="9525" cap="flat" cmpd="sng" algn="ctr">
+                      <a:solidFill>
+                        <a:srgbClr val="D5DCE5"/>
+                      </a:solidFill>
+                      <a:prstDash val="solid"/>
+                      <a:round/>
+                      <a:headEnd type="none" w="med" len="med"/>
+                      <a:tailEnd type="none" w="med" len="med"/>
+                    </a:lnL>
+                    <a:lnR w="9525" cap="flat" cmpd="sng" algn="ctr">
+                      <a:solidFill>
+                        <a:srgbClr val="D5DCE5"/>
+                      </a:solidFill>
+                      <a:prstDash val="solid"/>
+                      <a:round/>
+                      <a:headEnd type="none" w="med" len="med"/>
+                      <a:tailEnd type="none" w="med" len="med"/>
+                    </a:lnR>
+                    <a:lnT w="9525" cap="flat" cmpd="sng" algn="ctr">
+                      <a:solidFill>
+                        <a:srgbClr val="D5DCE5"/>
+                      </a:solidFill>
+                      <a:prstDash val="solid"/>
+                      <a:round/>
+                      <a:headEnd type="none" w="med" len="med"/>
+                      <a:tailEnd type="none" w="med" len="med"/>
+                    </a:lnT>
+                    <a:lnB w="9525" cap="flat" cmpd="sng" algn="ctr">
+                      <a:solidFill>
+                        <a:srgbClr val="D5DCE5"/>
+                      </a:solidFill>
+                      <a:prstDash val="solid"/>
+                      <a:round/>
+                      <a:headEnd type="none" w="med" len="med"/>
+                      <a:tailEnd type="none" w="med" len="med"/>
+                    </a:lnB>
+                    <a:solidFill>
+                      <a:srgbClr val="FFFFFF"/>
+                    </a:solidFill>
+                  </a:tcPr>
+                </a:tc>
+                <a:tc>
+                  <a:txBody>
+                    <a:bodyPr/>
+                    <a:lstStyle/>
+                    <a:p>
+                      <a:pPr algn="ctr" indent="0" marL="0">
+                        <a:buNone/>
+                      </a:pPr>
+                      <a:r>
+                        <a:rPr lang="en-US" sz="1000" dirty="0">
+                          <a:solidFill>
+                            <a:srgbClr val="1A1A1A"/>
+                          </a:solidFill>
+                          <a:latin typeface="Times New Roman" pitchFamily="34" charset="0"/>
+                          <a:ea typeface="Times New Roman" pitchFamily="34" charset="-122"/>
+                          <a:cs typeface="Times New Roman" pitchFamily="34" charset="-120"/>
+                        </a:rPr>
+                        <a:t>0.570</a:t>
+                      </a:r>
+                      <a:endParaRPr lang="en-US" sz="1000" dirty="0">
+                        <a:latin typeface="Times New Roman" charset="0"/>
+                        <a:ea typeface="Times New Roman" charset="0"/>
+                        <a:cs typeface="Times New Roman" charset="0"/>
+                      </a:endParaRPr>
+                    </a:p>
+                  </a:txBody>
+                  <a:tcPr marL="91440" marR="91440" marT="45720" marB="45720" anchor="ctr">
+                    <a:lnL w="9525" cap="flat" cmpd="sng" algn="ctr">
+                      <a:solidFill>
+                        <a:srgbClr val="D5DCE5"/>
+                      </a:solidFill>
+                      <a:prstDash val="solid"/>
+                      <a:round/>
+                      <a:headEnd type="none" w="med" len="med"/>
+                      <a:tailEnd type="none" w="med" len="med"/>
+                    </a:lnL>
+                    <a:lnR w="9525" cap="flat" cmpd="sng" algn="ctr">
+                      <a:solidFill>
+                        <a:srgbClr val="D5DCE5"/>
+                      </a:solidFill>
+                      <a:prstDash val="solid"/>
+                      <a:round/>
+                      <a:headEnd type="none" w="med" len="med"/>
+                      <a:tailEnd type="none" w="med" len="med"/>
+                    </a:lnR>
+                    <a:lnT w="9525" cap="flat" cmpd="sng" algn="ctr">
+                      <a:solidFill>
+                        <a:srgbClr val="D5DCE5"/>
+                      </a:solidFill>
+                      <a:prstDash val="solid"/>
+                      <a:round/>
+                      <a:headEnd type="none" w="med" len="med"/>
+                      <a:tailEnd type="none" w="med" len="med"/>
+                    </a:lnT>
+                    <a:lnB w="9525" cap="flat" cmpd="sng" algn="ctr">
+                      <a:solidFill>
+                        <a:srgbClr val="D5DCE5"/>
+                      </a:solidFill>
+                      <a:prstDash val="solid"/>
+                      <a:round/>
+                      <a:headEnd type="none" w="med" len="med"/>
+                      <a:tailEnd type="none" w="med" len="med"/>
+                    </a:lnB>
+                    <a:solidFill>
+                      <a:srgbClr val="FFFFFF"/>
+                    </a:solidFill>
+                  </a:tcPr>
+                </a:tc>
+              </a:tr>
+              <a:tr h="384048">
+                <a:tc>
+                  <a:txBody>
+                    <a:bodyPr/>
+                    <a:lstStyle/>
+                    <a:p>
+                      <a:pPr algn="ctr" indent="0" marL="0">
+                        <a:buNone/>
+                      </a:pPr>
+                      <a:r>
+                        <a:rPr lang="en-US" sz="1000" b="1" dirty="0">
+                          <a:solidFill>
+                            <a:srgbClr val="152238"/>
+                          </a:solidFill>
+                          <a:latin typeface="Times New Roman" pitchFamily="34" charset="0"/>
+                          <a:ea typeface="Times New Roman" pitchFamily="34" charset="-122"/>
+                          <a:cs typeface="Times New Roman" pitchFamily="34" charset="-120"/>
+                        </a:rPr>
+                        <a:t>B</a:t>
+                      </a:r>
+                      <a:endParaRPr lang="en-US" sz="1000" dirty="0">
+                        <a:latin typeface="Times New Roman" charset="0"/>
+                        <a:ea typeface="Times New Roman" charset="0"/>
+                        <a:cs typeface="Times New Roman" charset="0"/>
+                      </a:endParaRPr>
+                    </a:p>
+                  </a:txBody>
+                  <a:tcPr marL="91440" marR="91440" marT="45720" marB="45720" anchor="ctr">
+                    <a:lnL w="9525" cap="flat" cmpd="sng" algn="ctr">
+                      <a:solidFill>
+                        <a:srgbClr val="D5DCE5"/>
+                      </a:solidFill>
+                      <a:prstDash val="solid"/>
+                      <a:round/>
+                      <a:headEnd type="none" w="med" len="med"/>
+                      <a:tailEnd type="none" w="med" len="med"/>
+                    </a:lnL>
+                    <a:lnR w="9525" cap="flat" cmpd="sng" algn="ctr">
+                      <a:solidFill>
+                        <a:srgbClr val="D5DCE5"/>
+                      </a:solidFill>
+                      <a:prstDash val="solid"/>
+                      <a:round/>
+                      <a:headEnd type="none" w="med" len="med"/>
+                      <a:tailEnd type="none" w="med" len="med"/>
+                    </a:lnR>
+                    <a:lnT w="9525" cap="flat" cmpd="sng" algn="ctr">
+                      <a:solidFill>
+                        <a:srgbClr val="D5DCE5"/>
+                      </a:solidFill>
+                      <a:prstDash val="solid"/>
+                      <a:round/>
+                      <a:headEnd type="none" w="med" len="med"/>
+                      <a:tailEnd type="none" w="med" len="med"/>
+                    </a:lnT>
+                    <a:lnB w="9525" cap="flat" cmpd="sng" algn="ctr">
+                      <a:solidFill>
+                        <a:srgbClr val="D5DCE5"/>
+                      </a:solidFill>
+                      <a:prstDash val="solid"/>
+                      <a:round/>
+                      <a:headEnd type="none" w="med" len="med"/>
+                      <a:tailEnd type="none" w="med" len="med"/>
+                    </a:lnB>
+                    <a:solidFill>
+                      <a:srgbClr val="FFFFFF"/>
+                    </a:solidFill>
+                  </a:tcPr>
+                </a:tc>
+                <a:tc>
+                  <a:txBody>
+                    <a:bodyPr/>
+                    <a:lstStyle/>
+                    <a:p>
+                      <a:pPr algn="ctr" indent="0" marL="0">
+                        <a:buNone/>
+                      </a:pPr>
+                      <a:r>
+                        <a:rPr lang="en-US" sz="1000" dirty="0">
+                          <a:solidFill>
+                            <a:srgbClr val="1A1A1A"/>
+                          </a:solidFill>
+                          <a:latin typeface="Times New Roman" pitchFamily="34" charset="0"/>
+                          <a:ea typeface="Times New Roman" pitchFamily="34" charset="-122"/>
+                          <a:cs typeface="Times New Roman" pitchFamily="34" charset="-120"/>
+                        </a:rPr>
+                        <a:t>0.593</a:t>
+                      </a:r>
+                      <a:endParaRPr lang="en-US" sz="1000" dirty="0">
+                        <a:latin typeface="Times New Roman" charset="0"/>
+                        <a:ea typeface="Times New Roman" charset="0"/>
+                        <a:cs typeface="Times New Roman" charset="0"/>
+                      </a:endParaRPr>
+                    </a:p>
+                  </a:txBody>
+                  <a:tcPr marL="91440" marR="91440" marT="45720" marB="45720" anchor="ctr">
+                    <a:lnL w="9525" cap="flat" cmpd="sng" algn="ctr">
+                      <a:solidFill>
+                        <a:srgbClr val="D5DCE5"/>
+                      </a:solidFill>
+                      <a:prstDash val="solid"/>
+                      <a:round/>
+                      <a:headEnd type="none" w="med" len="med"/>
+                      <a:tailEnd type="none" w="med" len="med"/>
+                    </a:lnL>
+                    <a:lnR w="9525" cap="flat" cmpd="sng" algn="ctr">
+                      <a:solidFill>
+                        <a:srgbClr val="D5DCE5"/>
+                      </a:solidFill>
+                      <a:prstDash val="solid"/>
+                      <a:round/>
+                      <a:headEnd type="none" w="med" len="med"/>
+                      <a:tailEnd type="none" w="med" len="med"/>
+                    </a:lnR>
+                    <a:lnT w="9525" cap="flat" cmpd="sng" algn="ctr">
+                      <a:solidFill>
+                        <a:srgbClr val="D5DCE5"/>
+                      </a:solidFill>
+                      <a:prstDash val="solid"/>
+                      <a:round/>
+                      <a:headEnd type="none" w="med" len="med"/>
+                      <a:tailEnd type="none" w="med" len="med"/>
+                    </a:lnT>
+                    <a:lnB w="9525" cap="flat" cmpd="sng" algn="ctr">
+                      <a:solidFill>
+                        <a:srgbClr val="D5DCE5"/>
+                      </a:solidFill>
+                      <a:prstDash val="solid"/>
+                      <a:round/>
+                      <a:headEnd type="none" w="med" len="med"/>
+                      <a:tailEnd type="none" w="med" len="med"/>
+                    </a:lnB>
+                    <a:solidFill>
+                      <a:srgbClr val="FFFFFF"/>
+                    </a:solidFill>
+                  </a:tcPr>
+                </a:tc>
+                <a:tc>
+                  <a:txBody>
+                    <a:bodyPr/>
+                    <a:lstStyle/>
+                    <a:p>
+                      <a:pPr algn="ctr" indent="0" marL="0">
+                        <a:buNone/>
+                      </a:pPr>
+                      <a:r>
+                        <a:rPr lang="en-US" sz="1000" dirty="0">
+                          <a:solidFill>
+                            <a:srgbClr val="1A1A1A"/>
+                          </a:solidFill>
+                          <a:latin typeface="Times New Roman" pitchFamily="34" charset="0"/>
+                          <a:ea typeface="Times New Roman" pitchFamily="34" charset="-122"/>
+                          <a:cs typeface="Times New Roman" pitchFamily="34" charset="-120"/>
+                        </a:rPr>
+                        <a:t>0.528</a:t>
+                      </a:r>
+                      <a:endParaRPr lang="en-US" sz="1000" dirty="0">
+                        <a:latin typeface="Times New Roman" charset="0"/>
+                        <a:ea typeface="Times New Roman" charset="0"/>
+                        <a:cs typeface="Times New Roman" charset="0"/>
+                      </a:endParaRPr>
+                    </a:p>
+                  </a:txBody>
+                  <a:tcPr marL="91440" marR="91440" marT="45720" marB="45720" anchor="ctr">
+                    <a:lnL w="9525" cap="flat" cmpd="sng" algn="ctr">
+                      <a:solidFill>
+                        <a:srgbClr val="D5DCE5"/>
+                      </a:solidFill>
+                      <a:prstDash val="solid"/>
+                      <a:round/>
+                      <a:headEnd type="none" w="med" len="med"/>
+                      <a:tailEnd type="none" w="med" len="med"/>
+                    </a:lnL>
+                    <a:lnR w="9525" cap="flat" cmpd="sng" algn="ctr">
+                      <a:solidFill>
+                        <a:srgbClr val="D5DCE5"/>
+                      </a:solidFill>
+                      <a:prstDash val="solid"/>
+                      <a:round/>
+                      <a:headEnd type="none" w="med" len="med"/>
+                      <a:tailEnd type="none" w="med" len="med"/>
+                    </a:lnR>
+                    <a:lnT w="9525" cap="flat" cmpd="sng" algn="ctr">
+                      <a:solidFill>
+                        <a:srgbClr val="D5DCE5"/>
+                      </a:solidFill>
+                      <a:prstDash val="solid"/>
+                      <a:round/>
+                      <a:headEnd type="none" w="med" len="med"/>
+                      <a:tailEnd type="none" w="med" len="med"/>
+                    </a:lnT>
+                    <a:lnB w="9525" cap="flat" cmpd="sng" algn="ctr">
+                      <a:solidFill>
+                        <a:srgbClr val="D5DCE5"/>
+                      </a:solidFill>
+                      <a:prstDash val="solid"/>
+                      <a:round/>
+                      <a:headEnd type="none" w="med" len="med"/>
+                      <a:tailEnd type="none" w="med" len="med"/>
+                    </a:lnB>
+                    <a:solidFill>
+                      <a:srgbClr val="FFFFFF"/>
+                    </a:solidFill>
+                  </a:tcPr>
+                </a:tc>
+                <a:tc>
+                  <a:txBody>
+                    <a:bodyPr/>
+                    <a:lstStyle/>
+                    <a:p>
+                      <a:pPr algn="ctr" indent="0" marL="0">
+                        <a:buNone/>
+                      </a:pPr>
+                      <a:r>
+                        <a:rPr lang="en-US" sz="1000" dirty="0">
+                          <a:solidFill>
+                            <a:srgbClr val="1A1A1A"/>
+                          </a:solidFill>
+                          <a:latin typeface="Times New Roman" pitchFamily="34" charset="0"/>
+                          <a:ea typeface="Times New Roman" pitchFamily="34" charset="-122"/>
+                          <a:cs typeface="Times New Roman" pitchFamily="34" charset="-120"/>
+                        </a:rPr>
+                        <a:t>0.941</a:t>
+                      </a:r>
+                      <a:endParaRPr lang="en-US" sz="1000" dirty="0">
+                        <a:latin typeface="Times New Roman" charset="0"/>
+                        <a:ea typeface="Times New Roman" charset="0"/>
+                        <a:cs typeface="Times New Roman" charset="0"/>
+                      </a:endParaRPr>
+                    </a:p>
+                  </a:txBody>
+                  <a:tcPr marL="91440" marR="91440" marT="45720" marB="45720" anchor="ctr">
+                    <a:lnL w="9525" cap="flat" cmpd="sng" algn="ctr">
+                      <a:solidFill>
+                        <a:srgbClr val="D5DCE5"/>
+                      </a:solidFill>
+                      <a:prstDash val="solid"/>
+                      <a:round/>
+                      <a:headEnd type="none" w="med" len="med"/>
+                      <a:tailEnd type="none" w="med" len="med"/>
+                    </a:lnL>
+                    <a:lnR w="9525" cap="flat" cmpd="sng" algn="ctr">
+                      <a:solidFill>
+                        <a:srgbClr val="D5DCE5"/>
+                      </a:solidFill>
+                      <a:prstDash val="solid"/>
+                      <a:round/>
+                      <a:headEnd type="none" w="med" len="med"/>
+                      <a:tailEnd type="none" w="med" len="med"/>
+                    </a:lnR>
+                    <a:lnT w="9525" cap="flat" cmpd="sng" algn="ctr">
+                      <a:solidFill>
+                        <a:srgbClr val="D5DCE5"/>
+                      </a:solidFill>
+                      <a:prstDash val="solid"/>
+                      <a:round/>
+                      <a:headEnd type="none" w="med" len="med"/>
+                      <a:tailEnd type="none" w="med" len="med"/>
+                    </a:lnT>
+                    <a:lnB w="9525" cap="flat" cmpd="sng" algn="ctr">
+                      <a:solidFill>
+                        <a:srgbClr val="D5DCE5"/>
+                      </a:solidFill>
+                      <a:prstDash val="solid"/>
+                      <a:round/>
+                      <a:headEnd type="none" w="med" len="med"/>
+                      <a:tailEnd type="none" w="med" len="med"/>
+                    </a:lnB>
+                    <a:solidFill>
+                      <a:srgbClr val="FFFFFF"/>
+                    </a:solidFill>
+                  </a:tcPr>
+                </a:tc>
+              </a:tr>
+              <a:tr h="384048">
+                <a:tc>
+                  <a:txBody>
+                    <a:bodyPr/>
+                    <a:lstStyle/>
+                    <a:p>
+                      <a:pPr algn="ctr" indent="0" marL="0">
+                        <a:buNone/>
+                      </a:pPr>
+                      <a:r>
+                        <a:rPr lang="en-US" sz="1000" b="1" dirty="0">
+                          <a:solidFill>
+                            <a:srgbClr val="152238"/>
+                          </a:solidFill>
+                          <a:latin typeface="Times New Roman" pitchFamily="34" charset="0"/>
+                          <a:ea typeface="Times New Roman" pitchFamily="34" charset="-122"/>
+                          <a:cs typeface="Times New Roman" pitchFamily="34" charset="-120"/>
+                        </a:rPr>
+                        <a:t>Cu</a:t>
+                      </a:r>
+                      <a:endParaRPr lang="en-US" sz="1000" dirty="0">
+                        <a:latin typeface="Times New Roman" charset="0"/>
+                        <a:ea typeface="Times New Roman" charset="0"/>
+                        <a:cs typeface="Times New Roman" charset="0"/>
+                      </a:endParaRPr>
+                    </a:p>
+                  </a:txBody>
+                  <a:tcPr marL="91440" marR="91440" marT="45720" marB="45720" anchor="ctr">
+                    <a:lnL w="9525" cap="flat" cmpd="sng" algn="ctr">
+                      <a:solidFill>
+                        <a:srgbClr val="D5DCE5"/>
+                      </a:solidFill>
+                      <a:prstDash val="solid"/>
+                      <a:round/>
+                      <a:headEnd type="none" w="med" len="med"/>
+                      <a:tailEnd type="none" w="med" len="med"/>
+                    </a:lnL>
+                    <a:lnR w="9525" cap="flat" cmpd="sng" algn="ctr">
+                      <a:solidFill>
+                        <a:srgbClr val="D5DCE5"/>
+                      </a:solidFill>
+                      <a:prstDash val="solid"/>
+                      <a:round/>
+                      <a:headEnd type="none" w="med" len="med"/>
+                      <a:tailEnd type="none" w="med" len="med"/>
+                    </a:lnR>
+                    <a:lnT w="9525" cap="flat" cmpd="sng" algn="ctr">
+                      <a:solidFill>
+                        <a:srgbClr val="D5DCE5"/>
+                      </a:solidFill>
+                      <a:prstDash val="solid"/>
+                      <a:round/>
+                      <a:headEnd type="none" w="med" len="med"/>
+                      <a:tailEnd type="none" w="med" len="med"/>
+                    </a:lnT>
+                    <a:lnB w="9525" cap="flat" cmpd="sng" algn="ctr">
+                      <a:solidFill>
+                        <a:srgbClr val="D5DCE5"/>
+                      </a:solidFill>
+                      <a:prstDash val="solid"/>
+                      <a:round/>
+                      <a:headEnd type="none" w="med" len="med"/>
+                      <a:tailEnd type="none" w="med" len="med"/>
+                    </a:lnB>
+                    <a:solidFill>
+                      <a:srgbClr val="FFFFFF"/>
+                    </a:solidFill>
+                  </a:tcPr>
+                </a:tc>
+                <a:tc>
+                  <a:txBody>
+                    <a:bodyPr/>
+                    <a:lstStyle/>
+                    <a:p>
+                      <a:pPr algn="ctr" indent="0" marL="0">
+                        <a:buNone/>
+                      </a:pPr>
+                      <a:r>
+                        <a:rPr lang="en-US" sz="1000" dirty="0">
+                          <a:solidFill>
+                            <a:srgbClr val="1A1A1A"/>
+                          </a:solidFill>
+                          <a:latin typeface="Times New Roman" pitchFamily="34" charset="0"/>
+                          <a:ea typeface="Times New Roman" pitchFamily="34" charset="-122"/>
+                          <a:cs typeface="Times New Roman" pitchFamily="34" charset="-120"/>
+                        </a:rPr>
+                        <a:t>0.427</a:t>
+                      </a:r>
+                      <a:endParaRPr lang="en-US" sz="1000" dirty="0">
+                        <a:latin typeface="Times New Roman" charset="0"/>
+                        <a:ea typeface="Times New Roman" charset="0"/>
+                        <a:cs typeface="Times New Roman" charset="0"/>
+                      </a:endParaRPr>
+                    </a:p>
+                  </a:txBody>
+                  <a:tcPr marL="91440" marR="91440" marT="45720" marB="45720" anchor="ctr">
+                    <a:lnL w="9525" cap="flat" cmpd="sng" algn="ctr">
+                      <a:solidFill>
+                        <a:srgbClr val="D5DCE5"/>
+                      </a:solidFill>
+                      <a:prstDash val="solid"/>
+                      <a:round/>
+                      <a:headEnd type="none" w="med" len="med"/>
+                      <a:tailEnd type="none" w="med" len="med"/>
+                    </a:lnL>
+                    <a:lnR w="9525" cap="flat" cmpd="sng" algn="ctr">
+                      <a:solidFill>
+                        <a:srgbClr val="D5DCE5"/>
+                      </a:solidFill>
+                      <a:prstDash val="solid"/>
+                      <a:round/>
+                      <a:headEnd type="none" w="med" len="med"/>
+                      <a:tailEnd type="none" w="med" len="med"/>
+                    </a:lnR>
+                    <a:lnT w="9525" cap="flat" cmpd="sng" algn="ctr">
+                      <a:solidFill>
+                        <a:srgbClr val="D5DCE5"/>
+                      </a:solidFill>
+                      <a:prstDash val="solid"/>
+                      <a:round/>
+                      <a:headEnd type="none" w="med" len="med"/>
+                      <a:tailEnd type="none" w="med" len="med"/>
+                    </a:lnT>
+                    <a:lnB w="9525" cap="flat" cmpd="sng" algn="ctr">
+                      <a:solidFill>
+                        <a:srgbClr val="D5DCE5"/>
+                      </a:solidFill>
+                      <a:prstDash val="solid"/>
+                      <a:round/>
+                      <a:headEnd type="none" w="med" len="med"/>
+                      <a:tailEnd type="none" w="med" len="med"/>
+                    </a:lnB>
+                    <a:solidFill>
+                      <a:srgbClr val="FFFFFF"/>
+                    </a:solidFill>
+                  </a:tcPr>
+                </a:tc>
+                <a:tc>
+                  <a:txBody>
+                    <a:bodyPr/>
+                    <a:lstStyle/>
+                    <a:p>
+                      <a:pPr algn="ctr" indent="0" marL="0">
+                        <a:buNone/>
+                      </a:pPr>
+                      <a:r>
+                        <a:rPr lang="en-US" sz="1000" dirty="0">
+                          <a:solidFill>
+                            <a:srgbClr val="1A1A1A"/>
+                          </a:solidFill>
+                          <a:latin typeface="Times New Roman" pitchFamily="34" charset="0"/>
+                          <a:ea typeface="Times New Roman" pitchFamily="34" charset="-122"/>
+                          <a:cs typeface="Times New Roman" pitchFamily="34" charset="-120"/>
+                        </a:rPr>
+                        <a:t>0.287</a:t>
+                      </a:r>
+                      <a:endParaRPr lang="en-US" sz="1000" dirty="0">
+                        <a:latin typeface="Times New Roman" charset="0"/>
+                        <a:ea typeface="Times New Roman" charset="0"/>
+                        <a:cs typeface="Times New Roman" charset="0"/>
+                      </a:endParaRPr>
+                    </a:p>
+                  </a:txBody>
+                  <a:tcPr marL="91440" marR="91440" marT="45720" marB="45720" anchor="ctr">
+                    <a:lnL w="9525" cap="flat" cmpd="sng" algn="ctr">
+                      <a:solidFill>
+                        <a:srgbClr val="D5DCE5"/>
+                      </a:solidFill>
+                      <a:prstDash val="solid"/>
+                      <a:round/>
+                      <a:headEnd type="none" w="med" len="med"/>
+                      <a:tailEnd type="none" w="med" len="med"/>
+                    </a:lnL>
+                    <a:lnR w="9525" cap="flat" cmpd="sng" algn="ctr">
+                      <a:solidFill>
+                        <a:srgbClr val="D5DCE5"/>
+                      </a:solidFill>
+                      <a:prstDash val="solid"/>
+                      <a:round/>
+                      <a:headEnd type="none" w="med" len="med"/>
+                      <a:tailEnd type="none" w="med" len="med"/>
+                    </a:lnR>
+                    <a:lnT w="9525" cap="flat" cmpd="sng" algn="ctr">
+                      <a:solidFill>
+                        <a:srgbClr val="D5DCE5"/>
+                      </a:solidFill>
+                      <a:prstDash val="solid"/>
+                      <a:round/>
+                      <a:headEnd type="none" w="med" len="med"/>
+                      <a:tailEnd type="none" w="med" len="med"/>
+                    </a:lnT>
+                    <a:lnB w="9525" cap="flat" cmpd="sng" algn="ctr">
+                      <a:solidFill>
+                        <a:srgbClr val="D5DCE5"/>
+                      </a:solidFill>
+                      <a:prstDash val="solid"/>
+                      <a:round/>
+                      <a:headEnd type="none" w="med" len="med"/>
+                      <a:tailEnd type="none" w="med" len="med"/>
+                    </a:lnB>
+                    <a:solidFill>
+                      <a:srgbClr val="FFFFFF"/>
+                    </a:solidFill>
+                  </a:tcPr>
+                </a:tc>
+                <a:tc>
+                  <a:txBody>
+                    <a:bodyPr/>
+                    <a:lstStyle/>
+                    <a:p>
+                      <a:pPr algn="ctr" indent="0" marL="0">
+                        <a:buNone/>
+                      </a:pPr>
+                      <a:r>
+                        <a:rPr lang="en-US" sz="1000" dirty="0">
+                          <a:solidFill>
+                            <a:srgbClr val="1A1A1A"/>
+                          </a:solidFill>
+                          <a:latin typeface="Times New Roman" pitchFamily="34" charset="0"/>
+                          <a:ea typeface="Times New Roman" pitchFamily="34" charset="-122"/>
+                          <a:cs typeface="Times New Roman" pitchFamily="34" charset="-120"/>
+                        </a:rPr>
+                        <a:t>0.550</a:t>
+                      </a:r>
+                      <a:endParaRPr lang="en-US" sz="1000" dirty="0">
+                        <a:latin typeface="Times New Roman" charset="0"/>
+                        <a:ea typeface="Times New Roman" charset="0"/>
+                        <a:cs typeface="Times New Roman" charset="0"/>
+                      </a:endParaRPr>
+                    </a:p>
+                  </a:txBody>
+                  <a:tcPr marL="91440" marR="91440" marT="45720" marB="45720" anchor="ctr">
+                    <a:lnL w="9525" cap="flat" cmpd="sng" algn="ctr">
+                      <a:solidFill>
+                        <a:srgbClr val="D5DCE5"/>
+                      </a:solidFill>
+                      <a:prstDash val="solid"/>
+                      <a:round/>
+                      <a:headEnd type="none" w="med" len="med"/>
+                      <a:tailEnd type="none" w="med" len="med"/>
+                    </a:lnL>
+                    <a:lnR w="9525" cap="flat" cmpd="sng" algn="ctr">
+                      <a:solidFill>
+                        <a:srgbClr val="D5DCE5"/>
+                      </a:solidFill>
+                      <a:prstDash val="solid"/>
+                      <a:round/>
+                      <a:headEnd type="none" w="med" len="med"/>
+                      <a:tailEnd type="none" w="med" len="med"/>
+                    </a:lnR>
+                    <a:lnT w="9525" cap="flat" cmpd="sng" algn="ctr">
+                      <a:solidFill>
+                        <a:srgbClr val="D5DCE5"/>
+                      </a:solidFill>
+                      <a:prstDash val="solid"/>
+                      <a:round/>
+                      <a:headEnd type="none" w="med" len="med"/>
+                      <a:tailEnd type="none" w="med" len="med"/>
+                    </a:lnT>
+                    <a:lnB w="9525" cap="flat" cmpd="sng" algn="ctr">
+                      <a:solidFill>
+                        <a:srgbClr val="D5DCE5"/>
+                      </a:solidFill>
+                      <a:prstDash val="solid"/>
+                      <a:round/>
+                      <a:headEnd type="none" w="med" len="med"/>
+                      <a:tailEnd type="none" w="med" len="med"/>
+                    </a:lnB>
+                    <a:solidFill>
+                      <a:srgbClr val="FFFFFF"/>
+                    </a:solidFill>
+                  </a:tcPr>
+                </a:tc>
+              </a:tr>
+              <a:tr h="384048">
+                <a:tc>
+                  <a:txBody>
+                    <a:bodyPr/>
+                    <a:lstStyle/>
+                    <a:p>
+                      <a:pPr algn="ctr" indent="0" marL="0">
+                        <a:buNone/>
+                      </a:pPr>
+                      <a:r>
+                        <a:rPr lang="en-US" sz="1000" b="1" dirty="0">
+                          <a:solidFill>
+                            <a:srgbClr val="152238"/>
+                          </a:solidFill>
+                          <a:latin typeface="Times New Roman" pitchFamily="34" charset="0"/>
+                          <a:ea typeface="Times New Roman" pitchFamily="34" charset="-122"/>
+                          <a:cs typeface="Times New Roman" pitchFamily="34" charset="-120"/>
+                        </a:rPr>
+                        <a:t>Cw</a:t>
+                      </a:r>
+                      <a:endParaRPr lang="en-US" sz="1000" dirty="0">
+                        <a:latin typeface="Times New Roman" charset="0"/>
+                        <a:ea typeface="Times New Roman" charset="0"/>
+                        <a:cs typeface="Times New Roman" charset="0"/>
+                      </a:endParaRPr>
+                    </a:p>
+                  </a:txBody>
+                  <a:tcPr marL="91440" marR="91440" marT="45720" marB="45720" anchor="ctr">
+                    <a:lnL w="9525" cap="flat" cmpd="sng" algn="ctr">
+                      <a:solidFill>
+                        <a:srgbClr val="D5DCE5"/>
+                      </a:solidFill>
+                      <a:prstDash val="solid"/>
+                      <a:round/>
+                      <a:headEnd type="none" w="med" len="med"/>
+                      <a:tailEnd type="none" w="med" len="med"/>
+                    </a:lnL>
+                    <a:lnR w="9525" cap="flat" cmpd="sng" algn="ctr">
+                      <a:solidFill>
+                        <a:srgbClr val="D5DCE5"/>
+                      </a:solidFill>
+                      <a:prstDash val="solid"/>
+                      <a:round/>
+                      <a:headEnd type="none" w="med" len="med"/>
+                      <a:tailEnd type="none" w="med" len="med"/>
+                    </a:lnR>
+                    <a:lnT w="9525" cap="flat" cmpd="sng" algn="ctr">
+                      <a:solidFill>
+                        <a:srgbClr val="D5DCE5"/>
+                      </a:solidFill>
+                      <a:prstDash val="solid"/>
+                      <a:round/>
+                      <a:headEnd type="none" w="med" len="med"/>
+                      <a:tailEnd type="none" w="med" len="med"/>
+                    </a:lnT>
+                    <a:lnB w="9525" cap="flat" cmpd="sng" algn="ctr">
+                      <a:solidFill>
+                        <a:srgbClr val="D5DCE5"/>
+                      </a:solidFill>
+                      <a:prstDash val="solid"/>
+                      <a:round/>
+                      <a:headEnd type="none" w="med" len="med"/>
+                      <a:tailEnd type="none" w="med" len="med"/>
+                    </a:lnB>
+                    <a:solidFill>
+                      <a:srgbClr val="FFFFFF"/>
+                    </a:solidFill>
+                  </a:tcPr>
+                </a:tc>
+                <a:tc>
+                  <a:txBody>
+                    <a:bodyPr/>
+                    <a:lstStyle/>
+                    <a:p>
+                      <a:pPr algn="ctr" indent="0" marL="0">
+                        <a:buNone/>
+                      </a:pPr>
+                      <a:r>
+                        <a:rPr lang="en-US" sz="1000" dirty="0">
+                          <a:solidFill>
+                            <a:srgbClr val="1A1A1A"/>
+                          </a:solidFill>
+                          <a:latin typeface="Times New Roman" pitchFamily="34" charset="0"/>
+                          <a:ea typeface="Times New Roman" pitchFamily="34" charset="-122"/>
+                          <a:cs typeface="Times New Roman" pitchFamily="34" charset="-120"/>
+                        </a:rPr>
+                        <a:t>0.430</a:t>
+                      </a:r>
+                      <a:endParaRPr lang="en-US" sz="1000" dirty="0">
+                        <a:latin typeface="Times New Roman" charset="0"/>
+                        <a:ea typeface="Times New Roman" charset="0"/>
+                        <a:cs typeface="Times New Roman" charset="0"/>
+                      </a:endParaRPr>
+                    </a:p>
+                  </a:txBody>
+                  <a:tcPr marL="91440" marR="91440" marT="45720" marB="45720" anchor="ctr">
+                    <a:lnL w="9525" cap="flat" cmpd="sng" algn="ctr">
+                      <a:solidFill>
+                        <a:srgbClr val="D5DCE5"/>
+                      </a:solidFill>
+                      <a:prstDash val="solid"/>
+                      <a:round/>
+                      <a:headEnd type="none" w="med" len="med"/>
+                      <a:tailEnd type="none" w="med" len="med"/>
+                    </a:lnL>
+                    <a:lnR w="9525" cap="flat" cmpd="sng" algn="ctr">
+                      <a:solidFill>
+                        <a:srgbClr val="D5DCE5"/>
+                      </a:solidFill>
+                      <a:prstDash val="solid"/>
+                      <a:round/>
+                      <a:headEnd type="none" w="med" len="med"/>
+                      <a:tailEnd type="none" w="med" len="med"/>
+                    </a:lnR>
+                    <a:lnT w="9525" cap="flat" cmpd="sng" algn="ctr">
+                      <a:solidFill>
+                        <a:srgbClr val="D5DCE5"/>
+                      </a:solidFill>
+                      <a:prstDash val="solid"/>
+                      <a:round/>
+                      <a:headEnd type="none" w="med" len="med"/>
+                      <a:tailEnd type="none" w="med" len="med"/>
+                    </a:lnT>
+                    <a:lnB w="9525" cap="flat" cmpd="sng" algn="ctr">
+                      <a:solidFill>
+                        <a:srgbClr val="D5DCE5"/>
+                      </a:solidFill>
+                      <a:prstDash val="solid"/>
+                      <a:round/>
+                      <a:headEnd type="none" w="med" len="med"/>
+                      <a:tailEnd type="none" w="med" len="med"/>
+                    </a:lnB>
+                    <a:solidFill>
+                      <a:srgbClr val="FFFFFF"/>
+                    </a:solidFill>
+                  </a:tcPr>
+                </a:tc>
+                <a:tc>
+                  <a:txBody>
+                    <a:bodyPr/>
+                    <a:lstStyle/>
+                    <a:p>
+                      <a:pPr algn="ctr" indent="0" marL="0">
+                        <a:buNone/>
+                      </a:pPr>
+                      <a:r>
+                        <a:rPr lang="en-US" sz="1000" dirty="0">
+                          <a:solidFill>
+                            <a:srgbClr val="1A1A1A"/>
+                          </a:solidFill>
+                          <a:latin typeface="Times New Roman" pitchFamily="34" charset="0"/>
+                          <a:ea typeface="Times New Roman" pitchFamily="34" charset="-122"/>
+                          <a:cs typeface="Times New Roman" pitchFamily="34" charset="-120"/>
+                        </a:rPr>
+                        <a:t>0.388</a:t>
+                      </a:r>
+                      <a:endParaRPr lang="en-US" sz="1000" dirty="0">
+                        <a:latin typeface="Times New Roman" charset="0"/>
+                        <a:ea typeface="Times New Roman" charset="0"/>
+                        <a:cs typeface="Times New Roman" charset="0"/>
+                      </a:endParaRPr>
+                    </a:p>
+                  </a:txBody>
+                  <a:tcPr marL="91440" marR="91440" marT="45720" marB="45720" anchor="ctr">
+                    <a:lnL w="9525" cap="flat" cmpd="sng" algn="ctr">
+                      <a:solidFill>
+                        <a:srgbClr val="D5DCE5"/>
+                      </a:solidFill>
+                      <a:prstDash val="solid"/>
+                      <a:round/>
+                      <a:headEnd type="none" w="med" len="med"/>
+                      <a:tailEnd type="none" w="med" len="med"/>
+                    </a:lnL>
+                    <a:lnR w="9525" cap="flat" cmpd="sng" algn="ctr">
+                      <a:solidFill>
+                        <a:srgbClr val="D5DCE5"/>
+                      </a:solidFill>
+                      <a:prstDash val="solid"/>
+                      <a:round/>
+                      <a:headEnd type="none" w="med" len="med"/>
+                      <a:tailEnd type="none" w="med" len="med"/>
+                    </a:lnR>
+                    <a:lnT w="9525" cap="flat" cmpd="sng" algn="ctr">
+                      <a:solidFill>
+                        <a:srgbClr val="D5DCE5"/>
+                      </a:solidFill>
+                      <a:prstDash val="solid"/>
+                      <a:round/>
+                      <a:headEnd type="none" w="med" len="med"/>
+                      <a:tailEnd type="none" w="med" len="med"/>
+                    </a:lnT>
+                    <a:lnB w="9525" cap="flat" cmpd="sng" algn="ctr">
+                      <a:solidFill>
+                        <a:srgbClr val="D5DCE5"/>
+                      </a:solidFill>
+                      <a:prstDash val="solid"/>
+                      <a:round/>
+                      <a:headEnd type="none" w="med" len="med"/>
+                      <a:tailEnd type="none" w="med" len="med"/>
+                    </a:lnB>
+                    <a:solidFill>
+                      <a:srgbClr val="FFFFFF"/>
+                    </a:solidFill>
+                  </a:tcPr>
+                </a:tc>
+                <a:tc>
+                  <a:txBody>
+                    <a:bodyPr/>
+                    <a:lstStyle/>
+                    <a:p>
+                      <a:pPr algn="ctr" indent="0" marL="0">
+                        <a:buNone/>
+                      </a:pPr>
+                      <a:r>
+                        <a:rPr lang="en-US" sz="1000" dirty="0">
+                          <a:solidFill>
+                            <a:srgbClr val="1A1A1A"/>
+                          </a:solidFill>
+                          <a:latin typeface="Times New Roman" pitchFamily="34" charset="0"/>
+                          <a:ea typeface="Times New Roman" pitchFamily="34" charset="-122"/>
+                          <a:cs typeface="Times New Roman" pitchFamily="34" charset="-120"/>
+                        </a:rPr>
+                        <a:t>0.567</a:t>
+                      </a:r>
+                      <a:endParaRPr lang="en-US" sz="1000" dirty="0">
+                        <a:latin typeface="Times New Roman" charset="0"/>
+                        <a:ea typeface="Times New Roman" charset="0"/>
+                        <a:cs typeface="Times New Roman" charset="0"/>
+                      </a:endParaRPr>
+                    </a:p>
+                  </a:txBody>
+                  <a:tcPr marL="91440" marR="91440" marT="45720" marB="45720" anchor="ctr">
+                    <a:lnL w="9525" cap="flat" cmpd="sng" algn="ctr">
+                      <a:solidFill>
+                        <a:srgbClr val="D5DCE5"/>
+                      </a:solidFill>
+                      <a:prstDash val="solid"/>
+                      <a:round/>
+                      <a:headEnd type="none" w="med" len="med"/>
+                      <a:tailEnd type="none" w="med" len="med"/>
+                    </a:lnL>
+                    <a:lnR w="9525" cap="flat" cmpd="sng" algn="ctr">
+                      <a:solidFill>
+                        <a:srgbClr val="D5DCE5"/>
+                      </a:solidFill>
+                      <a:prstDash val="solid"/>
+                      <a:round/>
+                      <a:headEnd type="none" w="med" len="med"/>
+                      <a:tailEnd type="none" w="med" len="med"/>
+                    </a:lnR>
+                    <a:lnT w="9525" cap="flat" cmpd="sng" algn="ctr">
+                      <a:solidFill>
+                        <a:srgbClr val="D5DCE5"/>
+                      </a:solidFill>
+                      <a:prstDash val="solid"/>
+                      <a:round/>
+                      <a:headEnd type="none" w="med" len="med"/>
+                      <a:tailEnd type="none" w="med" len="med"/>
+                    </a:lnT>
+                    <a:lnB w="9525" cap="flat" cmpd="sng" algn="ctr">
+                      <a:solidFill>
+                        <a:srgbClr val="D5DCE5"/>
+                      </a:solidFill>
+                      <a:prstDash val="solid"/>
+                      <a:round/>
+                      <a:headEnd type="none" w="med" len="med"/>
+                      <a:tailEnd type="none" w="med" len="med"/>
+                    </a:lnB>
+                    <a:solidFill>
+                      <a:srgbClr val="FFFFFF"/>
+                    </a:solidFill>
+                  </a:tcPr>
+                </a:tc>
+              </a:tr>
+              <a:tr h="384048">
+                <a:tc>
+                  <a:txBody>
+                    <a:bodyPr/>
+                    <a:lstStyle/>
+                    <a:p>
+                      <a:pPr algn="ctr" indent="0" marL="0">
+                        <a:buNone/>
+                      </a:pPr>
+                      <a:r>
+                        <a:rPr lang="en-US" sz="1000" b="1" dirty="0">
+                          <a:solidFill>
+                            <a:srgbClr val="152238"/>
+                          </a:solidFill>
+                          <a:latin typeface="Times New Roman" pitchFamily="34" charset="0"/>
+                          <a:ea typeface="Times New Roman" pitchFamily="34" charset="-122"/>
+                          <a:cs typeface="Times New Roman" pitchFamily="34" charset="-120"/>
+                        </a:rPr>
+                        <a:t>Cw1</a:t>
+                      </a:r>
+                      <a:endParaRPr lang="en-US" sz="1000" dirty="0">
+                        <a:latin typeface="Times New Roman" charset="0"/>
+                        <a:ea typeface="Times New Roman" charset="0"/>
+                        <a:cs typeface="Times New Roman" charset="0"/>
+                      </a:endParaRPr>
+                    </a:p>
+                  </a:txBody>
+                  <a:tcPr marL="91440" marR="91440" marT="45720" marB="45720" anchor="ctr">
+                    <a:lnL w="9525" cap="flat" cmpd="sng" algn="ctr">
+                      <a:solidFill>
+                        <a:srgbClr val="D5DCE5"/>
+                      </a:solidFill>
+                      <a:prstDash val="solid"/>
+                      <a:round/>
+                      <a:headEnd type="none" w="med" len="med"/>
+                      <a:tailEnd type="none" w="med" len="med"/>
+                    </a:lnL>
+                    <a:lnR w="9525" cap="flat" cmpd="sng" algn="ctr">
+                      <a:solidFill>
+                        <a:srgbClr val="D5DCE5"/>
+                      </a:solidFill>
+                      <a:prstDash val="solid"/>
+                      <a:round/>
+                      <a:headEnd type="none" w="med" len="med"/>
+                      <a:tailEnd type="none" w="med" len="med"/>
+                    </a:lnR>
+                    <a:lnT w="9525" cap="flat" cmpd="sng" algn="ctr">
+                      <a:solidFill>
+                        <a:srgbClr val="D5DCE5"/>
+                      </a:solidFill>
+                      <a:prstDash val="solid"/>
+                      <a:round/>
+                      <a:headEnd type="none" w="med" len="med"/>
+                      <a:tailEnd type="none" w="med" len="med"/>
+                    </a:lnT>
+                    <a:lnB w="9525" cap="flat" cmpd="sng" algn="ctr">
+                      <a:solidFill>
+                        <a:srgbClr val="D5DCE5"/>
+                      </a:solidFill>
+                      <a:prstDash val="solid"/>
+                      <a:round/>
+                      <a:headEnd type="none" w="med" len="med"/>
+                      <a:tailEnd type="none" w="med" len="med"/>
+                    </a:lnB>
+                    <a:solidFill>
+                      <a:srgbClr val="FFFFFF"/>
+                    </a:solidFill>
+                  </a:tcPr>
+                </a:tc>
+                <a:tc>
+                  <a:txBody>
+                    <a:bodyPr/>
+                    <a:lstStyle/>
+                    <a:p>
+                      <a:pPr algn="ctr" indent="0" marL="0">
+                        <a:buNone/>
+                      </a:pPr>
+                      <a:r>
+                        <a:rPr lang="en-US" sz="1000" dirty="0">
+                          <a:solidFill>
+                            <a:srgbClr val="1A1A1A"/>
+                          </a:solidFill>
+                          <a:latin typeface="Times New Roman" pitchFamily="34" charset="0"/>
+                          <a:ea typeface="Times New Roman" pitchFamily="34" charset="-122"/>
+                          <a:cs typeface="Times New Roman" pitchFamily="34" charset="-120"/>
+                        </a:rPr>
+                        <a:t>0.542</a:t>
+                      </a:r>
+                      <a:endParaRPr lang="en-US" sz="1000" dirty="0">
+                        <a:latin typeface="Times New Roman" charset="0"/>
+                        <a:ea typeface="Times New Roman" charset="0"/>
+                        <a:cs typeface="Times New Roman" charset="0"/>
+                      </a:endParaRPr>
+                    </a:p>
+                  </a:txBody>
+                  <a:tcPr marL="91440" marR="91440" marT="45720" marB="45720" anchor="ctr">
+                    <a:lnL w="9525" cap="flat" cmpd="sng" algn="ctr">
+                      <a:solidFill>
+                        <a:srgbClr val="D5DCE5"/>
+                      </a:solidFill>
+                      <a:prstDash val="solid"/>
+                      <a:round/>
+                      <a:headEnd type="none" w="med" len="med"/>
+                      <a:tailEnd type="none" w="med" len="med"/>
+                    </a:lnL>
+                    <a:lnR w="9525" cap="flat" cmpd="sng" algn="ctr">
+                      <a:solidFill>
+                        <a:srgbClr val="D5DCE5"/>
+                      </a:solidFill>
+                      <a:prstDash val="solid"/>
+                      <a:round/>
+                      <a:headEnd type="none" w="med" len="med"/>
+                      <a:tailEnd type="none" w="med" len="med"/>
+                    </a:lnR>
+                    <a:lnT w="9525" cap="flat" cmpd="sng" algn="ctr">
+                      <a:solidFill>
+                        <a:srgbClr val="D5DCE5"/>
+                      </a:solidFill>
+                      <a:prstDash val="solid"/>
+                      <a:round/>
+                      <a:headEnd type="none" w="med" len="med"/>
+                      <a:tailEnd type="none" w="med" len="med"/>
+                    </a:lnT>
+                    <a:lnB w="9525" cap="flat" cmpd="sng" algn="ctr">
+                      <a:solidFill>
+                        <a:srgbClr val="D5DCE5"/>
+                      </a:solidFill>
+                      <a:prstDash val="solid"/>
+                      <a:round/>
+                      <a:headEnd type="none" w="med" len="med"/>
+                      <a:tailEnd type="none" w="med" len="med"/>
+                    </a:lnB>
+                    <a:solidFill>
+                      <a:srgbClr val="FFFFFF"/>
+                    </a:solidFill>
+                  </a:tcPr>
+                </a:tc>
+                <a:tc>
+                  <a:txBody>
+                    <a:bodyPr/>
+                    <a:lstStyle/>
+                    <a:p>
+                      <a:pPr algn="ctr" indent="0" marL="0">
+                        <a:buNone/>
+                      </a:pPr>
+                      <a:r>
+                        <a:rPr lang="en-US" sz="1000" dirty="0">
+                          <a:solidFill>
+                            <a:srgbClr val="1A1A1A"/>
+                          </a:solidFill>
+                          <a:latin typeface="Times New Roman" pitchFamily="34" charset="0"/>
+                          <a:ea typeface="Times New Roman" pitchFamily="34" charset="-122"/>
+                          <a:cs typeface="Times New Roman" pitchFamily="34" charset="-120"/>
+                        </a:rPr>
+                        <a:t>0.487</a:t>
+                      </a:r>
+                      <a:endParaRPr lang="en-US" sz="1000" dirty="0">
+                        <a:latin typeface="Times New Roman" charset="0"/>
+                        <a:ea typeface="Times New Roman" charset="0"/>
+                        <a:cs typeface="Times New Roman" charset="0"/>
+                      </a:endParaRPr>
+                    </a:p>
+                  </a:txBody>
+                  <a:tcPr marL="91440" marR="91440" marT="45720" marB="45720" anchor="ctr">
+                    <a:lnL w="9525" cap="flat" cmpd="sng" algn="ctr">
+                      <a:solidFill>
+                        <a:srgbClr val="D5DCE5"/>
+                      </a:solidFill>
+                      <a:prstDash val="solid"/>
+                      <a:round/>
+                      <a:headEnd type="none" w="med" len="med"/>
+                      <a:tailEnd type="none" w="med" len="med"/>
+                    </a:lnL>
+                    <a:lnR w="9525" cap="flat" cmpd="sng" algn="ctr">
+                      <a:solidFill>
+                        <a:srgbClr val="D5DCE5"/>
+                      </a:solidFill>
+                      <a:prstDash val="solid"/>
+                      <a:round/>
+                      <a:headEnd type="none" w="med" len="med"/>
+                      <a:tailEnd type="none" w="med" len="med"/>
+                    </a:lnR>
+                    <a:lnT w="9525" cap="flat" cmpd="sng" algn="ctr">
+                      <a:solidFill>
+                        <a:srgbClr val="D5DCE5"/>
+                      </a:solidFill>
+                      <a:prstDash val="solid"/>
+                      <a:round/>
+                      <a:headEnd type="none" w="med" len="med"/>
+                      <a:tailEnd type="none" w="med" len="med"/>
+                    </a:lnT>
+                    <a:lnB w="9525" cap="flat" cmpd="sng" algn="ctr">
+                      <a:solidFill>
+                        <a:srgbClr val="D5DCE5"/>
+                      </a:solidFill>
+                      <a:prstDash val="solid"/>
+                      <a:round/>
+                      <a:headEnd type="none" w="med" len="med"/>
+                      <a:tailEnd type="none" w="med" len="med"/>
+                    </a:lnB>
+                    <a:solidFill>
+                      <a:srgbClr val="FFFFFF"/>
+                    </a:solidFill>
+                  </a:tcPr>
+                </a:tc>
+                <a:tc>
+                  <a:txBody>
+                    <a:bodyPr/>
+                    <a:lstStyle/>
+                    <a:p>
+                      <a:pPr algn="ctr" indent="0" marL="0">
+                        <a:buNone/>
+                      </a:pPr>
+                      <a:r>
+                        <a:rPr lang="en-US" sz="1000" dirty="0">
+                          <a:solidFill>
+                            <a:srgbClr val="1A1A1A"/>
+                          </a:solidFill>
+                          <a:latin typeface="Times New Roman" pitchFamily="34" charset="0"/>
+                          <a:ea typeface="Times New Roman" pitchFamily="34" charset="-122"/>
+                          <a:cs typeface="Times New Roman" pitchFamily="34" charset="-120"/>
+                        </a:rPr>
+                        <a:t>0.610</a:t>
+                      </a:r>
+                      <a:endParaRPr lang="en-US" sz="1000" dirty="0">
+                        <a:latin typeface="Times New Roman" charset="0"/>
+                        <a:ea typeface="Times New Roman" charset="0"/>
+                        <a:cs typeface="Times New Roman" charset="0"/>
+                      </a:endParaRPr>
+                    </a:p>
+                  </a:txBody>
+                  <a:tcPr marL="91440" marR="91440" marT="45720" marB="45720" anchor="ctr">
+                    <a:lnL w="9525" cap="flat" cmpd="sng" algn="ctr">
+                      <a:solidFill>
+                        <a:srgbClr val="D5DCE5"/>
+                      </a:solidFill>
+                      <a:prstDash val="solid"/>
+                      <a:round/>
+                      <a:headEnd type="none" w="med" len="med"/>
+                      <a:tailEnd type="none" w="med" len="med"/>
+                    </a:lnL>
+                    <a:lnR w="9525" cap="flat" cmpd="sng" algn="ctr">
+                      <a:solidFill>
+                        <a:srgbClr val="D5DCE5"/>
+                      </a:solidFill>
+                      <a:prstDash val="solid"/>
+                      <a:round/>
+                      <a:headEnd type="none" w="med" len="med"/>
+                      <a:tailEnd type="none" w="med" len="med"/>
+                    </a:lnR>
+                    <a:lnT w="9525" cap="flat" cmpd="sng" algn="ctr">
+                      <a:solidFill>
+                        <a:srgbClr val="D5DCE5"/>
+                      </a:solidFill>
+                      <a:prstDash val="solid"/>
+                      <a:round/>
+                      <a:headEnd type="none" w="med" len="med"/>
+                      <a:tailEnd type="none" w="med" len="med"/>
+                    </a:lnT>
+                    <a:lnB w="9525" cap="flat" cmpd="sng" algn="ctr">
+                      <a:solidFill>
+                        <a:srgbClr val="D5DCE5"/>
+                      </a:solidFill>
+                      <a:prstDash val="solid"/>
+                      <a:round/>
+                      <a:headEnd type="none" w="med" len="med"/>
+                      <a:tailEnd type="none" w="med" len="med"/>
+                    </a:lnB>
+                    <a:solidFill>
+                      <a:srgbClr val="FFFFFF"/>
+                    </a:solidFill>
+                  </a:tcPr>
+                </a:tc>
+              </a:tr>
+            </a:tbl>
+          </a:graphicData>
+        </a:graphic>
+      </p:graphicFrame>
+      <p:sp>
+        <p:nvSpPr>
+          <p:cNvPr id="6" name="Text 2"/>
+          <p:cNvSpPr txBox="1"/>
+          <p:nvPr/>
+        </p:nvSpPr>
+        <p:spPr>
+          <a:xfrm>
+            <a:off x="7680960" y="4114800"/>
+            <a:ext cx="3959352" cy="731520"/>
+          </a:xfrm>
+          <a:prstGeom prst="rect">
+            <a:avLst/>
+          </a:prstGeom>
+          <a:noFill/>
+          <a:ln/>
+        </p:spPr>
+        <p:txBody>
+          <a:bodyPr wrap="square" lIns="0" tIns="0" rIns="0" bIns="0" rtlCol="0" anchor="t"/>
+          <a:lstStyle/>
           <a:p>
             <a:pPr indent="0" marL="0">
               <a:lnSpc>
-                <a:spcPct val="130000"/>
+                <a:spcPct val="125000"/>
               </a:lnSpc>
-              <a:spcAft>
-                <a:spcPts val="300"/>
-              </a:spcAft>
-              <a:buNone/>
-            </a:pPr>
-            <a:r>
-              <a:rPr lang="en-US" sz="1150" dirty="0">
-                <a:solidFill>
-                  <a:srgbClr val="9FB2C9"/>
+              <a:buNone/>
+            </a:pPr>
+            <a:r>
+              <a:rPr lang="en-US" sz="1050" dirty="0">
+                <a:solidFill>
+                  <a:srgbClr val="1A1A1A"/>
                 </a:solidFill>
                 <a:latin typeface="Microsoft YaHei" pitchFamily="34" charset="0"/>
                 <a:ea typeface="Microsoft YaHei" pitchFamily="34" charset="-122"/>
                 <a:cs typeface="Microsoft YaHei" pitchFamily="34" charset="-120"/>
               </a:rPr>
-              <a:t>把 FD002 与 FD004 合起来用（509 台，6 种工况），让下线时刻分布随工况变化，做依赖协变量的删失。</a:t>
-            </a:r>
-            <a:endParaRPr lang="en-US" sz="1150" dirty="0"/>
-          </a:p>
-          <a:p>
-            <a:pPr indent="0" marL="0">
-              <a:lnSpc>
-                <a:spcPct val="130000"/>
-              </a:lnSpc>
-              <a:spcAft>
-                <a:spcPts val="300"/>
-              </a:spcAft>
-              <a:buNone/>
-            </a:pPr>
-            <a:r>
-              <a:rPr lang="en-US" sz="1150" dirty="0">
-                <a:solidFill>
-                  <a:srgbClr val="9FB2C9"/>
+              <a:t>总体覆盖率六条线都在 0.98 到 0.99，名义 0.90。决策区没有一条到 0.90，连无删失参照 E 也只有 0.45。</a:t>
+            </a:r>
+            <a:endParaRPr lang="en-US" sz="1050" dirty="0"/>
+          </a:p>
+        </p:txBody>
+      </p:sp>
+      <p:sp>
+        <p:nvSpPr>
+          <p:cNvPr id="7" name="Shape 3"/>
+          <p:cNvSpPr/>
+          <p:nvPr/>
+        </p:nvSpPr>
+        <p:spPr>
+          <a:xfrm>
+            <a:off x="548640" y="5029200"/>
+            <a:ext cx="11091672" cy="1280160"/>
+          </a:xfrm>
+          <a:prstGeom prst="rect">
+            <a:avLst/>
+          </a:prstGeom>
+          <a:solidFill>
+            <a:srgbClr val="152238"/>
+          </a:solidFill>
+          <a:ln w="12700">
+            <a:solidFill>
+              <a:srgbClr val="152238"/>
+            </a:solidFill>
+            <a:prstDash val="solid"/>
+          </a:ln>
+        </p:spPr>
+      </p:sp>
+      <p:sp>
+        <p:nvSpPr>
+          <p:cNvPr id="8" name="Text 4"/>
+          <p:cNvSpPr txBox="1"/>
+          <p:nvPr/>
+        </p:nvSpPr>
+        <p:spPr>
+          <a:xfrm>
+            <a:off x="749808" y="5193792"/>
+            <a:ext cx="10689336" cy="310896"/>
+          </a:xfrm>
+          <a:prstGeom prst="rect">
+            <a:avLst/>
+          </a:prstGeom>
+          <a:noFill/>
+          <a:ln/>
+        </p:spPr>
+        <p:txBody>
+          <a:bodyPr wrap="square" lIns="0" tIns="0" rIns="0" bIns="0" rtlCol="0" anchor="t"/>
+          <a:lstStyle/>
+          <a:p>
+            <a:pPr indent="0" marL="0">
+              <a:buNone/>
+            </a:pPr>
+            <a:r>
+              <a:rPr lang="en-US" sz="1200" b="1" dirty="0">
+                <a:solidFill>
+                  <a:srgbClr val="F2C46D"/>
                 </a:solidFill>
                 <a:latin typeface="Microsoft YaHei" pitchFamily="34" charset="0"/>
                 <a:ea typeface="Microsoft YaHei" pitchFamily="34" charset="-122"/>
                 <a:cs typeface="Microsoft YaHei" pitchFamily="34" charset="-120"/>
               </a:rPr>
-              <a:t>把点预测换成分位数回归，做 CQR 版本的下界，看紧度提升多少。c0 怎么选：论文一的做法是在训练折里留一块试。</a:t>
-            </a:r>
-            <a:endParaRPr lang="en-US" sz="1150" dirty="0"/>
+              <a:t>这不是 bug，这是已知问题 1 的真数据形态</a:t>
+            </a:r>
+            <a:endParaRPr lang="en-US" sz="1200" dirty="0"/>
+          </a:p>
+        </p:txBody>
+      </p:sp>
+      <p:sp>
+        <p:nvSpPr>
+          <p:cNvPr id="9" name="Text 5"/>
+          <p:cNvSpPr txBox="1"/>
+          <p:nvPr/>
+        </p:nvSpPr>
+        <p:spPr>
+          <a:xfrm>
+            <a:off x="749808" y="5577840"/>
+            <a:ext cx="10689336" cy="594360"/>
+          </a:xfrm>
+          <a:prstGeom prst="rect">
+            <a:avLst/>
+          </a:prstGeom>
+          <a:noFill/>
+          <a:ln/>
+        </p:spPr>
+        <p:txBody>
+          <a:bodyPr wrap="square" lIns="0" tIns="0" rIns="0" bIns="0" rtlCol="0" anchor="t"/>
+          <a:lstStyle/>
+          <a:p>
+            <a:pPr indent="0" marL="0">
+              <a:lnSpc>
+                <a:spcPct val="125000"/>
+              </a:lnSpc>
+              <a:spcAft>
+                <a:spcPts val="500"/>
+              </a:spcAft>
+              <a:buNone/>
+            </a:pPr>
+            <a:r>
+              <a:rPr lang="en-US" sz="1100" dirty="0">
+                <a:solidFill>
+                  <a:srgbClr val="DCE7F2"/>
+                </a:solidFill>
+                <a:latin typeface="Microsoft YaHei" pitchFamily="34" charset="0"/>
+                <a:ea typeface="Microsoft YaHei" pitchFamily="34" charset="-122"/>
+                <a:cs typeface="Microsoft YaHei" pitchFamily="34" charset="-120"/>
+              </a:rPr>
+              <a:t>y = min(RUL, c0) 之后，13096 个测试点里 12789 个 y = 30，下界封顶后天然覆盖。90% 的保证全花在它们身上，决策区的 307 个点没有自己的保证。论文一 Theorem 5 说的条件覆盖不可能，论文二承认的分段问题，就长这样。下次课的 Mondrian 校准正是冲这个来的。</a:t>
+            </a:r>
+            <a:endParaRPr lang="en-US" sz="1100" dirty="0"/>
+          </a:p>
+        </p:txBody>
+      </p:sp>
+      <p:sp>
+        <p:nvSpPr>
+          <p:cNvPr id="10" name="Text 6"/>
+          <p:cNvSpPr txBox="1"/>
+          <p:nvPr/>
+        </p:nvSpPr>
+        <p:spPr>
+          <a:xfrm>
+            <a:off x="548640" y="6382512"/>
+            <a:ext cx="11091672" cy="274320"/>
+          </a:xfrm>
+          <a:prstGeom prst="rect">
+            <a:avLst/>
+          </a:prstGeom>
+          <a:noFill/>
+          <a:ln/>
+        </p:spPr>
+        <p:txBody>
+          <a:bodyPr wrap="square" lIns="0" tIns="0" rIns="0" bIns="0" rtlCol="0" anchor="ctr"/>
+          <a:lstStyle/>
+          <a:p>
+            <a:pPr indent="0" marL="0">
+              <a:buNone/>
+            </a:pPr>
+            <a:r>
+              <a:rPr lang="en-US" sz="900" dirty="0">
+                <a:solidFill>
+                  <a:srgbClr val="6E7A8A"/>
+                </a:solidFill>
+                <a:latin typeface="Microsoft YaHei" pitchFamily="34" charset="0"/>
+                <a:ea typeface="Microsoft YaHei" pitchFamily="34" charset="-122"/>
+                <a:cs typeface="Microsoft YaHei" pitchFamily="34" charset="-120"/>
+              </a:rPr>
+              <a:t>图为 Linux 预览版（替代字体 Liberation Serif 与文泉驿）。论文用图在 Windows 上重跑 s04 即为宋体五号与 Times New Roman 五号。删失为人工构造。</a:t>
+            </a:r>
+            <a:endParaRPr lang="en-US" sz="900" dirty="0"/>
+          </a:p>
+        </p:txBody>
+      </p:sp>
+      <p:sp>
+        <p:nvSpPr>
+          <p:cNvPr id="11" name="Text 7"/>
+          <p:cNvSpPr txBox="1"/>
+          <p:nvPr/>
+        </p:nvSpPr>
+        <p:spPr>
+          <a:xfrm>
+            <a:off x="11274552" y="6473952"/>
+            <a:ext cx="457200" cy="274320"/>
+          </a:xfrm>
+          <a:prstGeom prst="rect">
+            <a:avLst/>
+          </a:prstGeom>
+          <a:noFill/>
+          <a:ln/>
+        </p:spPr>
+        <p:txBody>
+          <a:bodyPr wrap="square" lIns="0" tIns="0" rIns="0" bIns="0" rtlCol="0" anchor="ctr"/>
+          <a:lstStyle/>
+          <a:p>
+            <a:pPr algn="r" indent="0" marL="0">
+              <a:buNone/>
+            </a:pPr>
+            <a:r>
+              <a:rPr lang="en-US" sz="1000" dirty="0">
+                <a:solidFill>
+                  <a:srgbClr val="9FB2C9"/>
+                </a:solidFill>
+                <a:latin typeface="Times New Roman" pitchFamily="34" charset="0"/>
+                <a:ea typeface="Times New Roman" pitchFamily="34" charset="-122"/>
+                <a:cs typeface="Times New Roman" pitchFamily="34" charset="-120"/>
+              </a:rPr>
+              <a:t>18</a:t>
+            </a:r>
+            <a:endParaRPr lang="en-US" sz="1000" dirty="0"/>
+          </a:p>
+        </p:txBody>
+      </p:sp>
+    </p:spTree>
+  </p:cSld>
+  <p:clrMapOvr>
+    <a:masterClrMapping/>
+  </p:clrMapOvr>
+</p:sld>
+</file>
+
+<file path=ppt/slides/slide19.xml><?xml version="1.0" encoding="utf-8"?>
+<p:sld xmlns:a="http://schemas.openxmlformats.org/drawingml/2006/main" xmlns:r="http://schemas.openxmlformats.org/officeDocument/2006/relationships" xmlns:p="http://schemas.openxmlformats.org/presentationml/2006/main">
+  <p:cSld name="Slide 19">
+    <p:spTree>
+      <p:nvGrpSpPr>
+        <p:cNvPr id="1" name=""/>
+        <p:cNvGrpSpPr/>
+        <p:nvPr/>
+      </p:nvGrpSpPr>
+      <p:grpSpPr>
+        <a:xfrm>
+          <a:off x="0" y="0"/>
+          <a:ext cx="0" cy="0"/>
+          <a:chOff x="0" y="0"/>
+          <a:chExt cx="0" cy="0"/>
+        </a:xfrm>
+      </p:grpSpPr>
+      <p:sp>
+        <p:nvSpPr>
+          <p:cNvPr id="2" name="Text 0"/>
+          <p:cNvSpPr txBox="1"/>
+          <p:nvPr/>
+        </p:nvSpPr>
+        <p:spPr>
+          <a:xfrm>
+            <a:off x="548640" y="347472"/>
+            <a:ext cx="11091672" cy="548640"/>
+          </a:xfrm>
+          <a:prstGeom prst="rect">
+            <a:avLst/>
+          </a:prstGeom>
+          <a:noFill/>
+          <a:ln/>
+        </p:spPr>
+        <p:txBody>
+          <a:bodyPr wrap="square" lIns="0" tIns="0" rIns="0" bIns="0" rtlCol="0" anchor="ctr"/>
+          <a:lstStyle/>
+          <a:p>
+            <a:pPr indent="0" marL="0">
+              <a:buNone/>
+            </a:pPr>
+            <a:r>
+              <a:rPr lang="en-US" sz="2600" b="1" dirty="0">
+                <a:solidFill>
+                  <a:srgbClr val="152238"/>
+                </a:solidFill>
+                <a:latin typeface="Microsoft YaHei" pitchFamily="34" charset="0"/>
+                <a:ea typeface="Microsoft YaHei" pitchFamily="34" charset="-122"/>
+                <a:cs typeface="Microsoft YaHei" pitchFamily="34" charset="-120"/>
+              </a:rPr>
+              <a:t>结果三：分段覆盖率，以及覆盖率与紧度的取舍</a:t>
+            </a:r>
+            <a:endParaRPr lang="en-US" sz="2600" dirty="0"/>
+          </a:p>
+        </p:txBody>
+      </p:sp>
+      <p:sp>
+        <p:nvSpPr>
+          <p:cNvPr id="3" name="Text 1"/>
+          <p:cNvSpPr txBox="1"/>
+          <p:nvPr/>
+        </p:nvSpPr>
+        <p:spPr>
+          <a:xfrm>
+            <a:off x="548640" y="896112"/>
+            <a:ext cx="11091672" cy="292608"/>
+          </a:xfrm>
+          <a:prstGeom prst="rect">
+            <a:avLst/>
+          </a:prstGeom>
+          <a:noFill/>
+          <a:ln/>
+        </p:spPr>
+        <p:txBody>
+          <a:bodyPr wrap="square" lIns="0" tIns="0" rIns="0" bIns="0" rtlCol="0" anchor="ctr"/>
+          <a:lstStyle/>
+          <a:p>
+            <a:pPr indent="0" marL="0">
+              <a:buNone/>
+            </a:pPr>
+            <a:r>
+              <a:rPr lang="en-US" sz="1200" dirty="0">
+                <a:solidFill>
+                  <a:srgbClr val="6E7A8A"/>
+                </a:solidFill>
+                <a:latin typeface="Microsoft YaHei" pitchFamily="34" charset="0"/>
+                <a:ea typeface="Microsoft YaHei" pitchFamily="34" charset="-122"/>
+                <a:cs typeface="Microsoft YaHei" pitchFamily="34" charset="-120"/>
+              </a:rPr>
+              <a:t>F08 与 F09，删失率 40%，c0 = 30</a:t>
+            </a:r>
+            <a:endParaRPr lang="en-US" sz="1200" dirty="0"/>
+          </a:p>
+        </p:txBody>
+      </p:sp>
+      <p:pic>
+        <p:nvPicPr>
+          <p:cNvPr id="4" name="Image 0" descr="/home/user/lxfs/RUL_censored_conformal_handover/03_code/figures/F08_stratified_coverage_by_method.png">    </p:cNvPr>
+          <p:cNvPicPr>
+            <a:picLocks noChangeAspect="1"/>
+          </p:cNvPicPr>
+          <p:nvPr/>
+        </p:nvPicPr>
+        <p:blipFill>
+          <a:blip r:embed="rId1"/>
+          <a:stretch>
+            <a:fillRect/>
+          </a:stretch>
+        </p:blipFill>
+        <p:spPr>
+          <a:xfrm>
+            <a:off x="548640" y="1371600"/>
+            <a:ext cx="6035040" cy="3017520"/>
+          </a:xfrm>
+          <a:prstGeom prst="rect">
+            <a:avLst/>
+          </a:prstGeom>
+        </p:spPr>
+      </p:pic>
+      <p:pic>
+        <p:nvPicPr>
+          <p:cNvPr id="5" name="Image 1" descr="/home/user/lxfs/RUL_censored_conformal_handover/03_code/figures/F09_coverage_vs_tightness.png">    </p:cNvPr>
+          <p:cNvPicPr>
+            <a:picLocks noChangeAspect="1"/>
+          </p:cNvPicPr>
+          <p:nvPr/>
+        </p:nvPicPr>
+        <p:blipFill>
+          <a:blip r:embed="rId2"/>
+          <a:stretch>
+            <a:fillRect/>
+          </a:stretch>
+        </p:blipFill>
+        <p:spPr>
+          <a:xfrm>
+            <a:off x="6858000" y="1371600"/>
+            <a:ext cx="4754880" cy="3566160"/>
+          </a:xfrm>
+          <a:prstGeom prst="rect">
+            <a:avLst/>
+          </a:prstGeom>
+        </p:spPr>
+      </p:pic>
+      <p:sp>
+        <p:nvSpPr>
+          <p:cNvPr id="6" name="Shape 2"/>
+          <p:cNvSpPr/>
+          <p:nvPr/>
+        </p:nvSpPr>
+        <p:spPr>
+          <a:xfrm>
+            <a:off x="548640" y="5029200"/>
+            <a:ext cx="5394960" cy="1280160"/>
+          </a:xfrm>
+          <a:prstGeom prst="rect">
+            <a:avLst/>
+          </a:prstGeom>
+          <a:solidFill>
+            <a:srgbClr val="F4F7FA"/>
+          </a:solidFill>
+          <a:ln w="12700">
+            <a:solidFill>
+              <a:srgbClr val="F4F7FA"/>
+            </a:solidFill>
+            <a:prstDash val="solid"/>
+          </a:ln>
+        </p:spPr>
+      </p:sp>
+      <p:sp>
+        <p:nvSpPr>
+          <p:cNvPr id="7" name="Text 3"/>
+          <p:cNvSpPr txBox="1"/>
+          <p:nvPr/>
+        </p:nvSpPr>
+        <p:spPr>
+          <a:xfrm>
+            <a:off x="749808" y="5193792"/>
+            <a:ext cx="4992624" cy="310896"/>
+          </a:xfrm>
+          <a:prstGeom prst="rect">
+            <a:avLst/>
+          </a:prstGeom>
+          <a:noFill/>
+          <a:ln/>
+        </p:spPr>
+        <p:txBody>
+          <a:bodyPr wrap="square" lIns="0" tIns="0" rIns="0" bIns="0" rtlCol="0" anchor="t"/>
+          <a:lstStyle/>
+          <a:p>
+            <a:pPr indent="0" marL="0">
+              <a:buNone/>
+            </a:pPr>
+            <a:r>
+              <a:rPr lang="en-US" sz="1200" b="1" dirty="0">
+                <a:solidFill>
+                  <a:srgbClr val="152238"/>
+                </a:solidFill>
+                <a:latin typeface="Microsoft YaHei" pitchFamily="34" charset="0"/>
+                <a:ea typeface="Microsoft YaHei" pitchFamily="34" charset="-122"/>
+                <a:cs typeface="Microsoft YaHei" pitchFamily="34" charset="-120"/>
+              </a:rPr>
+              <a:t>Cu 对 Cw：作业三的答案</a:t>
+            </a:r>
+            <a:endParaRPr lang="en-US" sz="1200" dirty="0"/>
+          </a:p>
+        </p:txBody>
+      </p:sp>
+      <p:sp>
+        <p:nvSpPr>
+          <p:cNvPr id="8" name="Text 4"/>
+          <p:cNvSpPr txBox="1"/>
+          <p:nvPr/>
+        </p:nvSpPr>
+        <p:spPr>
+          <a:xfrm>
+            <a:off x="749808" y="5577840"/>
+            <a:ext cx="4992624" cy="594360"/>
+          </a:xfrm>
+          <a:prstGeom prst="rect">
+            <a:avLst/>
+          </a:prstGeom>
+          <a:noFill/>
+          <a:ln/>
+        </p:spPr>
+        <p:txBody>
+          <a:bodyPr wrap="square" lIns="0" tIns="0" rIns="0" bIns="0" rtlCol="0" anchor="t"/>
+          <a:lstStyle/>
+          <a:p>
+            <a:pPr indent="0" marL="0">
+              <a:lnSpc>
+                <a:spcPct val="125000"/>
+              </a:lnSpc>
+              <a:spcAft>
+                <a:spcPts val="500"/>
+              </a:spcAft>
+              <a:buNone/>
+            </a:pPr>
+            <a:r>
+              <a:rPr lang="en-US" sz="1100" dirty="0">
+                <a:solidFill>
+                  <a:srgbClr val="1A1A1A"/>
+                </a:solidFill>
+                <a:latin typeface="Microsoft YaHei" pitchFamily="34" charset="0"/>
+                <a:ea typeface="Microsoft YaHei" pitchFamily="34" charset="-122"/>
+                <a:cs typeface="Microsoft YaHei" pitchFamily="34" charset="-120"/>
+              </a:rPr>
+              <a:t>40% 删失、c0 = 30：决策区覆盖率 0.287 到 0.388；c0 = 50：0.399 到 0.546。只差一个权重。20% 删失时两者几乎没差，因为权重最大才 1.6。</a:t>
+            </a:r>
+            <a:endParaRPr lang="en-US" sz="1100" dirty="0"/>
+          </a:p>
+        </p:txBody>
+      </p:sp>
+      <p:sp>
+        <p:nvSpPr>
+          <p:cNvPr id="9" name="Shape 5"/>
+          <p:cNvSpPr/>
+          <p:nvPr/>
+        </p:nvSpPr>
+        <p:spPr>
+          <a:xfrm>
+            <a:off x="6126480" y="5029200"/>
+            <a:ext cx="5513832" cy="1280160"/>
+          </a:xfrm>
+          <a:prstGeom prst="rect">
+            <a:avLst/>
+          </a:prstGeom>
+          <a:solidFill>
+            <a:srgbClr val="152238"/>
+          </a:solidFill>
+          <a:ln w="12700">
+            <a:solidFill>
+              <a:srgbClr val="152238"/>
+            </a:solidFill>
+            <a:prstDash val="solid"/>
+          </a:ln>
+        </p:spPr>
+      </p:sp>
+      <p:sp>
+        <p:nvSpPr>
+          <p:cNvPr id="10" name="Text 6"/>
+          <p:cNvSpPr txBox="1"/>
+          <p:nvPr/>
+        </p:nvSpPr>
+        <p:spPr>
+          <a:xfrm>
+            <a:off x="6327648" y="5193792"/>
+            <a:ext cx="5111496" cy="310896"/>
+          </a:xfrm>
+          <a:prstGeom prst="rect">
+            <a:avLst/>
+          </a:prstGeom>
+          <a:noFill/>
+          <a:ln/>
+        </p:spPr>
+        <p:txBody>
+          <a:bodyPr wrap="square" lIns="0" tIns="0" rIns="0" bIns="0" rtlCol="0" anchor="t"/>
+          <a:lstStyle/>
+          <a:p>
+            <a:pPr indent="0" marL="0">
+              <a:buNone/>
+            </a:pPr>
+            <a:r>
+              <a:rPr lang="en-US" sz="1200" b="1" dirty="0">
+                <a:solidFill>
+                  <a:srgbClr val="F2C46D"/>
+                </a:solidFill>
+                <a:latin typeface="Microsoft YaHei" pitchFamily="34" charset="0"/>
+                <a:ea typeface="Microsoft YaHei" pitchFamily="34" charset="-122"/>
+                <a:cs typeface="Microsoft YaHei" pitchFamily="34" charset="-120"/>
+              </a:rPr>
+              <a:t>B 看起来最好，其实最保守</a:t>
+            </a:r>
+            <a:endParaRPr lang="en-US" sz="1200" dirty="0"/>
+          </a:p>
+        </p:txBody>
+      </p:sp>
+      <p:sp>
+        <p:nvSpPr>
+          <p:cNvPr id="11" name="Text 7"/>
+          <p:cNvSpPr txBox="1"/>
+          <p:nvPr/>
+        </p:nvSpPr>
+        <p:spPr>
+          <a:xfrm>
+            <a:off x="6327648" y="5577840"/>
+            <a:ext cx="5111496" cy="594360"/>
+          </a:xfrm>
+          <a:prstGeom prst="rect">
+            <a:avLst/>
+          </a:prstGeom>
+          <a:noFill/>
+          <a:ln/>
+        </p:spPr>
+        <p:txBody>
+          <a:bodyPr wrap="square" lIns="0" tIns="0" rIns="0" bIns="0" rtlCol="0" anchor="t"/>
+          <a:lstStyle/>
+          <a:p>
+            <a:pPr indent="0" marL="0">
+              <a:lnSpc>
+                <a:spcPct val="125000"/>
+              </a:lnSpc>
+              <a:spcAft>
+                <a:spcPts val="500"/>
+              </a:spcAft>
+              <a:buNone/>
+            </a:pPr>
+            <a:r>
+              <a:rPr lang="en-US" sz="1100" dirty="0">
+                <a:solidFill>
+                  <a:srgbClr val="DCE7F2"/>
+                </a:solidFill>
+                <a:latin typeface="Microsoft YaHei" pitchFamily="34" charset="0"/>
+                <a:ea typeface="Microsoft YaHei" pitchFamily="34" charset="-122"/>
+                <a:cs typeface="Microsoft YaHei" pitchFamily="34" charset="-120"/>
+              </a:rPr>
+              <a:t>B 把下线当失效，标签系统性偏低，下界跟着偏低，所以决策区覆盖率最高、平均下界最低。60% 删失、c0 = 50 时它的平均下界 29，E 是 46。F09 里它在左上角：覆盖高，紧度差。</a:t>
+            </a:r>
+            <a:endParaRPr lang="en-US" sz="1100" dirty="0"/>
+          </a:p>
+        </p:txBody>
+      </p:sp>
+      <p:sp>
+        <p:nvSpPr>
+          <p:cNvPr id="12" name="Text 8"/>
+          <p:cNvSpPr txBox="1"/>
+          <p:nvPr/>
+        </p:nvSpPr>
+        <p:spPr>
+          <a:xfrm>
+            <a:off x="548640" y="6382512"/>
+            <a:ext cx="11091672" cy="274320"/>
+          </a:xfrm>
+          <a:prstGeom prst="rect">
+            <a:avLst/>
+          </a:prstGeom>
+          <a:noFill/>
+          <a:ln/>
+        </p:spPr>
+        <p:txBody>
+          <a:bodyPr wrap="square" lIns="0" tIns="0" rIns="0" bIns="0" rtlCol="0" anchor="ctr"/>
+          <a:lstStyle/>
+          <a:p>
+            <a:pPr indent="0" marL="0">
+              <a:buNone/>
+            </a:pPr>
+            <a:r>
+              <a:rPr lang="en-US" sz="900" dirty="0">
+                <a:solidFill>
+                  <a:srgbClr val="6E7A8A"/>
+                </a:solidFill>
+                <a:latin typeface="Microsoft YaHei" pitchFamily="34" charset="0"/>
+                <a:ea typeface="Microsoft YaHei" pitchFamily="34" charset="-122"/>
+                <a:cs typeface="Microsoft YaHei" pitchFamily="34" charset="-120"/>
+              </a:rPr>
+              <a:t>图为 Linux 预览版（替代字体 Liberation Serif 与文泉驿）。论文用图在 Windows 上重跑 s04 即为宋体五号与 Times New Roman 五号。删失为人工构造。</a:t>
+            </a:r>
+            <a:endParaRPr lang="en-US" sz="900" dirty="0"/>
+          </a:p>
+        </p:txBody>
+      </p:sp>
+      <p:sp>
+        <p:nvSpPr>
+          <p:cNvPr id="13" name="Text 9"/>
+          <p:cNvSpPr txBox="1"/>
+          <p:nvPr/>
+        </p:nvSpPr>
+        <p:spPr>
+          <a:xfrm>
+            <a:off x="11274552" y="6473952"/>
+            <a:ext cx="457200" cy="274320"/>
+          </a:xfrm>
+          <a:prstGeom prst="rect">
+            <a:avLst/>
+          </a:prstGeom>
+          <a:noFill/>
+          <a:ln/>
+        </p:spPr>
+        <p:txBody>
+          <a:bodyPr wrap="square" lIns="0" tIns="0" rIns="0" bIns="0" rtlCol="0" anchor="ctr"/>
+          <a:lstStyle/>
+          <a:p>
+            <a:pPr algn="r" indent="0" marL="0">
+              <a:buNone/>
+            </a:pPr>
+            <a:r>
+              <a:rPr lang="en-US" sz="1000" dirty="0">
+                <a:solidFill>
+                  <a:srgbClr val="9FB2C9"/>
+                </a:solidFill>
+                <a:latin typeface="Times New Roman" pitchFamily="34" charset="0"/>
+                <a:ea typeface="Times New Roman" pitchFamily="34" charset="-122"/>
+                <a:cs typeface="Times New Roman" pitchFamily="34" charset="-120"/>
+              </a:rPr>
+              <a:t>19</a:t>
+            </a:r>
+            <a:endParaRPr lang="en-US" sz="1000" dirty="0"/>
           </a:p>
         </p:txBody>
       </p:sp>
@@ -13376,7 +19324,7 @@
                 <a:ea typeface="Microsoft YaHei" pitchFamily="34" charset="-122"/>
                 <a:cs typeface="Microsoft YaHei" pitchFamily="34" charset="-120"/>
               </a:rPr>
-              <a:t>交付（第 15 到 17 页）</a:t>
+              <a:t>交付（第 15 到 22 页）</a:t>
             </a:r>
             <a:endParaRPr lang="en-US" sz="1400" dirty="0"/>
           </a:p>
@@ -13418,7 +19366,36 @@
                 <a:ea typeface="Microsoft YaHei" pitchFamily="34" charset="-122"/>
                 <a:cs typeface="Microsoft YaHei" pitchFamily="34" charset="-120"/>
               </a:rPr>
-              <a:t>五个脚本按顺序跑，每一步的验收标准；跑完得到 11 张图；三项作业，下次课开头先对答案。</a:t>
+              <a:t>五个脚本按顺序跑，每一步的验收标准；跑完得到 11 张图。</a:t>
+            </a:r>
+            <a:endParaRPr lang="en-US" sz="1150" dirty="0"/>
+          </a:p>
+          <a:p>
+            <a:pPr indent="0" marL="0">
+              <a:lnSpc>
+                <a:spcPct val="130000"/>
+              </a:lnSpc>
+              <a:buNone/>
+            </a:pPr>
+            <a:endParaRPr lang="en-US" sz="1150" dirty="0"/>
+          </a:p>
+          <a:p>
+            <a:pPr indent="0" marL="0">
+              <a:lnSpc>
+                <a:spcPct val="130000"/>
+              </a:lnSpc>
+              <a:buNone/>
+            </a:pPr>
+            <a:r>
+              <a:rPr lang="en-US" sz="1150" dirty="0">
+                <a:solidFill>
+                  <a:srgbClr val="1A1A1A"/>
+                </a:solidFill>
+                <a:latin typeface="Microsoft YaHei" pitchFamily="34" charset="0"/>
+                <a:ea typeface="Microsoft YaHei" pitchFamily="34" charset="-122"/>
+                <a:cs typeface="Microsoft YaHei" pitchFamily="34" charset="-120"/>
+              </a:rPr>
+              <a:t>第 16 到 21 页是在真实 FD001 上跑出来的结果：验收对照、核算表、主结果三张图、怎么读。最后是三项作业。</a:t>
             </a:r>
             <a:endParaRPr lang="en-US" sz="1150" dirty="0"/>
           </a:p>
@@ -13524,6 +19501,1917 @@
               <a:t>2</a:t>
             </a:r>
             <a:endParaRPr lang="en-US" sz="1000" dirty="0"/>
+          </a:p>
+        </p:txBody>
+      </p:sp>
+    </p:spTree>
+  </p:cSld>
+  <p:clrMapOvr>
+    <a:masterClrMapping/>
+  </p:clrMapOvr>
+</p:sld>
+</file>
+
+<file path=ppt/slides/slide20.xml><?xml version="1.0" encoding="utf-8"?>
+<p:sld xmlns:a="http://schemas.openxmlformats.org/drawingml/2006/main" xmlns:r="http://schemas.openxmlformats.org/officeDocument/2006/relationships" xmlns:p="http://schemas.openxmlformats.org/presentationml/2006/main">
+  <p:cSld name="Slide 20">
+    <p:spTree>
+      <p:nvGrpSpPr>
+        <p:cNvPr id="1" name=""/>
+        <p:cNvGrpSpPr/>
+        <p:nvPr/>
+      </p:nvGrpSpPr>
+      <p:grpSpPr>
+        <a:xfrm>
+          <a:off x="0" y="0"/>
+          <a:ext cx="0" cy="0"/>
+          <a:chOff x="0" y="0"/>
+          <a:chExt cx="0" cy="0"/>
+        </a:xfrm>
+      </p:grpSpPr>
+      <p:sp>
+        <p:nvSpPr>
+          <p:cNvPr id="2" name="Text 0"/>
+          <p:cNvSpPr txBox="1"/>
+          <p:nvPr/>
+        </p:nvSpPr>
+        <p:spPr>
+          <a:xfrm>
+            <a:off x="548640" y="347472"/>
+            <a:ext cx="11091672" cy="548640"/>
+          </a:xfrm>
+          <a:prstGeom prst="rect">
+            <a:avLst/>
+          </a:prstGeom>
+          <a:noFill/>
+          <a:ln/>
+        </p:spPr>
+        <p:txBody>
+          <a:bodyPr wrap="square" lIns="0" tIns="0" rIns="0" bIns="0" rtlCol="0" anchor="ctr"/>
+          <a:lstStyle/>
+          <a:p>
+            <a:pPr indent="0" marL="0">
+              <a:buNone/>
+            </a:pPr>
+            <a:r>
+              <a:rPr lang="en-US" sz="2600" b="1" dirty="0">
+                <a:solidFill>
+                  <a:srgbClr val="152238"/>
+                </a:solidFill>
+                <a:latin typeface="Microsoft YaHei" pitchFamily="34" charset="0"/>
+                <a:ea typeface="Microsoft YaHei" pitchFamily="34" charset="-122"/>
+                <a:cs typeface="Microsoft YaHei" pitchFamily="34" charset="-120"/>
+              </a:rPr>
+              <a:t>结果四：一台测试机的轨迹，和校准折的删失时间线</a:t>
+            </a:r>
+            <a:endParaRPr lang="en-US" sz="2600" dirty="0"/>
+          </a:p>
+        </p:txBody>
+      </p:sp>
+      <p:sp>
+        <p:nvSpPr>
+          <p:cNvPr id="3" name="Text 1"/>
+          <p:cNvSpPr txBox="1"/>
+          <p:nvPr/>
+        </p:nvSpPr>
+        <p:spPr>
+          <a:xfrm>
+            <a:off x="548640" y="896112"/>
+            <a:ext cx="11091672" cy="292608"/>
+          </a:xfrm>
+          <a:prstGeom prst="rect">
+            <a:avLst/>
+          </a:prstGeom>
+          <a:noFill/>
+          <a:ln/>
+        </p:spPr>
+        <p:txBody>
+          <a:bodyPr wrap="square" lIns="0" tIns="0" rIns="0" bIns="0" rtlCol="0" anchor="ctr"/>
+          <a:lstStyle/>
+          <a:p>
+            <a:pPr indent="0" marL="0">
+              <a:buNone/>
+            </a:pPr>
+            <a:r>
+              <a:rPr lang="en-US" sz="1200" dirty="0">
+                <a:solidFill>
+                  <a:srgbClr val="6E7A8A"/>
+                </a:solidFill>
+                <a:latin typeface="Microsoft YaHei" pitchFamily="34" charset="0"/>
+                <a:ea typeface="Microsoft YaHei" pitchFamily="34" charset="-122"/>
+                <a:cs typeface="Microsoft YaHei" pitchFamily="34" charset="-120"/>
+              </a:rPr>
+              <a:t>F10 与 F03，删失率 40%，c0 = 30</a:t>
+            </a:r>
+            <a:endParaRPr lang="en-US" sz="1200" dirty="0"/>
+          </a:p>
+        </p:txBody>
+      </p:sp>
+      <p:pic>
+        <p:nvPicPr>
+          <p:cNvPr id="4" name="Image 0" descr="/home/user/lxfs/RUL_censored_conformal_handover/03_code/figures/F10_single_engine_trajectory.png">    </p:cNvPr>
+          <p:cNvPicPr>
+            <a:picLocks noChangeAspect="1"/>
+          </p:cNvPicPr>
+          <p:nvPr/>
+        </p:nvPicPr>
+        <p:blipFill>
+          <a:blip r:embed="rId1"/>
+          <a:stretch>
+            <a:fillRect/>
+          </a:stretch>
+        </p:blipFill>
+        <p:spPr>
+          <a:xfrm>
+            <a:off x="548640" y="1371600"/>
+            <a:ext cx="6035040" cy="3017520"/>
+          </a:xfrm>
+          <a:prstGeom prst="rect">
+            <a:avLst/>
+          </a:prstGeom>
+        </p:spPr>
+      </p:pic>
+      <p:pic>
+        <p:nvPicPr>
+          <p:cNvPr id="5" name="Image 1" descr="/home/user/lxfs/RUL_censored_conformal_handover/03_code/figures/F03_censoring_timeline.png">    </p:cNvPr>
+          <p:cNvPicPr>
+            <a:picLocks noChangeAspect="1"/>
+          </p:cNvPicPr>
+          <p:nvPr/>
+        </p:nvPicPr>
+        <p:blipFill>
+          <a:blip r:embed="rId2"/>
+          <a:stretch>
+            <a:fillRect/>
+          </a:stretch>
+        </p:blipFill>
+        <p:spPr>
+          <a:xfrm>
+            <a:off x="6858000" y="1371600"/>
+            <a:ext cx="4754880" cy="2679192"/>
+          </a:xfrm>
+          <a:prstGeom prst="rect">
+            <a:avLst/>
+          </a:prstGeom>
+        </p:spPr>
+      </p:pic>
+      <p:sp>
+        <p:nvSpPr>
+          <p:cNvPr id="6" name="Shape 2"/>
+          <p:cNvSpPr/>
+          <p:nvPr/>
+        </p:nvSpPr>
+        <p:spPr>
+          <a:xfrm>
+            <a:off x="548640" y="4572000"/>
+            <a:ext cx="11091672" cy="1737360"/>
+          </a:xfrm>
+          <a:prstGeom prst="rect">
+            <a:avLst/>
+          </a:prstGeom>
+          <a:solidFill>
+            <a:srgbClr val="F4F7FA"/>
+          </a:solidFill>
+          <a:ln w="12700">
+            <a:solidFill>
+              <a:srgbClr val="F4F7FA"/>
+            </a:solidFill>
+            <a:prstDash val="solid"/>
+          </a:ln>
+        </p:spPr>
+      </p:sp>
+      <p:sp>
+        <p:nvSpPr>
+          <p:cNvPr id="7" name="Text 3"/>
+          <p:cNvSpPr txBox="1"/>
+          <p:nvPr/>
+        </p:nvSpPr>
+        <p:spPr>
+          <a:xfrm>
+            <a:off x="749808" y="4736592"/>
+            <a:ext cx="10689336" cy="310896"/>
+          </a:xfrm>
+          <a:prstGeom prst="rect">
+            <a:avLst/>
+          </a:prstGeom>
+          <a:noFill/>
+          <a:ln/>
+        </p:spPr>
+        <p:txBody>
+          <a:bodyPr wrap="square" lIns="0" tIns="0" rIns="0" bIns="0" rtlCol="0" anchor="t"/>
+          <a:lstStyle/>
+          <a:p>
+            <a:pPr indent="0" marL="0">
+              <a:buNone/>
+            </a:pPr>
+            <a:r>
+              <a:rPr lang="en-US" sz="1200" b="1" dirty="0">
+                <a:solidFill>
+                  <a:srgbClr val="152238"/>
+                </a:solidFill>
+                <a:latin typeface="Microsoft YaHei" pitchFamily="34" charset="0"/>
+                <a:ea typeface="Microsoft YaHei" pitchFamily="34" charset="-122"/>
+                <a:cs typeface="Microsoft YaHei" pitchFamily="34" charset="-120"/>
+              </a:rPr>
+              <a:t>怎么看 F10</a:t>
+            </a:r>
+            <a:endParaRPr lang="en-US" sz="1200" dirty="0"/>
+          </a:p>
+        </p:txBody>
+      </p:sp>
+      <p:sp>
+        <p:nvSpPr>
+          <p:cNvPr id="8" name="Text 4"/>
+          <p:cNvSpPr txBox="1"/>
+          <p:nvPr/>
+        </p:nvSpPr>
+        <p:spPr>
+          <a:xfrm>
+            <a:off x="749808" y="5120640"/>
+            <a:ext cx="10689336" cy="1051560"/>
+          </a:xfrm>
+          <a:prstGeom prst="rect">
+            <a:avLst/>
+          </a:prstGeom>
+          <a:noFill/>
+          <a:ln/>
+        </p:spPr>
+        <p:txBody>
+          <a:bodyPr wrap="square" lIns="0" tIns="0" rIns="0" bIns="0" rtlCol="0" anchor="t"/>
+          <a:lstStyle/>
+          <a:p>
+            <a:pPr indent="0" marL="0">
+              <a:lnSpc>
+                <a:spcPct val="125000"/>
+              </a:lnSpc>
+              <a:spcAft>
+                <a:spcPts val="500"/>
+              </a:spcAft>
+              <a:buNone/>
+            </a:pPr>
+            <a:r>
+              <a:rPr lang="en-US" sz="1100" dirty="0">
+                <a:solidFill>
+                  <a:srgbClr val="1A1A1A"/>
+                </a:solidFill>
+                <a:latin typeface="Microsoft YaHei" pitchFamily="34" charset="0"/>
+                <a:ea typeface="Microsoft YaHei" pitchFamily="34" charset="-122"/>
+                <a:cs typeface="Microsoft YaHei" pitchFamily="34" charset="-120"/>
+              </a:rPr>
+              <a:t>黑线是真实 RUL，彩线是各方法的下界，虚线是 c0。大部分时间所有下界都贴着 c0 走，这就是“天然覆盖”。真正有信息的只有最后几十个循环：下界开始往下走，能不能走到黑线之下，就是决策区覆盖率在数的东西。B 的线最早往下掉，所以它覆盖高、下界松。F03 是第 4 页那张示意图的真数据版：绿色保留，橙色是每台机最后 30 个循环，实心失效，空心删失。</a:t>
+            </a:r>
+            <a:endParaRPr lang="en-US" sz="1100" dirty="0"/>
+          </a:p>
+        </p:txBody>
+      </p:sp>
+      <p:sp>
+        <p:nvSpPr>
+          <p:cNvPr id="9" name="Text 5"/>
+          <p:cNvSpPr txBox="1"/>
+          <p:nvPr/>
+        </p:nvSpPr>
+        <p:spPr>
+          <a:xfrm>
+            <a:off x="548640" y="6382512"/>
+            <a:ext cx="11091672" cy="274320"/>
+          </a:xfrm>
+          <a:prstGeom prst="rect">
+            <a:avLst/>
+          </a:prstGeom>
+          <a:noFill/>
+          <a:ln/>
+        </p:spPr>
+        <p:txBody>
+          <a:bodyPr wrap="square" lIns="0" tIns="0" rIns="0" bIns="0" rtlCol="0" anchor="ctr"/>
+          <a:lstStyle/>
+          <a:p>
+            <a:pPr indent="0" marL="0">
+              <a:buNone/>
+            </a:pPr>
+            <a:r>
+              <a:rPr lang="en-US" sz="900" dirty="0">
+                <a:solidFill>
+                  <a:srgbClr val="6E7A8A"/>
+                </a:solidFill>
+                <a:latin typeface="Microsoft YaHei" pitchFamily="34" charset="0"/>
+                <a:ea typeface="Microsoft YaHei" pitchFamily="34" charset="-122"/>
+                <a:cs typeface="Microsoft YaHei" pitchFamily="34" charset="-120"/>
+              </a:rPr>
+              <a:t>图为 Linux 预览版（替代字体 Liberation Serif 与文泉驿）。论文用图在 Windows 上重跑 s04 即为宋体五号与 Times New Roman 五号。删失为人工构造。</a:t>
+            </a:r>
+            <a:endParaRPr lang="en-US" sz="900" dirty="0"/>
+          </a:p>
+        </p:txBody>
+      </p:sp>
+      <p:sp>
+        <p:nvSpPr>
+          <p:cNvPr id="10" name="Text 6"/>
+          <p:cNvSpPr txBox="1"/>
+          <p:nvPr/>
+        </p:nvSpPr>
+        <p:spPr>
+          <a:xfrm>
+            <a:off x="11274552" y="6473952"/>
+            <a:ext cx="457200" cy="274320"/>
+          </a:xfrm>
+          <a:prstGeom prst="rect">
+            <a:avLst/>
+          </a:prstGeom>
+          <a:noFill/>
+          <a:ln/>
+        </p:spPr>
+        <p:txBody>
+          <a:bodyPr wrap="square" lIns="0" tIns="0" rIns="0" bIns="0" rtlCol="0" anchor="ctr"/>
+          <a:lstStyle/>
+          <a:p>
+            <a:pPr algn="r" indent="0" marL="0">
+              <a:buNone/>
+            </a:pPr>
+            <a:r>
+              <a:rPr lang="en-US" sz="1000" dirty="0">
+                <a:solidFill>
+                  <a:srgbClr val="9FB2C9"/>
+                </a:solidFill>
+                <a:latin typeface="Times New Roman" pitchFamily="34" charset="0"/>
+                <a:ea typeface="Times New Roman" pitchFamily="34" charset="-122"/>
+                <a:cs typeface="Times New Roman" pitchFamily="34" charset="-120"/>
+              </a:rPr>
+              <a:t>20</a:t>
+            </a:r>
+            <a:endParaRPr lang="en-US" sz="1000" dirty="0"/>
+          </a:p>
+        </p:txBody>
+      </p:sp>
+    </p:spTree>
+  </p:cSld>
+  <p:clrMapOvr>
+    <a:masterClrMapping/>
+  </p:clrMapOvr>
+</p:sld>
+</file>
+
+<file path=ppt/slides/slide21.xml><?xml version="1.0" encoding="utf-8"?>
+<p:sld xmlns:a="http://schemas.openxmlformats.org/drawingml/2006/main" xmlns:r="http://schemas.openxmlformats.org/officeDocument/2006/relationships" xmlns:p="http://schemas.openxmlformats.org/presentationml/2006/main">
+  <p:cSld name="Slide 21">
+    <p:spTree>
+      <p:nvGrpSpPr>
+        <p:cNvPr id="1" name=""/>
+        <p:cNvGrpSpPr/>
+        <p:nvPr/>
+      </p:nvGrpSpPr>
+      <p:grpSpPr>
+        <a:xfrm>
+          <a:off x="0" y="0"/>
+          <a:ext cx="0" cy="0"/>
+          <a:chOff x="0" y="0"/>
+          <a:chExt cx="0" cy="0"/>
+        </a:xfrm>
+      </p:grpSpPr>
+      <p:sp>
+        <p:nvSpPr>
+          <p:cNvPr id="2" name="Text 0"/>
+          <p:cNvSpPr txBox="1"/>
+          <p:nvPr/>
+        </p:nvSpPr>
+        <p:spPr>
+          <a:xfrm>
+            <a:off x="548640" y="347472"/>
+            <a:ext cx="11091672" cy="548640"/>
+          </a:xfrm>
+          <a:prstGeom prst="rect">
+            <a:avLst/>
+          </a:prstGeom>
+          <a:noFill/>
+          <a:ln/>
+        </p:spPr>
+        <p:txBody>
+          <a:bodyPr wrap="square" lIns="0" tIns="0" rIns="0" bIns="0" rtlCol="0" anchor="ctr"/>
+          <a:lstStyle/>
+          <a:p>
+            <a:pPr indent="0" marL="0">
+              <a:buNone/>
+            </a:pPr>
+            <a:r>
+              <a:rPr lang="en-US" sz="2600" b="1" dirty="0">
+                <a:solidFill>
+                  <a:srgbClr val="152238"/>
+                </a:solidFill>
+                <a:latin typeface="Microsoft YaHei" pitchFamily="34" charset="0"/>
+                <a:ea typeface="Microsoft YaHei" pitchFamily="34" charset="-122"/>
+                <a:cs typeface="Microsoft YaHei" pitchFamily="34" charset="-120"/>
+              </a:rPr>
+              <a:t>结果怎么读：五句话</a:t>
+            </a:r>
+            <a:endParaRPr lang="en-US" sz="2600" dirty="0"/>
+          </a:p>
+        </p:txBody>
+      </p:sp>
+      <p:sp>
+        <p:nvSpPr>
+          <p:cNvPr id="3" name="Text 1"/>
+          <p:cNvSpPr txBox="1"/>
+          <p:nvPr/>
+        </p:nvSpPr>
+        <p:spPr>
+          <a:xfrm>
+            <a:off x="548640" y="896112"/>
+            <a:ext cx="11091672" cy="292608"/>
+          </a:xfrm>
+          <a:prstGeom prst="rect">
+            <a:avLst/>
+          </a:prstGeom>
+          <a:noFill/>
+          <a:ln/>
+        </p:spPr>
+        <p:txBody>
+          <a:bodyPr wrap="square" lIns="0" tIns="0" rIns="0" bIns="0" rtlCol="0" anchor="ctr"/>
+          <a:lstStyle/>
+          <a:p>
+            <a:pPr indent="0" marL="0">
+              <a:buNone/>
+            </a:pPr>
+            <a:r>
+              <a:rPr lang="en-US" sz="1200" dirty="0">
+                <a:solidFill>
+                  <a:srgbClr val="6E7A8A"/>
+                </a:solidFill>
+                <a:latin typeface="Microsoft YaHei" pitchFamily="34" charset="0"/>
+                <a:ea typeface="Microsoft YaHei" pitchFamily="34" charset="-122"/>
+                <a:cs typeface="Microsoft YaHei" pitchFamily="34" charset="-120"/>
+              </a:rPr>
+              <a:t>不改数据，不删结果，改的是解释</a:t>
+            </a:r>
+            <a:endParaRPr lang="en-US" sz="1200" dirty="0"/>
+          </a:p>
+        </p:txBody>
+      </p:sp>
+      <p:sp>
+        <p:nvSpPr>
+          <p:cNvPr id="4" name="Shape 2"/>
+          <p:cNvSpPr/>
+          <p:nvPr/>
+        </p:nvSpPr>
+        <p:spPr>
+          <a:xfrm>
+            <a:off x="548640" y="1371600"/>
+            <a:ext cx="11091672" cy="896112"/>
+          </a:xfrm>
+          <a:prstGeom prst="rect">
+            <a:avLst/>
+          </a:prstGeom>
+          <a:solidFill>
+            <a:srgbClr val="F4F7FA"/>
+          </a:solidFill>
+          <a:ln w="12700">
+            <a:solidFill>
+              <a:srgbClr val="F4F7FA"/>
+            </a:solidFill>
+            <a:prstDash val="solid"/>
+          </a:ln>
+        </p:spPr>
+      </p:sp>
+      <p:sp>
+        <p:nvSpPr>
+          <p:cNvPr id="5" name="Shape 3"/>
+          <p:cNvSpPr/>
+          <p:nvPr/>
+        </p:nvSpPr>
+        <p:spPr>
+          <a:xfrm>
+            <a:off x="749808" y="1627632"/>
+            <a:ext cx="365760" cy="365760"/>
+          </a:xfrm>
+          <a:prstGeom prst="ellipse">
+            <a:avLst/>
+          </a:prstGeom>
+          <a:solidFill>
+            <a:srgbClr val="B23A48"/>
+          </a:solidFill>
+          <a:ln w="12700">
+            <a:solidFill>
+              <a:srgbClr val="B23A48"/>
+            </a:solidFill>
+            <a:prstDash val="solid"/>
+          </a:ln>
+        </p:spPr>
+      </p:sp>
+      <p:sp>
+        <p:nvSpPr>
+          <p:cNvPr id="6" name="Text 4"/>
+          <p:cNvSpPr txBox="1"/>
+          <p:nvPr/>
+        </p:nvSpPr>
+        <p:spPr>
+          <a:xfrm>
+            <a:off x="749808" y="1627632"/>
+            <a:ext cx="365760" cy="365760"/>
+          </a:xfrm>
+          <a:prstGeom prst="rect">
+            <a:avLst/>
+          </a:prstGeom>
+          <a:noFill/>
+          <a:ln/>
+        </p:spPr>
+        <p:txBody>
+          <a:bodyPr wrap="square" lIns="0" tIns="0" rIns="0" bIns="0" rtlCol="0" anchor="ctr"/>
+          <a:lstStyle/>
+          <a:p>
+            <a:pPr algn="ctr" indent="0" marL="0">
+              <a:buNone/>
+            </a:pPr>
+            <a:r>
+              <a:rPr lang="en-US" sz="1200" b="1" dirty="0">
+                <a:solidFill>
+                  <a:srgbClr val="FFFFFF"/>
+                </a:solidFill>
+                <a:latin typeface="Times New Roman" pitchFamily="34" charset="0"/>
+                <a:ea typeface="Times New Roman" pitchFamily="34" charset="-122"/>
+                <a:cs typeface="Times New Roman" pitchFamily="34" charset="-120"/>
+              </a:rPr>
+              <a:t>1</a:t>
+            </a:r>
+            <a:endParaRPr lang="en-US" sz="1200" dirty="0"/>
+          </a:p>
+        </p:txBody>
+      </p:sp>
+      <p:sp>
+        <p:nvSpPr>
+          <p:cNvPr id="7" name="Text 5"/>
+          <p:cNvSpPr txBox="1"/>
+          <p:nvPr/>
+        </p:nvSpPr>
+        <p:spPr>
+          <a:xfrm>
+            <a:off x="1280160" y="1463040"/>
+            <a:ext cx="3108960" cy="713232"/>
+          </a:xfrm>
+          <a:prstGeom prst="rect">
+            <a:avLst/>
+          </a:prstGeom>
+          <a:noFill/>
+          <a:ln/>
+        </p:spPr>
+        <p:txBody>
+          <a:bodyPr wrap="square" lIns="0" tIns="0" rIns="0" bIns="0" rtlCol="0" anchor="ctr"/>
+          <a:lstStyle/>
+          <a:p>
+            <a:pPr indent="0" marL="0">
+              <a:buNone/>
+            </a:pPr>
+            <a:r>
+              <a:rPr lang="en-US" sz="1200" b="1" dirty="0">
+                <a:solidFill>
+                  <a:srgbClr val="152238"/>
+                </a:solidFill>
+                <a:latin typeface="Microsoft YaHei" pitchFamily="34" charset="0"/>
+                <a:ea typeface="Microsoft YaHei" pitchFamily="34" charset="-122"/>
+                <a:cs typeface="Microsoft YaHei" pitchFamily="34" charset="-120"/>
+              </a:rPr>
+              <a:t>总体覆盖率不是要看的数</a:t>
+            </a:r>
+            <a:endParaRPr lang="en-US" sz="1200" dirty="0"/>
+          </a:p>
+        </p:txBody>
+      </p:sp>
+      <p:sp>
+        <p:nvSpPr>
+          <p:cNvPr id="8" name="Text 6"/>
+          <p:cNvSpPr txBox="1"/>
+          <p:nvPr/>
+        </p:nvSpPr>
+        <p:spPr>
+          <a:xfrm>
+            <a:off x="4480560" y="1463040"/>
+            <a:ext cx="6976872" cy="713232"/>
+          </a:xfrm>
+          <a:prstGeom prst="rect">
+            <a:avLst/>
+          </a:prstGeom>
+          <a:noFill/>
+          <a:ln/>
+        </p:spPr>
+        <p:txBody>
+          <a:bodyPr wrap="square" lIns="0" tIns="0" rIns="0" bIns="0" rtlCol="0" anchor="ctr"/>
+          <a:lstStyle/>
+          <a:p>
+            <a:pPr indent="0" marL="0">
+              <a:lnSpc>
+                <a:spcPct val="120000"/>
+              </a:lnSpc>
+              <a:buNone/>
+            </a:pPr>
+            <a:r>
+              <a:rPr lang="en-US" sz="1050" dirty="0">
+                <a:solidFill>
+                  <a:srgbClr val="1A1A1A"/>
+                </a:solidFill>
+                <a:latin typeface="Microsoft YaHei" pitchFamily="34" charset="0"/>
+                <a:ea typeface="Microsoft YaHei" pitchFamily="34" charset="-122"/>
+                <a:cs typeface="Microsoft YaHei" pitchFamily="34" charset="-120"/>
+              </a:rPr>
+              <a:t>六条线总体 0.96 到 0.99，决策区 0.18 到 0.67。边际保证被远离失效的样本稀释，无删失参照 E 也只有 0.45。这是方法框架层面的问题，优先级最高。</a:t>
+            </a:r>
+            <a:endParaRPr lang="en-US" sz="1050" dirty="0"/>
+          </a:p>
+        </p:txBody>
+      </p:sp>
+      <p:sp>
+        <p:nvSpPr>
+          <p:cNvPr id="9" name="Shape 7"/>
+          <p:cNvSpPr/>
+          <p:nvPr/>
+        </p:nvSpPr>
+        <p:spPr>
+          <a:xfrm>
+            <a:off x="548640" y="2359152"/>
+            <a:ext cx="11091672" cy="896112"/>
+          </a:xfrm>
+          <a:prstGeom prst="rect">
+            <a:avLst/>
+          </a:prstGeom>
+          <a:solidFill>
+            <a:srgbClr val="F4F7FA"/>
+          </a:solidFill>
+          <a:ln w="12700">
+            <a:solidFill>
+              <a:srgbClr val="F4F7FA"/>
+            </a:solidFill>
+            <a:prstDash val="solid"/>
+          </a:ln>
+        </p:spPr>
+      </p:sp>
+      <p:sp>
+        <p:nvSpPr>
+          <p:cNvPr id="10" name="Shape 8"/>
+          <p:cNvSpPr/>
+          <p:nvPr/>
+        </p:nvSpPr>
+        <p:spPr>
+          <a:xfrm>
+            <a:off x="749808" y="2615184"/>
+            <a:ext cx="365760" cy="365760"/>
+          </a:xfrm>
+          <a:prstGeom prst="ellipse">
+            <a:avLst/>
+          </a:prstGeom>
+          <a:solidFill>
+            <a:srgbClr val="2E4A6B"/>
+          </a:solidFill>
+          <a:ln w="12700">
+            <a:solidFill>
+              <a:srgbClr val="2E4A6B"/>
+            </a:solidFill>
+            <a:prstDash val="solid"/>
+          </a:ln>
+        </p:spPr>
+      </p:sp>
+      <p:sp>
+        <p:nvSpPr>
+          <p:cNvPr id="11" name="Text 9"/>
+          <p:cNvSpPr txBox="1"/>
+          <p:nvPr/>
+        </p:nvSpPr>
+        <p:spPr>
+          <a:xfrm>
+            <a:off x="749808" y="2615184"/>
+            <a:ext cx="365760" cy="365760"/>
+          </a:xfrm>
+          <a:prstGeom prst="rect">
+            <a:avLst/>
+          </a:prstGeom>
+          <a:noFill/>
+          <a:ln/>
+        </p:spPr>
+        <p:txBody>
+          <a:bodyPr wrap="square" lIns="0" tIns="0" rIns="0" bIns="0" rtlCol="0" anchor="ctr"/>
+          <a:lstStyle/>
+          <a:p>
+            <a:pPr algn="ctr" indent="0" marL="0">
+              <a:buNone/>
+            </a:pPr>
+            <a:r>
+              <a:rPr lang="en-US" sz="1200" b="1" dirty="0">
+                <a:solidFill>
+                  <a:srgbClr val="FFFFFF"/>
+                </a:solidFill>
+                <a:latin typeface="Times New Roman" pitchFamily="34" charset="0"/>
+                <a:ea typeface="Times New Roman" pitchFamily="34" charset="-122"/>
+                <a:cs typeface="Times New Roman" pitchFamily="34" charset="-120"/>
+              </a:rPr>
+              <a:t>2</a:t>
+            </a:r>
+            <a:endParaRPr lang="en-US" sz="1200" dirty="0"/>
+          </a:p>
+        </p:txBody>
+      </p:sp>
+      <p:sp>
+        <p:nvSpPr>
+          <p:cNvPr id="12" name="Text 10"/>
+          <p:cNvSpPr txBox="1"/>
+          <p:nvPr/>
+        </p:nvSpPr>
+        <p:spPr>
+          <a:xfrm>
+            <a:off x="1280160" y="2450592"/>
+            <a:ext cx="3108960" cy="713232"/>
+          </a:xfrm>
+          <a:prstGeom prst="rect">
+            <a:avLst/>
+          </a:prstGeom>
+          <a:noFill/>
+          <a:ln/>
+        </p:spPr>
+        <p:txBody>
+          <a:bodyPr wrap="square" lIns="0" tIns="0" rIns="0" bIns="0" rtlCol="0" anchor="ctr"/>
+          <a:lstStyle/>
+          <a:p>
+            <a:pPr indent="0" marL="0">
+              <a:buNone/>
+            </a:pPr>
+            <a:r>
+              <a:rPr lang="en-US" sz="1200" b="1" dirty="0">
+                <a:solidFill>
+                  <a:srgbClr val="152238"/>
+                </a:solidFill>
+                <a:latin typeface="Microsoft YaHei" pitchFamily="34" charset="0"/>
+                <a:ea typeface="Microsoft YaHei" pitchFamily="34" charset="-122"/>
+                <a:cs typeface="Microsoft YaHei" pitchFamily="34" charset="-120"/>
+              </a:rPr>
+              <a:t>加权有效，但只在删失重的时候</a:t>
+            </a:r>
+            <a:endParaRPr lang="en-US" sz="1200" dirty="0"/>
+          </a:p>
+        </p:txBody>
+      </p:sp>
+      <p:sp>
+        <p:nvSpPr>
+          <p:cNvPr id="13" name="Text 11"/>
+          <p:cNvSpPr txBox="1"/>
+          <p:nvPr/>
+        </p:nvSpPr>
+        <p:spPr>
+          <a:xfrm>
+            <a:off x="4480560" y="2450592"/>
+            <a:ext cx="6976872" cy="713232"/>
+          </a:xfrm>
+          <a:prstGeom prst="rect">
+            <a:avLst/>
+          </a:prstGeom>
+          <a:noFill/>
+          <a:ln/>
+        </p:spPr>
+        <p:txBody>
+          <a:bodyPr wrap="square" lIns="0" tIns="0" rIns="0" bIns="0" rtlCol="0" anchor="ctr"/>
+          <a:lstStyle/>
+          <a:p>
+            <a:pPr indent="0" marL="0">
+              <a:lnSpc>
+                <a:spcPct val="120000"/>
+              </a:lnSpc>
+              <a:buNone/>
+            </a:pPr>
+            <a:r>
+              <a:rPr lang="en-US" sz="1050" dirty="0">
+                <a:solidFill>
+                  <a:srgbClr val="1A1A1A"/>
+                </a:solidFill>
+                <a:latin typeface="Microsoft YaHei" pitchFamily="34" charset="0"/>
+                <a:ea typeface="Microsoft YaHei" pitchFamily="34" charset="-122"/>
+                <a:cs typeface="Microsoft YaHei" pitchFamily="34" charset="-120"/>
+              </a:rPr>
+              <a:t>40% 删失时 Cw 比 Cu 决策区覆盖率高 0.10 到 0.15；20% 时权重接近 1，两者没差。第 5 页的发现在真数据上成立。</a:t>
+            </a:r>
+            <a:endParaRPr lang="en-US" sz="1050" dirty="0"/>
+          </a:p>
+        </p:txBody>
+      </p:sp>
+      <p:sp>
+        <p:nvSpPr>
+          <p:cNvPr id="14" name="Shape 12"/>
+          <p:cNvSpPr/>
+          <p:nvPr/>
+        </p:nvSpPr>
+        <p:spPr>
+          <a:xfrm>
+            <a:off x="548640" y="3346704"/>
+            <a:ext cx="11091672" cy="896112"/>
+          </a:xfrm>
+          <a:prstGeom prst="rect">
+            <a:avLst/>
+          </a:prstGeom>
+          <a:solidFill>
+            <a:srgbClr val="F4F7FA"/>
+          </a:solidFill>
+          <a:ln w="12700">
+            <a:solidFill>
+              <a:srgbClr val="F4F7FA"/>
+            </a:solidFill>
+            <a:prstDash val="solid"/>
+          </a:ln>
+        </p:spPr>
+      </p:sp>
+      <p:sp>
+        <p:nvSpPr>
+          <p:cNvPr id="15" name="Shape 13"/>
+          <p:cNvSpPr/>
+          <p:nvPr/>
+        </p:nvSpPr>
+        <p:spPr>
+          <a:xfrm>
+            <a:off x="749808" y="3602736"/>
+            <a:ext cx="365760" cy="365760"/>
+          </a:xfrm>
+          <a:prstGeom prst="ellipse">
+            <a:avLst/>
+          </a:prstGeom>
+          <a:solidFill>
+            <a:srgbClr val="2E4A6B"/>
+          </a:solidFill>
+          <a:ln w="12700">
+            <a:solidFill>
+              <a:srgbClr val="2E4A6B"/>
+            </a:solidFill>
+            <a:prstDash val="solid"/>
+          </a:ln>
+        </p:spPr>
+      </p:sp>
+      <p:sp>
+        <p:nvSpPr>
+          <p:cNvPr id="16" name="Text 14"/>
+          <p:cNvSpPr txBox="1"/>
+          <p:nvPr/>
+        </p:nvSpPr>
+        <p:spPr>
+          <a:xfrm>
+            <a:off x="749808" y="3602736"/>
+            <a:ext cx="365760" cy="365760"/>
+          </a:xfrm>
+          <a:prstGeom prst="rect">
+            <a:avLst/>
+          </a:prstGeom>
+          <a:noFill/>
+          <a:ln/>
+        </p:spPr>
+        <p:txBody>
+          <a:bodyPr wrap="square" lIns="0" tIns="0" rIns="0" bIns="0" rtlCol="0" anchor="ctr"/>
+          <a:lstStyle/>
+          <a:p>
+            <a:pPr algn="ctr" indent="0" marL="0">
+              <a:buNone/>
+            </a:pPr>
+            <a:r>
+              <a:rPr lang="en-US" sz="1200" b="1" dirty="0">
+                <a:solidFill>
+                  <a:srgbClr val="FFFFFF"/>
+                </a:solidFill>
+                <a:latin typeface="Times New Roman" pitchFamily="34" charset="0"/>
+                <a:ea typeface="Times New Roman" pitchFamily="34" charset="-122"/>
+                <a:cs typeface="Times New Roman" pitchFamily="34" charset="-120"/>
+              </a:rPr>
+              <a:t>3</a:t>
+            </a:r>
+            <a:endParaRPr lang="en-US" sz="1200" dirty="0"/>
+          </a:p>
+        </p:txBody>
+      </p:sp>
+      <p:sp>
+        <p:nvSpPr>
+          <p:cNvPr id="17" name="Text 15"/>
+          <p:cNvSpPr txBox="1"/>
+          <p:nvPr/>
+        </p:nvSpPr>
+        <p:spPr>
+          <a:xfrm>
+            <a:off x="1280160" y="3438144"/>
+            <a:ext cx="3108960" cy="713232"/>
+          </a:xfrm>
+          <a:prstGeom prst="rect">
+            <a:avLst/>
+          </a:prstGeom>
+          <a:noFill/>
+          <a:ln/>
+        </p:spPr>
+        <p:txBody>
+          <a:bodyPr wrap="square" lIns="0" tIns="0" rIns="0" bIns="0" rtlCol="0" anchor="ctr"/>
+          <a:lstStyle/>
+          <a:p>
+            <a:pPr indent="0" marL="0">
+              <a:buNone/>
+            </a:pPr>
+            <a:r>
+              <a:rPr lang="en-US" sz="1200" b="1" dirty="0">
+                <a:solidFill>
+                  <a:srgbClr val="152238"/>
+                </a:solidFill>
+                <a:latin typeface="Microsoft YaHei" pitchFamily="34" charset="0"/>
+                <a:ea typeface="Microsoft YaHei" pitchFamily="34" charset="-122"/>
+                <a:cs typeface="Microsoft YaHei" pitchFamily="34" charset="-120"/>
+              </a:rPr>
+              <a:t>B 的高覆盖是偏保守换来的</a:t>
+            </a:r>
+            <a:endParaRPr lang="en-US" sz="1200" dirty="0"/>
+          </a:p>
+        </p:txBody>
+      </p:sp>
+      <p:sp>
+        <p:nvSpPr>
+          <p:cNvPr id="18" name="Text 16"/>
+          <p:cNvSpPr txBox="1"/>
+          <p:nvPr/>
+        </p:nvSpPr>
+        <p:spPr>
+          <a:xfrm>
+            <a:off x="4480560" y="3438144"/>
+            <a:ext cx="6976872" cy="713232"/>
+          </a:xfrm>
+          <a:prstGeom prst="rect">
+            <a:avLst/>
+          </a:prstGeom>
+          <a:noFill/>
+          <a:ln/>
+        </p:spPr>
+        <p:txBody>
+          <a:bodyPr wrap="square" lIns="0" tIns="0" rIns="0" bIns="0" rtlCol="0" anchor="ctr"/>
+          <a:lstStyle/>
+          <a:p>
+            <a:pPr indent="0" marL="0">
+              <a:lnSpc>
+                <a:spcPct val="120000"/>
+              </a:lnSpc>
+              <a:buNone/>
+            </a:pPr>
+            <a:r>
+              <a:rPr lang="en-US" sz="1050" dirty="0">
+                <a:solidFill>
+                  <a:srgbClr val="1A1A1A"/>
+                </a:solidFill>
+                <a:latin typeface="Microsoft YaHei" pitchFamily="34" charset="0"/>
+                <a:ea typeface="Microsoft YaHei" pitchFamily="34" charset="-122"/>
+                <a:cs typeface="Microsoft YaHei" pitchFamily="34" charset="-120"/>
+              </a:rPr>
+              <a:t>把下线当失效让标签偏低，60% 删失、c0 = 50 时平均下界 29 对 46。覆盖率和紧度必须一起看，这就是修正三要报平均下界的原因。</a:t>
+            </a:r>
+            <a:endParaRPr lang="en-US" sz="1050" dirty="0"/>
+          </a:p>
+        </p:txBody>
+      </p:sp>
+      <p:sp>
+        <p:nvSpPr>
+          <p:cNvPr id="19" name="Shape 17"/>
+          <p:cNvSpPr/>
+          <p:nvPr/>
+        </p:nvSpPr>
+        <p:spPr>
+          <a:xfrm>
+            <a:off x="548640" y="4334256"/>
+            <a:ext cx="11091672" cy="896112"/>
+          </a:xfrm>
+          <a:prstGeom prst="rect">
+            <a:avLst/>
+          </a:prstGeom>
+          <a:solidFill>
+            <a:srgbClr val="F4F7FA"/>
+          </a:solidFill>
+          <a:ln w="12700">
+            <a:solidFill>
+              <a:srgbClr val="F4F7FA"/>
+            </a:solidFill>
+            <a:prstDash val="solid"/>
+          </a:ln>
+        </p:spPr>
+      </p:sp>
+      <p:sp>
+        <p:nvSpPr>
+          <p:cNvPr id="20" name="Shape 18"/>
+          <p:cNvSpPr/>
+          <p:nvPr/>
+        </p:nvSpPr>
+        <p:spPr>
+          <a:xfrm>
+            <a:off x="749808" y="4590288"/>
+            <a:ext cx="365760" cy="365760"/>
+          </a:xfrm>
+          <a:prstGeom prst="ellipse">
+            <a:avLst/>
+          </a:prstGeom>
+          <a:solidFill>
+            <a:srgbClr val="2E4A6B"/>
+          </a:solidFill>
+          <a:ln w="12700">
+            <a:solidFill>
+              <a:srgbClr val="2E4A6B"/>
+            </a:solidFill>
+            <a:prstDash val="solid"/>
+          </a:ln>
+        </p:spPr>
+      </p:sp>
+      <p:sp>
+        <p:nvSpPr>
+          <p:cNvPr id="21" name="Text 19"/>
+          <p:cNvSpPr txBox="1"/>
+          <p:nvPr/>
+        </p:nvSpPr>
+        <p:spPr>
+          <a:xfrm>
+            <a:off x="749808" y="4590288"/>
+            <a:ext cx="365760" cy="365760"/>
+          </a:xfrm>
+          <a:prstGeom prst="rect">
+            <a:avLst/>
+          </a:prstGeom>
+          <a:noFill/>
+          <a:ln/>
+        </p:spPr>
+        <p:txBody>
+          <a:bodyPr wrap="square" lIns="0" tIns="0" rIns="0" bIns="0" rtlCol="0" anchor="ctr"/>
+          <a:lstStyle/>
+          <a:p>
+            <a:pPr algn="ctr" indent="0" marL="0">
+              <a:buNone/>
+            </a:pPr>
+            <a:r>
+              <a:rPr lang="en-US" sz="1200" b="1" dirty="0">
+                <a:solidFill>
+                  <a:srgbClr val="FFFFFF"/>
+                </a:solidFill>
+                <a:latin typeface="Times New Roman" pitchFamily="34" charset="0"/>
+                <a:ea typeface="Times New Roman" pitchFamily="34" charset="-122"/>
+                <a:cs typeface="Times New Roman" pitchFamily="34" charset="-120"/>
+              </a:rPr>
+              <a:t>4</a:t>
+            </a:r>
+            <a:endParaRPr lang="en-US" sz="1200" dirty="0"/>
+          </a:p>
+        </p:txBody>
+      </p:sp>
+      <p:sp>
+        <p:nvSpPr>
+          <p:cNvPr id="22" name="Text 20"/>
+          <p:cNvSpPr txBox="1"/>
+          <p:nvPr/>
+        </p:nvSpPr>
+        <p:spPr>
+          <a:xfrm>
+            <a:off x="1280160" y="4425696"/>
+            <a:ext cx="3108960" cy="713232"/>
+          </a:xfrm>
+          <a:prstGeom prst="rect">
+            <a:avLst/>
+          </a:prstGeom>
+          <a:noFill/>
+          <a:ln/>
+        </p:spPr>
+        <p:txBody>
+          <a:bodyPr wrap="square" lIns="0" tIns="0" rIns="0" bIns="0" rtlCol="0" anchor="ctr"/>
+          <a:lstStyle/>
+          <a:p>
+            <a:pPr indent="0" marL="0">
+              <a:buNone/>
+            </a:pPr>
+            <a:r>
+              <a:rPr lang="en-US" sz="1200" b="1" dirty="0">
+                <a:solidFill>
+                  <a:srgbClr val="152238"/>
+                </a:solidFill>
+                <a:latin typeface="Microsoft YaHei" pitchFamily="34" charset="0"/>
+                <a:ea typeface="Microsoft YaHei" pitchFamily="34" charset="-122"/>
+                <a:cs typeface="Microsoft YaHei" pitchFamily="34" charset="-120"/>
+              </a:rPr>
+              <a:t>一机一点更稳也更松</a:t>
+            </a:r>
+            <a:endParaRPr lang="en-US" sz="1200" dirty="0"/>
+          </a:p>
+        </p:txBody>
+      </p:sp>
+      <p:sp>
+        <p:nvSpPr>
+          <p:cNvPr id="23" name="Text 21"/>
+          <p:cNvSpPr txBox="1"/>
+          <p:nvPr/>
+        </p:nvSpPr>
+        <p:spPr>
+          <a:xfrm>
+            <a:off x="4480560" y="4425696"/>
+            <a:ext cx="6976872" cy="713232"/>
+          </a:xfrm>
+          <a:prstGeom prst="rect">
+            <a:avLst/>
+          </a:prstGeom>
+          <a:noFill/>
+          <a:ln/>
+        </p:spPr>
+        <p:txBody>
+          <a:bodyPr wrap="square" lIns="0" tIns="0" rIns="0" bIns="0" rtlCol="0" anchor="ctr"/>
+          <a:lstStyle/>
+          <a:p>
+            <a:pPr indent="0" marL="0">
+              <a:lnSpc>
+                <a:spcPct val="120000"/>
+              </a:lnSpc>
+              <a:buNone/>
+            </a:pPr>
+            <a:r>
+              <a:rPr lang="en-US" sz="1050" dirty="0">
+                <a:solidFill>
+                  <a:srgbClr val="1A1A1A"/>
+                </a:solidFill>
+                <a:latin typeface="Microsoft YaHei" pitchFamily="34" charset="0"/>
+                <a:ea typeface="Microsoft YaHei" pitchFamily="34" charset="-122"/>
+                <a:cs typeface="Microsoft YaHei" pitchFamily="34" charset="-120"/>
+              </a:rPr>
+              <a:t>Cw1 决策区覆盖率比 Cw 高 0.04 到 0.24，平均下界低 0.2 到 1.7，无信息界最多 0.9%。校准点少的代价。</a:t>
+            </a:r>
+            <a:endParaRPr lang="en-US" sz="1050" dirty="0"/>
+          </a:p>
+        </p:txBody>
+      </p:sp>
+      <p:sp>
+        <p:nvSpPr>
+          <p:cNvPr id="24" name="Shape 22"/>
+          <p:cNvSpPr/>
+          <p:nvPr/>
+        </p:nvSpPr>
+        <p:spPr>
+          <a:xfrm>
+            <a:off x="548640" y="5321808"/>
+            <a:ext cx="11091672" cy="896112"/>
+          </a:xfrm>
+          <a:prstGeom prst="rect">
+            <a:avLst/>
+          </a:prstGeom>
+          <a:solidFill>
+            <a:srgbClr val="F4F7FA"/>
+          </a:solidFill>
+          <a:ln w="12700">
+            <a:solidFill>
+              <a:srgbClr val="F4F7FA"/>
+            </a:solidFill>
+            <a:prstDash val="solid"/>
+          </a:ln>
+        </p:spPr>
+      </p:sp>
+      <p:sp>
+        <p:nvSpPr>
+          <p:cNvPr id="25" name="Shape 23"/>
+          <p:cNvSpPr/>
+          <p:nvPr/>
+        </p:nvSpPr>
+        <p:spPr>
+          <a:xfrm>
+            <a:off x="749808" y="5577840"/>
+            <a:ext cx="365760" cy="365760"/>
+          </a:xfrm>
+          <a:prstGeom prst="ellipse">
+            <a:avLst/>
+          </a:prstGeom>
+          <a:solidFill>
+            <a:srgbClr val="2E4A6B"/>
+          </a:solidFill>
+          <a:ln w="12700">
+            <a:solidFill>
+              <a:srgbClr val="2E4A6B"/>
+            </a:solidFill>
+            <a:prstDash val="solid"/>
+          </a:ln>
+        </p:spPr>
+      </p:sp>
+      <p:sp>
+        <p:nvSpPr>
+          <p:cNvPr id="26" name="Text 24"/>
+          <p:cNvSpPr txBox="1"/>
+          <p:nvPr/>
+        </p:nvSpPr>
+        <p:spPr>
+          <a:xfrm>
+            <a:off x="749808" y="5577840"/>
+            <a:ext cx="365760" cy="365760"/>
+          </a:xfrm>
+          <a:prstGeom prst="rect">
+            <a:avLst/>
+          </a:prstGeom>
+          <a:noFill/>
+          <a:ln/>
+        </p:spPr>
+        <p:txBody>
+          <a:bodyPr wrap="square" lIns="0" tIns="0" rIns="0" bIns="0" rtlCol="0" anchor="ctr"/>
+          <a:lstStyle/>
+          <a:p>
+            <a:pPr algn="ctr" indent="0" marL="0">
+              <a:buNone/>
+            </a:pPr>
+            <a:r>
+              <a:rPr lang="en-US" sz="1200" b="1" dirty="0">
+                <a:solidFill>
+                  <a:srgbClr val="FFFFFF"/>
+                </a:solidFill>
+                <a:latin typeface="Times New Roman" pitchFamily="34" charset="0"/>
+                <a:ea typeface="Times New Roman" pitchFamily="34" charset="-122"/>
+                <a:cs typeface="Times New Roman" pitchFamily="34" charset="-120"/>
+              </a:rPr>
+              <a:t>5</a:t>
+            </a:r>
+            <a:endParaRPr lang="en-US" sz="1200" dirty="0"/>
+          </a:p>
+        </p:txBody>
+      </p:sp>
+      <p:sp>
+        <p:nvSpPr>
+          <p:cNvPr id="27" name="Text 25"/>
+          <p:cNvSpPr txBox="1"/>
+          <p:nvPr/>
+        </p:nvSpPr>
+        <p:spPr>
+          <a:xfrm>
+            <a:off x="1280160" y="5413248"/>
+            <a:ext cx="3108960" cy="713232"/>
+          </a:xfrm>
+          <a:prstGeom prst="rect">
+            <a:avLst/>
+          </a:prstGeom>
+          <a:noFill/>
+          <a:ln/>
+        </p:spPr>
+        <p:txBody>
+          <a:bodyPr wrap="square" lIns="0" tIns="0" rIns="0" bIns="0" rtlCol="0" anchor="ctr"/>
+          <a:lstStyle/>
+          <a:p>
+            <a:pPr indent="0" marL="0">
+              <a:buNone/>
+            </a:pPr>
+            <a:r>
+              <a:rPr lang="en-US" sz="1200" b="1" dirty="0">
+                <a:solidFill>
+                  <a:srgbClr val="152238"/>
+                </a:solidFill>
+                <a:latin typeface="Microsoft YaHei" pitchFamily="34" charset="0"/>
+                <a:ea typeface="Microsoft YaHei" pitchFamily="34" charset="-122"/>
+                <a:cs typeface="Microsoft YaHei" pitchFamily="34" charset="-120"/>
+              </a:rPr>
+              <a:t>A 在 60% 时不可信</a:t>
+            </a:r>
+            <a:endParaRPr lang="en-US" sz="1200" dirty="0"/>
+          </a:p>
+        </p:txBody>
+      </p:sp>
+      <p:sp>
+        <p:nvSpPr>
+          <p:cNvPr id="28" name="Text 26"/>
+          <p:cNvSpPr txBox="1"/>
+          <p:nvPr/>
+        </p:nvSpPr>
+        <p:spPr>
+          <a:xfrm>
+            <a:off x="4480560" y="5413248"/>
+            <a:ext cx="6976872" cy="713232"/>
+          </a:xfrm>
+          <a:prstGeom prst="rect">
+            <a:avLst/>
+          </a:prstGeom>
+          <a:noFill/>
+          <a:ln/>
+        </p:spPr>
+        <p:txBody>
+          <a:bodyPr wrap="square" lIns="0" tIns="0" rIns="0" bIns="0" rtlCol="0" anchor="ctr"/>
+          <a:lstStyle/>
+          <a:p>
+            <a:pPr indent="0" marL="0">
+              <a:lnSpc>
+                <a:spcPct val="120000"/>
+              </a:lnSpc>
+              <a:buNone/>
+            </a:pPr>
+            <a:r>
+              <a:rPr lang="en-US" sz="1050" dirty="0">
+                <a:solidFill>
+                  <a:srgbClr val="1A1A1A"/>
+                </a:solidFill>
+                <a:latin typeface="Microsoft YaHei" pitchFamily="34" charset="0"/>
+                <a:ea typeface="Microsoft YaHei" pitchFamily="34" charset="-122"/>
+                <a:cs typeface="Microsoft YaHei" pitchFamily="34" charset="-120"/>
+              </a:rPr>
+              <a:t>校准折只剩 16 台失效机，它的数字不进论文。校准折保留发动机 40 台这一列没有拦住它，因为拦的是 C 方法。</a:t>
+            </a:r>
+            <a:endParaRPr lang="en-US" sz="1050" dirty="0"/>
+          </a:p>
+        </p:txBody>
+      </p:sp>
+      <p:sp>
+        <p:nvSpPr>
+          <p:cNvPr id="29" name="Text 27"/>
+          <p:cNvSpPr txBox="1"/>
+          <p:nvPr/>
+        </p:nvSpPr>
+        <p:spPr>
+          <a:xfrm>
+            <a:off x="548640" y="6355080"/>
+            <a:ext cx="11091672" cy="320040"/>
+          </a:xfrm>
+          <a:prstGeom prst="rect">
+            <a:avLst/>
+          </a:prstGeom>
+          <a:noFill/>
+          <a:ln/>
+        </p:spPr>
+        <p:txBody>
+          <a:bodyPr wrap="square" lIns="0" tIns="0" rIns="0" bIns="0" rtlCol="0" anchor="ctr"/>
+          <a:lstStyle/>
+          <a:p>
+            <a:pPr indent="0" marL="0">
+              <a:buNone/>
+            </a:pPr>
+            <a:r>
+              <a:rPr lang="en-US" sz="1000" dirty="0">
+                <a:solidFill>
+                  <a:srgbClr val="6E7A8A"/>
+                </a:solidFill>
+                <a:latin typeface="Microsoft YaHei" pitchFamily="34" charset="0"/>
+                <a:ea typeface="Microsoft YaHei" pitchFamily="34" charset="-122"/>
+                <a:cs typeface="Microsoft YaHei" pitchFamily="34" charset="-120"/>
+              </a:rPr>
+              <a:t>以上数字都来自 results/s03_methods.csv 与 logs/s03.txt，删失为人工构造（Type-I，与寿命独立）。下一步：按 m̂(x) &lt; c0 分组的 Mondrian 校准。</a:t>
+            </a:r>
+            <a:endParaRPr lang="en-US" sz="1000" dirty="0"/>
+          </a:p>
+        </p:txBody>
+      </p:sp>
+      <p:sp>
+        <p:nvSpPr>
+          <p:cNvPr id="30" name="Text 28"/>
+          <p:cNvSpPr txBox="1"/>
+          <p:nvPr/>
+        </p:nvSpPr>
+        <p:spPr>
+          <a:xfrm>
+            <a:off x="11274552" y="6473952"/>
+            <a:ext cx="457200" cy="274320"/>
+          </a:xfrm>
+          <a:prstGeom prst="rect">
+            <a:avLst/>
+          </a:prstGeom>
+          <a:noFill/>
+          <a:ln/>
+        </p:spPr>
+        <p:txBody>
+          <a:bodyPr wrap="square" lIns="0" tIns="0" rIns="0" bIns="0" rtlCol="0" anchor="ctr"/>
+          <a:lstStyle/>
+          <a:p>
+            <a:pPr algn="r" indent="0" marL="0">
+              <a:buNone/>
+            </a:pPr>
+            <a:r>
+              <a:rPr lang="en-US" sz="1000" dirty="0">
+                <a:solidFill>
+                  <a:srgbClr val="9FB2C9"/>
+                </a:solidFill>
+                <a:latin typeface="Times New Roman" pitchFamily="34" charset="0"/>
+                <a:ea typeface="Times New Roman" pitchFamily="34" charset="-122"/>
+                <a:cs typeface="Times New Roman" pitchFamily="34" charset="-120"/>
+              </a:rPr>
+              <a:t>21</a:t>
+            </a:r>
+            <a:endParaRPr lang="en-US" sz="1000" dirty="0"/>
+          </a:p>
+        </p:txBody>
+      </p:sp>
+    </p:spTree>
+  </p:cSld>
+  <p:clrMapOvr>
+    <a:masterClrMapping/>
+  </p:clrMapOvr>
+</p:sld>
+</file>
+
+<file path=ppt/slides/slide22.xml><?xml version="1.0" encoding="utf-8"?>
+<p:sld xmlns:a="http://schemas.openxmlformats.org/drawingml/2006/main" xmlns:r="http://schemas.openxmlformats.org/officeDocument/2006/relationships" xmlns:p="http://schemas.openxmlformats.org/presentationml/2006/main">
+  <p:cSld name="Slide 22">
+    <p:bg>
+      <p:bgPr>
+        <a:solidFill>
+          <a:srgbClr val="152238"/>
+        </a:solidFill>
+      </p:bgPr>
+    </p:bg>
+    <p:spTree>
+      <p:nvGrpSpPr>
+        <p:cNvPr id="1" name=""/>
+        <p:cNvGrpSpPr/>
+        <p:nvPr/>
+      </p:nvGrpSpPr>
+      <p:grpSpPr>
+        <a:xfrm>
+          <a:off x="0" y="0"/>
+          <a:ext cx="0" cy="0"/>
+          <a:chOff x="0" y="0"/>
+          <a:chExt cx="0" cy="0"/>
+        </a:xfrm>
+      </p:grpSpPr>
+      <p:sp>
+        <p:nvSpPr>
+          <p:cNvPr id="2" name="Text 0"/>
+          <p:cNvSpPr txBox="1"/>
+          <p:nvPr/>
+        </p:nvSpPr>
+        <p:spPr>
+          <a:xfrm>
+            <a:off x="548640" y="411480"/>
+            <a:ext cx="9144000" cy="640080"/>
+          </a:xfrm>
+          <a:prstGeom prst="rect">
+            <a:avLst/>
+          </a:prstGeom>
+          <a:noFill/>
+          <a:ln/>
+        </p:spPr>
+        <p:txBody>
+          <a:bodyPr wrap="square" lIns="0" tIns="0" rIns="0" bIns="0" rtlCol="0" anchor="ctr"/>
+          <a:lstStyle/>
+          <a:p>
+            <a:pPr indent="0" marL="0">
+              <a:buNone/>
+            </a:pPr>
+            <a:r>
+              <a:rPr lang="en-US" sz="2600" b="1" dirty="0">
+                <a:solidFill>
+                  <a:srgbClr val="FFFFFF"/>
+                </a:solidFill>
+                <a:latin typeface="Microsoft YaHei" pitchFamily="34" charset="0"/>
+                <a:ea typeface="Microsoft YaHei" pitchFamily="34" charset="-122"/>
+                <a:cs typeface="Microsoft YaHei" pitchFamily="34" charset="-120"/>
+              </a:rPr>
+              <a:t>作业与下次课</a:t>
+            </a:r>
+            <a:endParaRPr lang="en-US" sz="2600" dirty="0"/>
+          </a:p>
+        </p:txBody>
+      </p:sp>
+      <p:sp>
+        <p:nvSpPr>
+          <p:cNvPr id="3" name="Shape 1"/>
+          <p:cNvSpPr/>
+          <p:nvPr/>
+        </p:nvSpPr>
+        <p:spPr>
+          <a:xfrm>
+            <a:off x="548640" y="1280160"/>
+            <a:ext cx="11091672" cy="960120"/>
+          </a:xfrm>
+          <a:prstGeom prst="rect">
+            <a:avLst/>
+          </a:prstGeom>
+          <a:solidFill>
+            <a:srgbClr val="1F3352"/>
+          </a:solidFill>
+          <a:ln w="12700">
+            <a:solidFill>
+              <a:srgbClr val="1F3352"/>
+            </a:solidFill>
+            <a:prstDash val="solid"/>
+          </a:ln>
+        </p:spPr>
+      </p:sp>
+      <p:sp>
+        <p:nvSpPr>
+          <p:cNvPr id="4" name="Text 2"/>
+          <p:cNvSpPr txBox="1"/>
+          <p:nvPr/>
+        </p:nvSpPr>
+        <p:spPr>
+          <a:xfrm>
+            <a:off x="822960" y="1280160"/>
+            <a:ext cx="1280160" cy="960120"/>
+          </a:xfrm>
+          <a:prstGeom prst="rect">
+            <a:avLst/>
+          </a:prstGeom>
+          <a:noFill/>
+          <a:ln/>
+        </p:spPr>
+        <p:txBody>
+          <a:bodyPr wrap="square" lIns="0" tIns="0" rIns="0" bIns="0" rtlCol="0" anchor="ctr"/>
+          <a:lstStyle/>
+          <a:p>
+            <a:pPr indent="0" marL="0">
+              <a:buNone/>
+            </a:pPr>
+            <a:r>
+              <a:rPr lang="en-US" sz="1400" b="1" dirty="0">
+                <a:solidFill>
+                  <a:srgbClr val="F2C46D"/>
+                </a:solidFill>
+                <a:latin typeface="Microsoft YaHei" pitchFamily="34" charset="0"/>
+                <a:ea typeface="Microsoft YaHei" pitchFamily="34" charset="-122"/>
+                <a:cs typeface="Microsoft YaHei" pitchFamily="34" charset="-120"/>
+              </a:rPr>
+              <a:t>作业一</a:t>
+            </a:r>
+            <a:endParaRPr lang="en-US" sz="1400" dirty="0"/>
+          </a:p>
+        </p:txBody>
+      </p:sp>
+      <p:sp>
+        <p:nvSpPr>
+          <p:cNvPr id="5" name="Text 3"/>
+          <p:cNvSpPr txBox="1"/>
+          <p:nvPr/>
+        </p:nvSpPr>
+        <p:spPr>
+          <a:xfrm>
+            <a:off x="2286000" y="1280160"/>
+            <a:ext cx="9079992" cy="960120"/>
+          </a:xfrm>
+          <a:prstGeom prst="rect">
+            <a:avLst/>
+          </a:prstGeom>
+          <a:noFill/>
+          <a:ln/>
+        </p:spPr>
+        <p:txBody>
+          <a:bodyPr wrap="square" lIns="0" tIns="0" rIns="0" bIns="0" rtlCol="0" anchor="ctr"/>
+          <a:lstStyle/>
+          <a:p>
+            <a:pPr indent="0" marL="0">
+              <a:lnSpc>
+                <a:spcPct val="125000"/>
+              </a:lnSpc>
+              <a:buNone/>
+            </a:pPr>
+            <a:r>
+              <a:rPr lang="en-US" sz="1200" dirty="0">
+                <a:solidFill>
+                  <a:srgbClr val="DCE7F2"/>
+                </a:solidFill>
+                <a:latin typeface="Microsoft YaHei" pitchFamily="34" charset="0"/>
+                <a:ea typeface="Microsoft YaHei" pitchFamily="34" charset="-122"/>
+                <a:cs typeface="Microsoft YaHei" pitchFamily="34" charset="-120"/>
+              </a:rPr>
+              <a:t>五个脚本跑通（四个 Python 一个 R），控制台输出和图贴到群里，按移交文档第 9 节的顺序。跑不通的贴报错，不要自己改代码。</a:t>
+            </a:r>
+            <a:endParaRPr lang="en-US" sz="1200" dirty="0"/>
+          </a:p>
+        </p:txBody>
+      </p:sp>
+      <p:sp>
+        <p:nvSpPr>
+          <p:cNvPr id="6" name="Shape 4"/>
+          <p:cNvSpPr/>
+          <p:nvPr/>
+        </p:nvSpPr>
+        <p:spPr>
+          <a:xfrm>
+            <a:off x="548640" y="2377440"/>
+            <a:ext cx="11091672" cy="960120"/>
+          </a:xfrm>
+          <a:prstGeom prst="rect">
+            <a:avLst/>
+          </a:prstGeom>
+          <a:solidFill>
+            <a:srgbClr val="1F3352"/>
+          </a:solidFill>
+          <a:ln w="12700">
+            <a:solidFill>
+              <a:srgbClr val="1F3352"/>
+            </a:solidFill>
+            <a:prstDash val="solid"/>
+          </a:ln>
+        </p:spPr>
+      </p:sp>
+      <p:sp>
+        <p:nvSpPr>
+          <p:cNvPr id="7" name="Text 5"/>
+          <p:cNvSpPr txBox="1"/>
+          <p:nvPr/>
+        </p:nvSpPr>
+        <p:spPr>
+          <a:xfrm>
+            <a:off x="822960" y="2377440"/>
+            <a:ext cx="1280160" cy="960120"/>
+          </a:xfrm>
+          <a:prstGeom prst="rect">
+            <a:avLst/>
+          </a:prstGeom>
+          <a:noFill/>
+          <a:ln/>
+        </p:spPr>
+        <p:txBody>
+          <a:bodyPr wrap="square" lIns="0" tIns="0" rIns="0" bIns="0" rtlCol="0" anchor="ctr"/>
+          <a:lstStyle/>
+          <a:p>
+            <a:pPr indent="0" marL="0">
+              <a:buNone/>
+            </a:pPr>
+            <a:r>
+              <a:rPr lang="en-US" sz="1400" b="1" dirty="0">
+                <a:solidFill>
+                  <a:srgbClr val="F2C46D"/>
+                </a:solidFill>
+                <a:latin typeface="Microsoft YaHei" pitchFamily="34" charset="0"/>
+                <a:ea typeface="Microsoft YaHei" pitchFamily="34" charset="-122"/>
+                <a:cs typeface="Microsoft YaHei" pitchFamily="34" charset="-120"/>
+              </a:rPr>
+              <a:t>作业二</a:t>
+            </a:r>
+            <a:endParaRPr lang="en-US" sz="1400" dirty="0"/>
+          </a:p>
+        </p:txBody>
+      </p:sp>
+      <p:sp>
+        <p:nvSpPr>
+          <p:cNvPr id="8" name="Text 6"/>
+          <p:cNvSpPr txBox="1"/>
+          <p:nvPr/>
+        </p:nvSpPr>
+        <p:spPr>
+          <a:xfrm>
+            <a:off x="2286000" y="2377440"/>
+            <a:ext cx="9079992" cy="960120"/>
+          </a:xfrm>
+          <a:prstGeom prst="rect">
+            <a:avLst/>
+          </a:prstGeom>
+          <a:noFill/>
+          <a:ln/>
+        </p:spPr>
+        <p:txBody>
+          <a:bodyPr wrap="square" lIns="0" tIns="0" rIns="0" bIns="0" rtlCol="0" anchor="ctr"/>
+          <a:lstStyle/>
+          <a:p>
+            <a:pPr indent="0" marL="0">
+              <a:lnSpc>
+                <a:spcPct val="125000"/>
+              </a:lnSpc>
+              <a:buNone/>
+            </a:pPr>
+            <a:r>
+              <a:rPr lang="en-US" sz="1200" dirty="0">
+                <a:solidFill>
+                  <a:srgbClr val="DCE7F2"/>
+                </a:solidFill>
+                <a:latin typeface="Microsoft YaHei" pitchFamily="34" charset="0"/>
+                <a:ea typeface="Microsoft YaHei" pitchFamily="34" charset="-122"/>
+                <a:cs typeface="Microsoft YaHei" pitchFamily="34" charset="-120"/>
+              </a:rPr>
+              <a:t>看 s03 的核算表，回答：60% 删失率那一档要不要保留。理由只能是“校准折保留发动机”那一列的数。</a:t>
+            </a:r>
+            <a:endParaRPr lang="en-US" sz="1200" dirty="0"/>
+          </a:p>
+        </p:txBody>
+      </p:sp>
+      <p:sp>
+        <p:nvSpPr>
+          <p:cNvPr id="9" name="Shape 7"/>
+          <p:cNvSpPr/>
+          <p:nvPr/>
+        </p:nvSpPr>
+        <p:spPr>
+          <a:xfrm>
+            <a:off x="548640" y="3474720"/>
+            <a:ext cx="11091672" cy="960120"/>
+          </a:xfrm>
+          <a:prstGeom prst="rect">
+            <a:avLst/>
+          </a:prstGeom>
+          <a:solidFill>
+            <a:srgbClr val="1F3352"/>
+          </a:solidFill>
+          <a:ln w="12700">
+            <a:solidFill>
+              <a:srgbClr val="1F3352"/>
+            </a:solidFill>
+            <a:prstDash val="solid"/>
+          </a:ln>
+        </p:spPr>
+      </p:sp>
+      <p:sp>
+        <p:nvSpPr>
+          <p:cNvPr id="10" name="Text 8"/>
+          <p:cNvSpPr txBox="1"/>
+          <p:nvPr/>
+        </p:nvSpPr>
+        <p:spPr>
+          <a:xfrm>
+            <a:off x="822960" y="3474720"/>
+            <a:ext cx="1280160" cy="960120"/>
+          </a:xfrm>
+          <a:prstGeom prst="rect">
+            <a:avLst/>
+          </a:prstGeom>
+          <a:noFill/>
+          <a:ln/>
+        </p:spPr>
+        <p:txBody>
+          <a:bodyPr wrap="square" lIns="0" tIns="0" rIns="0" bIns="0" rtlCol="0" anchor="ctr"/>
+          <a:lstStyle/>
+          <a:p>
+            <a:pPr indent="0" marL="0">
+              <a:buNone/>
+            </a:pPr>
+            <a:r>
+              <a:rPr lang="en-US" sz="1400" b="1" dirty="0">
+                <a:solidFill>
+                  <a:srgbClr val="F2C46D"/>
+                </a:solidFill>
+                <a:latin typeface="Microsoft YaHei" pitchFamily="34" charset="0"/>
+                <a:ea typeface="Microsoft YaHei" pitchFamily="34" charset="-122"/>
+                <a:cs typeface="Microsoft YaHei" pitchFamily="34" charset="-120"/>
+              </a:rPr>
+              <a:t>作业三</a:t>
+            </a:r>
+            <a:endParaRPr lang="en-US" sz="1400" dirty="0"/>
+          </a:p>
+        </p:txBody>
+      </p:sp>
+      <p:sp>
+        <p:nvSpPr>
+          <p:cNvPr id="11" name="Text 9"/>
+          <p:cNvSpPr txBox="1"/>
+          <p:nvPr/>
+        </p:nvSpPr>
+        <p:spPr>
+          <a:xfrm>
+            <a:off x="2286000" y="3474720"/>
+            <a:ext cx="9079992" cy="960120"/>
+          </a:xfrm>
+          <a:prstGeom prst="rect">
+            <a:avLst/>
+          </a:prstGeom>
+          <a:noFill/>
+          <a:ln/>
+        </p:spPr>
+        <p:txBody>
+          <a:bodyPr wrap="square" lIns="0" tIns="0" rIns="0" bIns="0" rtlCol="0" anchor="ctr"/>
+          <a:lstStyle/>
+          <a:p>
+            <a:pPr indent="0" marL="0">
+              <a:lnSpc>
+                <a:spcPct val="125000"/>
+              </a:lnSpc>
+              <a:buNone/>
+            </a:pPr>
+            <a:r>
+              <a:rPr lang="en-US" sz="1200" dirty="0">
+                <a:solidFill>
+                  <a:srgbClr val="DCE7F2"/>
+                </a:solidFill>
+                <a:latin typeface="Microsoft YaHei" pitchFamily="34" charset="0"/>
+                <a:ea typeface="Microsoft YaHei" pitchFamily="34" charset="-122"/>
+                <a:cs typeface="Microsoft YaHei" pitchFamily="34" charset="-120"/>
+              </a:rPr>
+              <a:t>对比 s03 结果表里 Cu 和 Cw 的 cov_dec，用一句话解释差从哪来。答案在第 5 页。再对比 Cw 和 Cw1 的 mean_L，说这是谁的代价。</a:t>
+            </a:r>
+            <a:endParaRPr lang="en-US" sz="1200" dirty="0"/>
+          </a:p>
+        </p:txBody>
+      </p:sp>
+      <p:sp>
+        <p:nvSpPr>
+          <p:cNvPr id="12" name="Text 10"/>
+          <p:cNvSpPr txBox="1"/>
+          <p:nvPr/>
+        </p:nvSpPr>
+        <p:spPr>
+          <a:xfrm>
+            <a:off x="548640" y="4709160"/>
+            <a:ext cx="3657600" cy="365760"/>
+          </a:xfrm>
+          <a:prstGeom prst="rect">
+            <a:avLst/>
+          </a:prstGeom>
+          <a:noFill/>
+          <a:ln/>
+        </p:spPr>
+        <p:txBody>
+          <a:bodyPr wrap="square" lIns="0" tIns="0" rIns="0" bIns="0" rtlCol="0" anchor="ctr"/>
+          <a:lstStyle/>
+          <a:p>
+            <a:pPr indent="0" marL="0">
+              <a:buNone/>
+            </a:pPr>
+            <a:r>
+              <a:rPr lang="en-US" sz="1500" b="1" dirty="0">
+                <a:solidFill>
+                  <a:srgbClr val="FFFFFF"/>
+                </a:solidFill>
+                <a:latin typeface="Microsoft YaHei" pitchFamily="34" charset="0"/>
+                <a:ea typeface="Microsoft YaHei" pitchFamily="34" charset="-122"/>
+                <a:cs typeface="Microsoft YaHei" pitchFamily="34" charset="-120"/>
+              </a:rPr>
+              <a:t>下次课</a:t>
+            </a:r>
+            <a:endParaRPr lang="en-US" sz="1500" dirty="0"/>
+          </a:p>
+        </p:txBody>
+      </p:sp>
+      <p:sp>
+        <p:nvSpPr>
+          <p:cNvPr id="13" name="Text 11"/>
+          <p:cNvSpPr txBox="1"/>
+          <p:nvPr/>
+        </p:nvSpPr>
+        <p:spPr>
+          <a:xfrm>
+            <a:off x="548640" y="5120640"/>
+            <a:ext cx="11091672" cy="1554480"/>
+          </a:xfrm>
+          <a:prstGeom prst="rect">
+            <a:avLst/>
+          </a:prstGeom>
+          <a:noFill/>
+          <a:ln/>
+        </p:spPr>
+        <p:txBody>
+          <a:bodyPr wrap="square" lIns="0" tIns="0" rIns="0" bIns="0" rtlCol="0" anchor="t"/>
+          <a:lstStyle/>
+          <a:p>
+            <a:pPr indent="0" marL="0">
+              <a:lnSpc>
+                <a:spcPct val="130000"/>
+              </a:lnSpc>
+              <a:spcAft>
+                <a:spcPts val="300"/>
+              </a:spcAft>
+              <a:buNone/>
+            </a:pPr>
+            <a:r>
+              <a:rPr lang="en-US" sz="1150" dirty="0">
+                <a:solidFill>
+                  <a:srgbClr val="9FB2C9"/>
+                </a:solidFill>
+                <a:latin typeface="Microsoft YaHei" pitchFamily="34" charset="0"/>
+                <a:ea typeface="Microsoft YaHei" pitchFamily="34" charset="-122"/>
+                <a:cs typeface="Microsoft YaHei" pitchFamily="34" charset="-120"/>
+              </a:rPr>
+              <a:t>先对作业二、作业三的答案。</a:t>
+            </a:r>
+            <a:endParaRPr lang="en-US" sz="1150" dirty="0"/>
+          </a:p>
+          <a:p>
+            <a:pPr indent="0" marL="0">
+              <a:lnSpc>
+                <a:spcPct val="130000"/>
+              </a:lnSpc>
+              <a:spcAft>
+                <a:spcPts val="300"/>
+              </a:spcAft>
+              <a:buNone/>
+            </a:pPr>
+            <a:r>
+              <a:rPr lang="en-US" sz="1150" dirty="0">
+                <a:solidFill>
+                  <a:srgbClr val="9FB2C9"/>
+                </a:solidFill>
+                <a:latin typeface="Microsoft YaHei" pitchFamily="34" charset="0"/>
+                <a:ea typeface="Microsoft YaHei" pitchFamily="34" charset="-122"/>
+                <a:cs typeface="Microsoft YaHei" pitchFamily="34" charset="-120"/>
+              </a:rPr>
+              <a:t>按预测值分组做 Mondrian 校准：校准集按 m̂(x) &lt; c0 与否分两组各取分位数，让决策区有自己的保证。这是对“总体达标、决策区不达标”最直接的处理。</a:t>
+            </a:r>
+            <a:endParaRPr lang="en-US" sz="1150" dirty="0"/>
+          </a:p>
+          <a:p>
+            <a:pPr indent="0" marL="0">
+              <a:lnSpc>
+                <a:spcPct val="130000"/>
+              </a:lnSpc>
+              <a:spcAft>
+                <a:spcPts val="300"/>
+              </a:spcAft>
+              <a:buNone/>
+            </a:pPr>
+            <a:r>
+              <a:rPr lang="en-US" sz="1150" dirty="0">
+                <a:solidFill>
+                  <a:srgbClr val="9FB2C9"/>
+                </a:solidFill>
+                <a:latin typeface="Microsoft YaHei" pitchFamily="34" charset="0"/>
+                <a:ea typeface="Microsoft YaHei" pitchFamily="34" charset="-122"/>
+                <a:cs typeface="Microsoft YaHei" pitchFamily="34" charset="-120"/>
+              </a:rPr>
+              <a:t>把 FD002 与 FD004 合起来用（509 台，6 种工况），让下线时刻分布随工况变化，做依赖协变量的删失。</a:t>
+            </a:r>
+            <a:endParaRPr lang="en-US" sz="1150" dirty="0"/>
+          </a:p>
+          <a:p>
+            <a:pPr indent="0" marL="0">
+              <a:lnSpc>
+                <a:spcPct val="130000"/>
+              </a:lnSpc>
+              <a:spcAft>
+                <a:spcPts val="300"/>
+              </a:spcAft>
+              <a:buNone/>
+            </a:pPr>
+            <a:r>
+              <a:rPr lang="en-US" sz="1150" dirty="0">
+                <a:solidFill>
+                  <a:srgbClr val="9FB2C9"/>
+                </a:solidFill>
+                <a:latin typeface="Microsoft YaHei" pitchFamily="34" charset="0"/>
+                <a:ea typeface="Microsoft YaHei" pitchFamily="34" charset="-122"/>
+                <a:cs typeface="Microsoft YaHei" pitchFamily="34" charset="-120"/>
+              </a:rPr>
+              <a:t>把点预测换成分位数回归，做 CQR 版本的下界，看紧度提升多少。c0 怎么选：论文一的做法是在训练折里留一块试。</a:t>
+            </a:r>
+            <a:endParaRPr lang="en-US" sz="1150" dirty="0"/>
           </a:p>
         </p:txBody>
       </p:sp>

--- a/RUL_censored_conformal_handover/01_slides/第二次课_从想法到能跑的东西.pptx
+++ b/RUL_censored_conformal_handover/01_slides/第二次课_从想法到能跑的东西.pptx
@@ -2900,7 +2900,7 @@
                 <a:ea typeface="Microsoft YaHei" pitchFamily="34" charset="-122"/>
                 <a:cs typeface="Microsoft YaHei" pitchFamily="34" charset="-120"/>
               </a:rPr>
-              <a:t>工具：Python 3.10 跑管线，R 4.5 出图；五个脚本，结果只在控制台打印并落盘到 results/</a:t>
+              <a:t>工具：Python 3.10，五个脚本；管线与出图都是 Python，结果只在控制台打印并落盘到 results/</a:t>
             </a:r>
             <a:endParaRPr lang="en-US" sz="1350" dirty="0"/>
           </a:p>
@@ -9669,7 +9669,7 @@
                 <a:ea typeface="Microsoft YaHei" pitchFamily="34" charset="-122"/>
                 <a:cs typeface="Microsoft YaHei" pitchFamily="34" charset="-120"/>
               </a:rPr>
-              <a:t>打印 Python 与 numpy / pandas / scikit-learn 版本，Rscript 是否在 PATH，宋体与 Times New Roman 字体文件是否存在，FD001 三个文件是否齐全。</a:t>
+              <a:t>打印 Python 与 numpy / pandas / scikit-learn / matplotlib 版本，宋体与 Times New Roman 字体文件是否存在，FD001 三个文件是否齐全。</a:t>
             </a:r>
             <a:endParaRPr lang="en-US" sz="1000" dirty="0"/>
           </a:p>
@@ -9753,7 +9753,7 @@
                 <a:ea typeface="Microsoft YaHei" pitchFamily="34" charset="-122"/>
                 <a:cs typeface="Microsoft YaHei" pitchFamily="34" charset="-120"/>
               </a:rPr>
-              <a:t>三个包有版本号；Rscript 找得到；两个字体都“有”</a:t>
+              <a:t>四个包有版本号；两个字体都“有”</a:t>
             </a:r>
             <a:endParaRPr lang="en-US" sz="1000" dirty="0"/>
           </a:p>
@@ -10760,7 +10760,7 @@
                 <a:ea typeface="Courier New" pitchFamily="34" charset="-122"/>
                 <a:cs typeface="Courier New" pitchFamily="34" charset="-120"/>
               </a:rPr>
-              <a:t>s04_figures.R</a:t>
+              <a:t>s04_figures.py</a:t>
             </a:r>
             <a:endParaRPr lang="en-US" sz="1200" dirty="0"/>
           </a:p>
@@ -10841,7 +10841,7 @@
                 <a:ea typeface="Microsoft YaHei" pitchFamily="34" charset="-122"/>
                 <a:cs typeface="Microsoft YaHei" pitchFamily="34" charset="-120"/>
               </a:rPr>
-              <a:t>读 results/ 的 CSV 出 11 张图到 figures/，宋体五号，Times New Roman 五号，PNG 与 PDF 各一份。</a:t>
+              <a:t>matplotlib 读 results/ 的 CSV 出 11 张图到 figures/，宋体五号，Times New Roman 五号，PNG 与 PDF 各一份。</a:t>
             </a:r>
             <a:endParaRPr lang="en-US" sz="1000" dirty="0"/>
           </a:p>
@@ -10925,7 +10925,7 @@
                 <a:ea typeface="Microsoft YaHei" pitchFamily="34" charset="-122"/>
                 <a:cs typeface="Microsoft YaHei" pitchFamily="34" charset="-120"/>
               </a:rPr>
-              <a:t>22 个文件；日志无“回退到系统字体”；F07 到 F09 目视无乱码</a:t>
+              <a:t>22 个文件；日志无“回退到替代字体”；F07 到 F09 目视无乱码</a:t>
             </a:r>
             <a:endParaRPr lang="en-US" sz="1000" dirty="0"/>
           </a:p>
@@ -11106,7 +11106,7 @@
                 <a:ea typeface="Microsoft YaHei" pitchFamily="34" charset="-122"/>
                 <a:cs typeface="Microsoft YaHei" pitchFamily="34" charset="-120"/>
               </a:rPr>
-              <a:t>s04_figures.R 生成，宋体五号，Times New Roman 五号，PNG 与 PDF 各一份；只出这 11 张，不自行加图</a:t>
+              <a:t>s04_figures.py 用 matplotlib 生成，宋体五号，Times New Roman 五号，PNG 与 PDF 各一份；只出这 11 张，不自行加图</a:t>
             </a:r>
             <a:endParaRPr lang="en-US" sz="1200" dirty="0"/>
           </a:p>
@@ -12849,7 +12849,7 @@
                 <a:ea typeface="Microsoft YaHei" pitchFamily="34" charset="-122"/>
                 <a:cs typeface="Microsoft YaHei" pitchFamily="34" charset="-120"/>
               </a:rPr>
-              <a:t>FD001，Python 3.11，numpy 2.4，pandas 3.0，scikit-learn 1.9；五个脚本全部退出码 0</a:t>
+              <a:t>FD001，Python 3.11，numpy 2.4，pandas 3.0，scikit-learn 1.9，matplotlib 3.11；五个脚本全部退出码 0</a:t>
             </a:r>
             <a:endParaRPr lang="en-US" sz="1200" dirty="0"/>
           </a:p>
@@ -15903,7 +15903,7 @@
                 <a:ea typeface="Microsoft YaHei" pitchFamily="34" charset="-122"/>
                 <a:cs typeface="Microsoft YaHei" pitchFamily="34" charset="-120"/>
               </a:rPr>
-              <a:t>图为 Linux 预览版（替代字体 Liberation Serif 与文泉驿）。论文用图在 Windows 上重跑 s04 即为宋体五号与 Times New Roman 五号。删失为人工构造。</a:t>
+              <a:t>图为 Linux 预览版（替代字体 Liberation Serif 与文泉驿）。论文用图在 Windows 上重跑 s04_figures.py 即为宋体五号与 Times New Roman 五号。删失为人工构造。</a:t>
             </a:r>
             <a:endParaRPr lang="en-US" sz="900" dirty="0"/>
           </a:p>
@@ -18209,7 +18209,7 @@
                 <a:ea typeface="Microsoft YaHei" pitchFamily="34" charset="-122"/>
                 <a:cs typeface="Microsoft YaHei" pitchFamily="34" charset="-120"/>
               </a:rPr>
-              <a:t>图为 Linux 预览版（替代字体 Liberation Serif 与文泉驿）。论文用图在 Windows 上重跑 s04 即为宋体五号与 Times New Roman 五号。删失为人工构造。</a:t>
+              <a:t>图为 Linux 预览版（替代字体 Liberation Serif 与文泉驿）。论文用图在 Windows 上重跑 s04_figures.py 即为宋体五号与 Times New Roman 五号。删失为人工构造。</a:t>
             </a:r>
             <a:endParaRPr lang="en-US" sz="900" dirty="0"/>
           </a:p>
@@ -18656,7 +18656,7 @@
                 <a:ea typeface="Microsoft YaHei" pitchFamily="34" charset="-122"/>
                 <a:cs typeface="Microsoft YaHei" pitchFamily="34" charset="-120"/>
               </a:rPr>
-              <a:t>图为 Linux 预览版（替代字体 Liberation Serif 与文泉驿）。论文用图在 Windows 上重跑 s04 即为宋体五号与 Times New Roman 五号。删失为人工构造。</a:t>
+              <a:t>图为 Linux 预览版（替代字体 Liberation Serif 与文泉驿）。论文用图在 Windows 上重跑 s04_figures.py 即为宋体五号与 Times New Roman 五号。删失为人工构造。</a:t>
             </a:r>
             <a:endParaRPr lang="en-US" sz="900" dirty="0"/>
           </a:p>
@@ -19797,7 +19797,7 @@
                 <a:ea typeface="Microsoft YaHei" pitchFamily="34" charset="-122"/>
                 <a:cs typeface="Microsoft YaHei" pitchFamily="34" charset="-120"/>
               </a:rPr>
-              <a:t>图为 Linux 预览版（替代字体 Liberation Serif 与文泉驿）。论文用图在 Windows 上重跑 s04 即为宋体五号与 Times New Roman 五号。删失为人工构造。</a:t>
+              <a:t>图为 Linux 预览版（替代字体 Liberation Serif 与文泉驿）。论文用图在 Windows 上重跑 s04_figures.py 即为宋体五号与 Times New Roman 五号。删失为人工构造。</a:t>
             </a:r>
             <a:endParaRPr lang="en-US" sz="900" dirty="0"/>
           </a:p>
@@ -21044,7 +21044,7 @@
                 <a:ea typeface="Microsoft YaHei" pitchFamily="34" charset="-122"/>
                 <a:cs typeface="Microsoft YaHei" pitchFamily="34" charset="-120"/>
               </a:rPr>
-              <a:t>五个脚本跑通（四个 Python 一个 R），控制台输出和图贴到群里，按移交文档第 9 节的顺序。跑不通的贴报错，不要自己改代码。</a:t>
+              <a:t>五个 Python 脚本跑通，控制台输出和图贴到群里，按移交文档第 9 节的顺序。跑不通的贴报错，不要自己改代码。</a:t>
             </a:r>
             <a:endParaRPr lang="en-US" sz="1200" dirty="0"/>
           </a:p>
